--- a/analise/Growth_Set_Out_2026_por_bandeira.pptx
+++ b/analise/Growth_Set_Out_2026_por_bandeira.pptx
@@ -54,6 +54,7 @@
     <p:sldId id="302" r:id="rId53"/>
     <p:sldId id="303" r:id="rId54"/>
     <p:sldId id="304" r:id="rId55"/>
+    <p:sldId id="305" r:id="rId56"/>
   </p:sldIdLst>
   <p:sldSz cx="9144000" cy="5143500" type="screen4x3"/>
   <p:notesSz cx="6858000" cy="9144000"/>
@@ -8472,7 +8473,1050 @@
                 <a:cs typeface="Montserrat"/>
                 <a:sym typeface="Montserrat"/>
               </a:rPr>
-              <a:t>Funil de outubro não é comparável</a:t>
+              <a:t>Nemu confirma bots e checkout subcontado</a:t>
+            </a:r>
+          </a:p>
+        </p:txBody>
+      </p:sp>
+      <p:cxnSp>
+        <p:nvCxnSpPr>
+          <p:cNvPr id="3" name="Connector 2"/>
+          <p:cNvCxnSpPr/>
+          <p:nvPr/>
+        </p:nvCxnSpPr>
+        <p:spPr>
+          <a:xfrm>
+            <a:off x="411480" y="932688"/>
+            <a:ext cx="8247887" cy="0"/>
+          </a:xfrm>
+          <a:prstGeom prst="line">
+            <a:avLst/>
+          </a:prstGeom>
+          <a:ln w="19050">
+            <a:solidFill>
+              <a:srgbClr val="EFEFEF"/>
+            </a:solidFill>
+          </a:ln>
+          <a:effectLst/>
+        </p:spPr>
+      </p:cxnSp>
+      <p:sp>
+        <p:nvSpPr>
+          <p:cNvPr id="4" name="TextBox 3"/>
+          <p:cNvSpPr txBox="1"/>
+          <p:nvPr/>
+        </p:nvSpPr>
+        <p:spPr>
+          <a:xfrm>
+            <a:off x="411480" y="1197864"/>
+            <a:ext cx="8458200" cy="2523744"/>
+          </a:xfrm>
+          <a:prstGeom prst="rect">
+            <a:avLst/>
+          </a:prstGeom>
+          <a:noFill/>
+        </p:spPr>
+        <p:txBody>
+          <a:bodyPr wrap="square" lIns="91425" rIns="91425" tIns="91425" bIns="91425">
+            <a:spAutoFit/>
+          </a:bodyPr>
+          <a:lstStyle/>
+          <a:p>
+            <a:pPr algn="l" marL="457200" indent="-292100">
+              <a:spcBef>
+                <a:spcPts val="1400"/>
+              </a:spcBef>
+              <a:spcAft>
+                <a:spcPts val="0"/>
+              </a:spcAft>
+              <a:buClr>
+                <a:srgbClr val="12D000"/>
+              </a:buClr>
+              <a:buSzPts val="1000"/>
+              <a:buFont typeface="Montserrat Medium"/>
+              <a:buChar char="●"/>
+            </a:pPr>
+            <a:r>
+              <a:rPr sz="1300" b="0" i="0">
+                <a:solidFill>
+                  <a:srgbClr val="595959"/>
+                </a:solidFill>
+                <a:latin typeface="Montserrat Medium"/>
+                <a:ea typeface="Montserrat Medium"/>
+                <a:cs typeface="Montserrat Medium"/>
+                <a:sym typeface="Montserrat Medium"/>
+              </a:rPr>
+              <a:t>Em 06/10 (parcial), as visualizações de página já são o dobro da média diária, com menos da metade das de produto: onda de bots.</a:t>
+            </a:r>
+          </a:p>
+          <a:p>
+            <a:pPr algn="l" marL="457200" indent="-292100">
+              <a:spcBef>
+                <a:spcPts val="1400"/>
+              </a:spcBef>
+              <a:spcAft>
+                <a:spcPts val="0"/>
+              </a:spcAft>
+              <a:buClr>
+                <a:srgbClr val="12D000"/>
+              </a:buClr>
+              <a:buSzPts val="1000"/>
+              <a:buFont typeface="Montserrat Medium"/>
+              <a:buChar char="●"/>
+            </a:pPr>
+            <a:r>
+              <a:rPr sz="1300" b="0" i="0">
+                <a:solidFill>
+                  <a:srgbClr val="595959"/>
+                </a:solidFill>
+                <a:latin typeface="Montserrat Medium"/>
+                <a:ea typeface="Montserrat Medium"/>
+                <a:cs typeface="Montserrat Medium"/>
+                <a:sym typeface="Montserrat Medium"/>
+              </a:rPr>
+              <a:t>O checkout (280) é menor que os pedidos de 01 a 05/10 (354 no GA4; 411 no Geral): o evento está subcontado desde 01/10.</a:t>
+            </a:r>
+          </a:p>
+          <a:p>
+            <a:pPr algn="l" marL="457200" indent="-292100">
+              <a:spcBef>
+                <a:spcPts val="1400"/>
+              </a:spcBef>
+              <a:spcAft>
+                <a:spcPts val="0"/>
+              </a:spcAft>
+              <a:buClr>
+                <a:srgbClr val="12D000"/>
+              </a:buClr>
+              <a:buSzPts val="1000"/>
+              <a:buFont typeface="Montserrat Medium"/>
+              <a:buChar char="●"/>
+            </a:pPr>
+            <a:r>
+              <a:rPr sz="1300" b="0" i="0">
+                <a:solidFill>
+                  <a:srgbClr val="595959"/>
+                </a:solidFill>
+                <a:latin typeface="Montserrat Medium"/>
+                <a:ea typeface="Montserrat Medium"/>
+                <a:cs typeface="Montserrat Medium"/>
+                <a:sym typeface="Montserrat Medium"/>
+              </a:rPr>
+              <a:t>Estimativa: cerca de 40% das visualizações de página de 01 a 05/10 não são humanas (219 mil contra cerca de 130 mil esperadas).</a:t>
+            </a:r>
+          </a:p>
+        </p:txBody>
+      </p:sp>
+      <p:sp>
+        <p:nvSpPr>
+          <p:cNvPr id="5" name="TextBox 4"/>
+          <p:cNvSpPr txBox="1"/>
+          <p:nvPr/>
+        </p:nvSpPr>
+        <p:spPr>
+          <a:xfrm>
+            <a:off x="411480" y="4553712"/>
+            <a:ext cx="8458200" cy="310896"/>
+          </a:xfrm>
+          <a:prstGeom prst="rect">
+            <a:avLst/>
+          </a:prstGeom>
+          <a:noFill/>
+        </p:spPr>
+        <p:txBody>
+          <a:bodyPr wrap="square" lIns="91425" rIns="91425" tIns="91425" bIns="91425">
+            <a:spAutoFit/>
+          </a:bodyPr>
+          <a:lstStyle/>
+          <a:p>
+            <a:pPr algn="l">
+              <a:spcBef>
+                <a:spcPts val="0"/>
+              </a:spcBef>
+              <a:spcAft>
+                <a:spcPts val="0"/>
+              </a:spcAft>
+            </a:pPr>
+            <a:r>
+              <a:rPr sz="1000" b="0" i="0">
+                <a:solidFill>
+                  <a:srgbClr val="B7B7B7"/>
+                </a:solidFill>
+                <a:latin typeface="Montserrat Medium"/>
+                <a:ea typeface="Montserrat Medium"/>
+                <a:cs typeface="Montserrat Medium"/>
+                <a:sym typeface="Montserrat Medium"/>
+              </a:rPr>
+              <a:t>Nemu (funil por páginas), GA4 e base Geral | Oscar web, 01 a 06/10</a:t>
+            </a:r>
+          </a:p>
+        </p:txBody>
+      </p:sp>
+      <p:graphicFrame>
+        <p:nvGraphicFramePr>
+          <p:cNvPr id="6" name="Table 5"/>
+          <p:cNvGraphicFramePr>
+            <a:graphicFrameLocks noGrp="1"/>
+          </p:cNvGraphicFramePr>
+          <p:nvPr/>
+        </p:nvGraphicFramePr>
+        <p:xfrm>
+          <a:off x="411480" y="3246120"/>
+          <a:ext cx="8321040" cy="1280160"/>
+        </p:xfrm>
+        <a:graphic>
+          <a:graphicData uri="http://schemas.openxmlformats.org/drawingml/2006/table">
+            <a:tbl>
+              <a:tblPr firstRow="0" bandRow="0" firstCol="0" lastRow="0" lastCol="0" bandCol="0">
+                <a:tableStyleId>{2D5ABB26-0587-4C30-8999-92F81FD0307C}</a:tableStyleId>
+              </a:tblPr>
+              <a:tblGrid>
+                <a:gridCol w="2743200"/>
+                <a:gridCol w="1828800"/>
+                <a:gridCol w="1920240"/>
+                <a:gridCol w="1828800"/>
+              </a:tblGrid>
+              <a:tr h="256032">
+                <a:tc>
+                  <a:txBody>
+                    <a:bodyPr wrap="square"/>
+                    <a:lstStyle/>
+                    <a:p>
+                      <a:pPr algn="l"/>
+                      <a:r>
+                        <a:rPr sz="900" b="1">
+                          <a:solidFill>
+                            <a:srgbClr val="595959"/>
+                          </a:solidFill>
+                          <a:latin typeface="Montserrat"/>
+                          <a:ea typeface="Montserrat"/>
+                          <a:cs typeface="Montserrat"/>
+                          <a:sym typeface="Montserrat"/>
+                        </a:rPr>
+                        <a:t>Etapa (Nemu)</a:t>
+                      </a:r>
+                    </a:p>
+                  </a:txBody>
+                  <a:tcPr marL="45720" marR="45720" marT="18288" marB="18288" anchor="t">
+                    <a:lnL w="0">
+                      <a:noFill/>
+                    </a:lnL>
+                    <a:lnR w="0">
+                      <a:noFill/>
+                    </a:lnR>
+                    <a:lnT w="0">
+                      <a:noFill/>
+                    </a:lnT>
+                    <a:lnB w="9525">
+                      <a:solidFill>
+                        <a:srgbClr val="EFEFEF"/>
+                      </a:solidFill>
+                    </a:lnB>
+                    <a:solidFill>
+                      <a:srgbClr val="F3F3F3"/>
+                    </a:solidFill>
+                  </a:tcPr>
+                </a:tc>
+                <a:tc>
+                  <a:txBody>
+                    <a:bodyPr wrap="square"/>
+                    <a:lstStyle/>
+                    <a:p>
+                      <a:pPr algn="ctr"/>
+                      <a:r>
+                        <a:rPr sz="900" b="1">
+                          <a:solidFill>
+                            <a:srgbClr val="595959"/>
+                          </a:solidFill>
+                          <a:latin typeface="Montserrat"/>
+                          <a:ea typeface="Montserrat"/>
+                          <a:cs typeface="Montserrat"/>
+                          <a:sym typeface="Montserrat"/>
+                        </a:rPr>
+                        <a:t>01 a 05/10</a:t>
+                      </a:r>
+                    </a:p>
+                  </a:txBody>
+                  <a:tcPr marL="45720" marR="45720" marT="18288" marB="18288" anchor="t">
+                    <a:lnL w="0">
+                      <a:noFill/>
+                    </a:lnL>
+                    <a:lnR w="0">
+                      <a:noFill/>
+                    </a:lnR>
+                    <a:lnT w="0">
+                      <a:noFill/>
+                    </a:lnT>
+                    <a:lnB w="9525">
+                      <a:solidFill>
+                        <a:srgbClr val="EFEFEF"/>
+                      </a:solidFill>
+                    </a:lnB>
+                    <a:solidFill>
+                      <a:srgbClr val="F3F3F3"/>
+                    </a:solidFill>
+                  </a:tcPr>
+                </a:tc>
+                <a:tc>
+                  <a:txBody>
+                    <a:bodyPr wrap="square"/>
+                    <a:lstStyle/>
+                    <a:p>
+                      <a:pPr algn="ctr"/>
+                      <a:r>
+                        <a:rPr sz="900" b="1">
+                          <a:solidFill>
+                            <a:srgbClr val="595959"/>
+                          </a:solidFill>
+                          <a:latin typeface="Montserrat"/>
+                          <a:ea typeface="Montserrat"/>
+                          <a:cs typeface="Montserrat"/>
+                          <a:sym typeface="Montserrat"/>
+                        </a:rPr>
+                        <a:t>Média diária 01-05</a:t>
+                      </a:r>
+                    </a:p>
+                  </a:txBody>
+                  <a:tcPr marL="45720" marR="45720" marT="18288" marB="18288" anchor="t">
+                    <a:lnL w="0">
+                      <a:noFill/>
+                    </a:lnL>
+                    <a:lnR w="0">
+                      <a:noFill/>
+                    </a:lnR>
+                    <a:lnT w="0">
+                      <a:noFill/>
+                    </a:lnT>
+                    <a:lnB w="9525">
+                      <a:solidFill>
+                        <a:srgbClr val="EFEFEF"/>
+                      </a:solidFill>
+                    </a:lnB>
+                    <a:solidFill>
+                      <a:srgbClr val="F3F3F3"/>
+                    </a:solidFill>
+                  </a:tcPr>
+                </a:tc>
+                <a:tc>
+                  <a:txBody>
+                    <a:bodyPr wrap="square"/>
+                    <a:lstStyle/>
+                    <a:p>
+                      <a:pPr algn="ctr"/>
+                      <a:r>
+                        <a:rPr sz="900" b="1">
+                          <a:solidFill>
+                            <a:srgbClr val="595959"/>
+                          </a:solidFill>
+                          <a:latin typeface="Montserrat"/>
+                          <a:ea typeface="Montserrat"/>
+                          <a:cs typeface="Montserrat"/>
+                          <a:sym typeface="Montserrat"/>
+                        </a:rPr>
+                        <a:t>06/10 (parcial)</a:t>
+                      </a:r>
+                    </a:p>
+                  </a:txBody>
+                  <a:tcPr marL="45720" marR="45720" marT="18288" marB="18288" anchor="t">
+                    <a:lnL w="0">
+                      <a:noFill/>
+                    </a:lnL>
+                    <a:lnR w="0">
+                      <a:noFill/>
+                    </a:lnR>
+                    <a:lnT w="0">
+                      <a:noFill/>
+                    </a:lnT>
+                    <a:lnB w="9525">
+                      <a:solidFill>
+                        <a:srgbClr val="EFEFEF"/>
+                      </a:solidFill>
+                    </a:lnB>
+                    <a:solidFill>
+                      <a:srgbClr val="F3F3F3"/>
+                    </a:solidFill>
+                  </a:tcPr>
+                </a:tc>
+              </a:tr>
+              <a:tr h="256032">
+                <a:tc>
+                  <a:txBody>
+                    <a:bodyPr wrap="square"/>
+                    <a:lstStyle/>
+                    <a:p>
+                      <a:pPr algn="l"/>
+                      <a:r>
+                        <a:rPr sz="900" b="0">
+                          <a:solidFill>
+                            <a:srgbClr val="595959"/>
+                          </a:solidFill>
+                          <a:latin typeface="Montserrat Medium"/>
+                          <a:ea typeface="Montserrat Medium"/>
+                          <a:cs typeface="Montserrat Medium"/>
+                          <a:sym typeface="Montserrat Medium"/>
+                        </a:rPr>
+                        <a:t>Visualização de página</a:t>
+                      </a:r>
+                    </a:p>
+                  </a:txBody>
+                  <a:tcPr marL="45720" marR="45720" marT="18288" marB="18288" anchor="t">
+                    <a:lnL w="0">
+                      <a:noFill/>
+                    </a:lnL>
+                    <a:lnR w="0">
+                      <a:noFill/>
+                    </a:lnR>
+                    <a:lnT w="0">
+                      <a:noFill/>
+                    </a:lnT>
+                    <a:lnB w="9525">
+                      <a:solidFill>
+                        <a:srgbClr val="EFEFEF"/>
+                      </a:solidFill>
+                    </a:lnB>
+                    <a:noFill/>
+                  </a:tcPr>
+                </a:tc>
+                <a:tc>
+                  <a:txBody>
+                    <a:bodyPr wrap="square"/>
+                    <a:lstStyle/>
+                    <a:p>
+                      <a:pPr algn="ctr"/>
+                      <a:r>
+                        <a:rPr sz="900" b="0">
+                          <a:solidFill>
+                            <a:srgbClr val="595959"/>
+                          </a:solidFill>
+                          <a:latin typeface="Montserrat Medium"/>
+                          <a:ea typeface="Montserrat Medium"/>
+                          <a:cs typeface="Montserrat Medium"/>
+                          <a:sym typeface="Montserrat Medium"/>
+                        </a:rPr>
+                        <a:t>219.226</a:t>
+                      </a:r>
+                    </a:p>
+                  </a:txBody>
+                  <a:tcPr marL="45720" marR="45720" marT="18288" marB="18288" anchor="t">
+                    <a:lnL w="0">
+                      <a:noFill/>
+                    </a:lnL>
+                    <a:lnR w="0">
+                      <a:noFill/>
+                    </a:lnR>
+                    <a:lnT w="0">
+                      <a:noFill/>
+                    </a:lnT>
+                    <a:lnB w="9525">
+                      <a:solidFill>
+                        <a:srgbClr val="EFEFEF"/>
+                      </a:solidFill>
+                    </a:lnB>
+                    <a:noFill/>
+                  </a:tcPr>
+                </a:tc>
+                <a:tc>
+                  <a:txBody>
+                    <a:bodyPr wrap="square"/>
+                    <a:lstStyle/>
+                    <a:p>
+                      <a:pPr algn="ctr"/>
+                      <a:r>
+                        <a:rPr sz="900" b="0">
+                          <a:solidFill>
+                            <a:srgbClr val="595959"/>
+                          </a:solidFill>
+                          <a:latin typeface="Montserrat Medium"/>
+                          <a:ea typeface="Montserrat Medium"/>
+                          <a:cs typeface="Montserrat Medium"/>
+                          <a:sym typeface="Montserrat Medium"/>
+                        </a:rPr>
+                        <a:t>43.845</a:t>
+                      </a:r>
+                    </a:p>
+                  </a:txBody>
+                  <a:tcPr marL="45720" marR="45720" marT="18288" marB="18288" anchor="t">
+                    <a:lnL w="0">
+                      <a:noFill/>
+                    </a:lnL>
+                    <a:lnR w="0">
+                      <a:noFill/>
+                    </a:lnR>
+                    <a:lnT w="0">
+                      <a:noFill/>
+                    </a:lnT>
+                    <a:lnB w="9525">
+                      <a:solidFill>
+                        <a:srgbClr val="EFEFEF"/>
+                      </a:solidFill>
+                    </a:lnB>
+                    <a:noFill/>
+                  </a:tcPr>
+                </a:tc>
+                <a:tc>
+                  <a:txBody>
+                    <a:bodyPr wrap="square"/>
+                    <a:lstStyle/>
+                    <a:p>
+                      <a:pPr algn="ctr"/>
+                      <a:r>
+                        <a:rPr sz="900" b="0">
+                          <a:solidFill>
+                            <a:srgbClr val="595959"/>
+                          </a:solidFill>
+                          <a:latin typeface="Montserrat Medium"/>
+                          <a:ea typeface="Montserrat Medium"/>
+                          <a:cs typeface="Montserrat Medium"/>
+                          <a:sym typeface="Montserrat Medium"/>
+                        </a:rPr>
+                        <a:t>90.962</a:t>
+                      </a:r>
+                    </a:p>
+                  </a:txBody>
+                  <a:tcPr marL="45720" marR="45720" marT="18288" marB="18288" anchor="t">
+                    <a:lnL w="0">
+                      <a:noFill/>
+                    </a:lnL>
+                    <a:lnR w="0">
+                      <a:noFill/>
+                    </a:lnR>
+                    <a:lnT w="0">
+                      <a:noFill/>
+                    </a:lnT>
+                    <a:lnB w="9525">
+                      <a:solidFill>
+                        <a:srgbClr val="EFEFEF"/>
+                      </a:solidFill>
+                    </a:lnB>
+                    <a:noFill/>
+                  </a:tcPr>
+                </a:tc>
+              </a:tr>
+              <a:tr h="256032">
+                <a:tc>
+                  <a:txBody>
+                    <a:bodyPr wrap="square"/>
+                    <a:lstStyle/>
+                    <a:p>
+                      <a:pPr algn="l"/>
+                      <a:r>
+                        <a:rPr sz="900" b="0">
+                          <a:solidFill>
+                            <a:srgbClr val="595959"/>
+                          </a:solidFill>
+                          <a:latin typeface="Montserrat Medium"/>
+                          <a:ea typeface="Montserrat Medium"/>
+                          <a:cs typeface="Montserrat Medium"/>
+                          <a:sym typeface="Montserrat Medium"/>
+                        </a:rPr>
+                        <a:t>Visualização de produto</a:t>
+                      </a:r>
+                    </a:p>
+                  </a:txBody>
+                  <a:tcPr marL="45720" marR="45720" marT="18288" marB="18288" anchor="t">
+                    <a:lnL w="0">
+                      <a:noFill/>
+                    </a:lnL>
+                    <a:lnR w="0">
+                      <a:noFill/>
+                    </a:lnR>
+                    <a:lnT w="0">
+                      <a:noFill/>
+                    </a:lnT>
+                    <a:lnB w="9525">
+                      <a:solidFill>
+                        <a:srgbClr val="EFEFEF"/>
+                      </a:solidFill>
+                    </a:lnB>
+                    <a:noFill/>
+                  </a:tcPr>
+                </a:tc>
+                <a:tc>
+                  <a:txBody>
+                    <a:bodyPr wrap="square"/>
+                    <a:lstStyle/>
+                    <a:p>
+                      <a:pPr algn="ctr"/>
+                      <a:r>
+                        <a:rPr sz="900" b="0">
+                          <a:solidFill>
+                            <a:srgbClr val="595959"/>
+                          </a:solidFill>
+                          <a:latin typeface="Montserrat Medium"/>
+                          <a:ea typeface="Montserrat Medium"/>
+                          <a:cs typeface="Montserrat Medium"/>
+                          <a:sym typeface="Montserrat Medium"/>
+                        </a:rPr>
+                        <a:t>26.343</a:t>
+                      </a:r>
+                    </a:p>
+                  </a:txBody>
+                  <a:tcPr marL="45720" marR="45720" marT="18288" marB="18288" anchor="t">
+                    <a:lnL w="0">
+                      <a:noFill/>
+                    </a:lnL>
+                    <a:lnR w="0">
+                      <a:noFill/>
+                    </a:lnR>
+                    <a:lnT w="0">
+                      <a:noFill/>
+                    </a:lnT>
+                    <a:lnB w="9525">
+                      <a:solidFill>
+                        <a:srgbClr val="EFEFEF"/>
+                      </a:solidFill>
+                    </a:lnB>
+                    <a:noFill/>
+                  </a:tcPr>
+                </a:tc>
+                <a:tc>
+                  <a:txBody>
+                    <a:bodyPr wrap="square"/>
+                    <a:lstStyle/>
+                    <a:p>
+                      <a:pPr algn="ctr"/>
+                      <a:r>
+                        <a:rPr sz="900" b="0">
+                          <a:solidFill>
+                            <a:srgbClr val="595959"/>
+                          </a:solidFill>
+                          <a:latin typeface="Montserrat Medium"/>
+                          <a:ea typeface="Montserrat Medium"/>
+                          <a:cs typeface="Montserrat Medium"/>
+                          <a:sym typeface="Montserrat Medium"/>
+                        </a:rPr>
+                        <a:t>5.269</a:t>
+                      </a:r>
+                    </a:p>
+                  </a:txBody>
+                  <a:tcPr marL="45720" marR="45720" marT="18288" marB="18288" anchor="t">
+                    <a:lnL w="0">
+                      <a:noFill/>
+                    </a:lnL>
+                    <a:lnR w="0">
+                      <a:noFill/>
+                    </a:lnR>
+                    <a:lnT w="0">
+                      <a:noFill/>
+                    </a:lnT>
+                    <a:lnB w="9525">
+                      <a:solidFill>
+                        <a:srgbClr val="EFEFEF"/>
+                      </a:solidFill>
+                    </a:lnB>
+                    <a:noFill/>
+                  </a:tcPr>
+                </a:tc>
+                <a:tc>
+                  <a:txBody>
+                    <a:bodyPr wrap="square"/>
+                    <a:lstStyle/>
+                    <a:p>
+                      <a:pPr algn="ctr"/>
+                      <a:r>
+                        <a:rPr sz="900" b="0">
+                          <a:solidFill>
+                            <a:srgbClr val="595959"/>
+                          </a:solidFill>
+                          <a:latin typeface="Montserrat Medium"/>
+                          <a:ea typeface="Montserrat Medium"/>
+                          <a:cs typeface="Montserrat Medium"/>
+                          <a:sym typeface="Montserrat Medium"/>
+                        </a:rPr>
+                        <a:t>2.175</a:t>
+                      </a:r>
+                    </a:p>
+                  </a:txBody>
+                  <a:tcPr marL="45720" marR="45720" marT="18288" marB="18288" anchor="t">
+                    <a:lnL w="0">
+                      <a:noFill/>
+                    </a:lnL>
+                    <a:lnR w="0">
+                      <a:noFill/>
+                    </a:lnR>
+                    <a:lnT w="0">
+                      <a:noFill/>
+                    </a:lnT>
+                    <a:lnB w="9525">
+                      <a:solidFill>
+                        <a:srgbClr val="EFEFEF"/>
+                      </a:solidFill>
+                    </a:lnB>
+                    <a:noFill/>
+                  </a:tcPr>
+                </a:tc>
+              </a:tr>
+              <a:tr h="256032">
+                <a:tc>
+                  <a:txBody>
+                    <a:bodyPr wrap="square"/>
+                    <a:lstStyle/>
+                    <a:p>
+                      <a:pPr algn="l"/>
+                      <a:r>
+                        <a:rPr sz="900" b="0">
+                          <a:solidFill>
+                            <a:srgbClr val="595959"/>
+                          </a:solidFill>
+                          <a:latin typeface="Montserrat Medium"/>
+                          <a:ea typeface="Montserrat Medium"/>
+                          <a:cs typeface="Montserrat Medium"/>
+                          <a:sym typeface="Montserrat Medium"/>
+                        </a:rPr>
+                        <a:t>Adicionado ao carrinho</a:t>
+                      </a:r>
+                    </a:p>
+                  </a:txBody>
+                  <a:tcPr marL="45720" marR="45720" marT="18288" marB="18288" anchor="t">
+                    <a:lnL w="0">
+                      <a:noFill/>
+                    </a:lnL>
+                    <a:lnR w="0">
+                      <a:noFill/>
+                    </a:lnR>
+                    <a:lnT w="0">
+                      <a:noFill/>
+                    </a:lnT>
+                    <a:lnB w="9525">
+                      <a:solidFill>
+                        <a:srgbClr val="EFEFEF"/>
+                      </a:solidFill>
+                    </a:lnB>
+                    <a:noFill/>
+                  </a:tcPr>
+                </a:tc>
+                <a:tc>
+                  <a:txBody>
+                    <a:bodyPr wrap="square"/>
+                    <a:lstStyle/>
+                    <a:p>
+                      <a:pPr algn="ctr"/>
+                      <a:r>
+                        <a:rPr sz="900" b="0">
+                          <a:solidFill>
+                            <a:srgbClr val="595959"/>
+                          </a:solidFill>
+                          <a:latin typeface="Montserrat Medium"/>
+                          <a:ea typeface="Montserrat Medium"/>
+                          <a:cs typeface="Montserrat Medium"/>
+                          <a:sym typeface="Montserrat Medium"/>
+                        </a:rPr>
+                        <a:t>2.087</a:t>
+                      </a:r>
+                    </a:p>
+                  </a:txBody>
+                  <a:tcPr marL="45720" marR="45720" marT="18288" marB="18288" anchor="t">
+                    <a:lnL w="0">
+                      <a:noFill/>
+                    </a:lnL>
+                    <a:lnR w="0">
+                      <a:noFill/>
+                    </a:lnR>
+                    <a:lnT w="0">
+                      <a:noFill/>
+                    </a:lnT>
+                    <a:lnB w="9525">
+                      <a:solidFill>
+                        <a:srgbClr val="EFEFEF"/>
+                      </a:solidFill>
+                    </a:lnB>
+                    <a:noFill/>
+                  </a:tcPr>
+                </a:tc>
+                <a:tc>
+                  <a:txBody>
+                    <a:bodyPr wrap="square"/>
+                    <a:lstStyle/>
+                    <a:p>
+                      <a:pPr algn="ctr"/>
+                      <a:r>
+                        <a:rPr sz="900" b="0">
+                          <a:solidFill>
+                            <a:srgbClr val="595959"/>
+                          </a:solidFill>
+                          <a:latin typeface="Montserrat Medium"/>
+                          <a:ea typeface="Montserrat Medium"/>
+                          <a:cs typeface="Montserrat Medium"/>
+                          <a:sym typeface="Montserrat Medium"/>
+                        </a:rPr>
+                        <a:t>417</a:t>
+                      </a:r>
+                    </a:p>
+                  </a:txBody>
+                  <a:tcPr marL="45720" marR="45720" marT="18288" marB="18288" anchor="t">
+                    <a:lnL w="0">
+                      <a:noFill/>
+                    </a:lnL>
+                    <a:lnR w="0">
+                      <a:noFill/>
+                    </a:lnR>
+                    <a:lnT w="0">
+                      <a:noFill/>
+                    </a:lnT>
+                    <a:lnB w="9525">
+                      <a:solidFill>
+                        <a:srgbClr val="EFEFEF"/>
+                      </a:solidFill>
+                    </a:lnB>
+                    <a:noFill/>
+                  </a:tcPr>
+                </a:tc>
+                <a:tc>
+                  <a:txBody>
+                    <a:bodyPr wrap="square"/>
+                    <a:lstStyle/>
+                    <a:p>
+                      <a:pPr algn="ctr"/>
+                      <a:r>
+                        <a:rPr sz="900" b="0">
+                          <a:solidFill>
+                            <a:srgbClr val="595959"/>
+                          </a:solidFill>
+                          <a:latin typeface="Montserrat Medium"/>
+                          <a:ea typeface="Montserrat Medium"/>
+                          <a:cs typeface="Montserrat Medium"/>
+                          <a:sym typeface="Montserrat Medium"/>
+                        </a:rPr>
+                        <a:t>184</a:t>
+                      </a:r>
+                    </a:p>
+                  </a:txBody>
+                  <a:tcPr marL="45720" marR="45720" marT="18288" marB="18288" anchor="t">
+                    <a:lnL w="0">
+                      <a:noFill/>
+                    </a:lnL>
+                    <a:lnR w="0">
+                      <a:noFill/>
+                    </a:lnR>
+                    <a:lnT w="0">
+                      <a:noFill/>
+                    </a:lnT>
+                    <a:lnB w="9525">
+                      <a:solidFill>
+                        <a:srgbClr val="EFEFEF"/>
+                      </a:solidFill>
+                    </a:lnB>
+                    <a:noFill/>
+                  </a:tcPr>
+                </a:tc>
+              </a:tr>
+              <a:tr h="256032">
+                <a:tc>
+                  <a:txBody>
+                    <a:bodyPr wrap="square"/>
+                    <a:lstStyle/>
+                    <a:p>
+                      <a:pPr algn="l"/>
+                      <a:r>
+                        <a:rPr sz="900" b="0">
+                          <a:solidFill>
+                            <a:srgbClr val="595959"/>
+                          </a:solidFill>
+                          <a:latin typeface="Montserrat Medium"/>
+                          <a:ea typeface="Montserrat Medium"/>
+                          <a:cs typeface="Montserrat Medium"/>
+                          <a:sym typeface="Montserrat Medium"/>
+                        </a:rPr>
+                        <a:t>Checkout</a:t>
+                      </a:r>
+                    </a:p>
+                  </a:txBody>
+                  <a:tcPr marL="45720" marR="45720" marT="18288" marB="18288" anchor="t">
+                    <a:lnL w="0">
+                      <a:noFill/>
+                    </a:lnL>
+                    <a:lnR w="0">
+                      <a:noFill/>
+                    </a:lnR>
+                    <a:lnT w="0">
+                      <a:noFill/>
+                    </a:lnT>
+                    <a:lnB w="9525">
+                      <a:solidFill>
+                        <a:srgbClr val="EFEFEF"/>
+                      </a:solidFill>
+                    </a:lnB>
+                    <a:noFill/>
+                  </a:tcPr>
+                </a:tc>
+                <a:tc>
+                  <a:txBody>
+                    <a:bodyPr wrap="square"/>
+                    <a:lstStyle/>
+                    <a:p>
+                      <a:pPr algn="ctr"/>
+                      <a:r>
+                        <a:rPr sz="900" b="0">
+                          <a:solidFill>
+                            <a:srgbClr val="595959"/>
+                          </a:solidFill>
+                          <a:latin typeface="Montserrat Medium"/>
+                          <a:ea typeface="Montserrat Medium"/>
+                          <a:cs typeface="Montserrat Medium"/>
+                          <a:sym typeface="Montserrat Medium"/>
+                        </a:rPr>
+                        <a:t>280</a:t>
+                      </a:r>
+                    </a:p>
+                  </a:txBody>
+                  <a:tcPr marL="45720" marR="45720" marT="18288" marB="18288" anchor="t">
+                    <a:lnL w="0">
+                      <a:noFill/>
+                    </a:lnL>
+                    <a:lnR w="0">
+                      <a:noFill/>
+                    </a:lnR>
+                    <a:lnT w="0">
+                      <a:noFill/>
+                    </a:lnT>
+                    <a:lnB w="9525">
+                      <a:solidFill>
+                        <a:srgbClr val="EFEFEF"/>
+                      </a:solidFill>
+                    </a:lnB>
+                    <a:noFill/>
+                  </a:tcPr>
+                </a:tc>
+                <a:tc>
+                  <a:txBody>
+                    <a:bodyPr wrap="square"/>
+                    <a:lstStyle/>
+                    <a:p>
+                      <a:pPr algn="ctr"/>
+                      <a:r>
+                        <a:rPr sz="900" b="0">
+                          <a:solidFill>
+                            <a:srgbClr val="595959"/>
+                          </a:solidFill>
+                          <a:latin typeface="Montserrat Medium"/>
+                          <a:ea typeface="Montserrat Medium"/>
+                          <a:cs typeface="Montserrat Medium"/>
+                          <a:sym typeface="Montserrat Medium"/>
+                        </a:rPr>
+                        <a:t>56</a:t>
+                      </a:r>
+                    </a:p>
+                  </a:txBody>
+                  <a:tcPr marL="45720" marR="45720" marT="18288" marB="18288" anchor="t">
+                    <a:lnL w="0">
+                      <a:noFill/>
+                    </a:lnL>
+                    <a:lnR w="0">
+                      <a:noFill/>
+                    </a:lnR>
+                    <a:lnT w="0">
+                      <a:noFill/>
+                    </a:lnT>
+                    <a:lnB w="9525">
+                      <a:solidFill>
+                        <a:srgbClr val="EFEFEF"/>
+                      </a:solidFill>
+                    </a:lnB>
+                    <a:noFill/>
+                  </a:tcPr>
+                </a:tc>
+                <a:tc>
+                  <a:txBody>
+                    <a:bodyPr wrap="square"/>
+                    <a:lstStyle/>
+                    <a:p>
+                      <a:pPr algn="ctr"/>
+                      <a:r>
+                        <a:rPr sz="900" b="0">
+                          <a:solidFill>
+                            <a:srgbClr val="595959"/>
+                          </a:solidFill>
+                          <a:latin typeface="Montserrat Medium"/>
+                          <a:ea typeface="Montserrat Medium"/>
+                          <a:cs typeface="Montserrat Medium"/>
+                          <a:sym typeface="Montserrat Medium"/>
+                        </a:rPr>
+                        <a:t>24</a:t>
+                      </a:r>
+                    </a:p>
+                  </a:txBody>
+                  <a:tcPr marL="45720" marR="45720" marT="18288" marB="18288" anchor="t">
+                    <a:lnL w="0">
+                      <a:noFill/>
+                    </a:lnL>
+                    <a:lnR w="0">
+                      <a:noFill/>
+                    </a:lnR>
+                    <a:lnT w="0">
+                      <a:noFill/>
+                    </a:lnT>
+                    <a:lnB w="9525">
+                      <a:solidFill>
+                        <a:srgbClr val="EFEFEF"/>
+                      </a:solidFill>
+                    </a:lnB>
+                    <a:noFill/>
+                  </a:tcPr>
+                </a:tc>
+              </a:tr>
+            </a:tbl>
+          </a:graphicData>
+        </a:graphic>
+      </p:graphicFrame>
+    </p:spTree>
+  </p:cSld>
+  <p:clrMapOvr>
+    <a:masterClrMapping/>
+  </p:clrMapOvr>
+</p:sld>
+</file>
+
+<file path=ppt/slides/slide16.xml><?xml version="1.0" encoding="utf-8"?>
+<p:sld xmlns:a="http://schemas.openxmlformats.org/drawingml/2006/main" xmlns:p="http://schemas.openxmlformats.org/presentationml/2006/main" xmlns:r="http://schemas.openxmlformats.org/officeDocument/2006/relationships">
+  <p:cSld>
+    <p:spTree>
+      <p:nvGrpSpPr>
+        <p:cNvPr id="1" name=""/>
+        <p:cNvGrpSpPr/>
+        <p:nvPr/>
+      </p:nvGrpSpPr>
+      <p:grpSpPr/>
+      <p:sp>
+        <p:nvSpPr>
+          <p:cNvPr id="2" name="TextBox 1"/>
+          <p:cNvSpPr txBox="1"/>
+          <p:nvPr/>
+        </p:nvSpPr>
+        <p:spPr>
+          <a:xfrm>
+            <a:off x="301752" y="301752"/>
+            <a:ext cx="8458200" cy="630936"/>
+          </a:xfrm>
+          <a:prstGeom prst="rect">
+            <a:avLst/>
+          </a:prstGeom>
+          <a:noFill/>
+        </p:spPr>
+        <p:txBody>
+          <a:bodyPr wrap="square" lIns="91425" rIns="91425" tIns="91425" bIns="91425">
+            <a:spAutoFit/>
+          </a:bodyPr>
+          <a:lstStyle/>
+          <a:p>
+            <a:pPr algn="l">
+              <a:spcBef>
+                <a:spcPts val="0"/>
+              </a:spcBef>
+              <a:spcAft>
+                <a:spcPts val="0"/>
+              </a:spcAft>
+            </a:pPr>
+            <a:r>
+              <a:rPr sz="2400" b="1" i="0">
+                <a:solidFill>
+                  <a:srgbClr val="595959"/>
+                </a:solidFill>
+                <a:latin typeface="Montserrat"/>
+                <a:ea typeface="Montserrat"/>
+                <a:cs typeface="Montserrat"/>
+                <a:sym typeface="Montserrat"/>
+              </a:rPr>
+              <a:t>Funil estimado: mais intenção por sessão</a:t>
             </a:r>
           </a:p>
         </p:txBody>
@@ -8539,63 +9583,7 @@
                 <a:cs typeface="Montserrat Medium"/>
                 <a:sym typeface="Montserrat Medium"/>
               </a:rPr>
-              <a:t>A coleta de eventos mudou em 01/10: as visualizações de página caíram de cerca de 38 mil para cerca de 3 mil por dia, e início de checkout e informação de entrega caíram mais que o tráfego.</a:t>
-            </a:r>
-          </a:p>
-          <a:p>
-            <a:pPr algn="l" marL="457200" indent="-292100">
-              <a:spcBef>
-                <a:spcPts val="1400"/>
-              </a:spcBef>
-              <a:spcAft>
-                <a:spcPts val="0"/>
-              </a:spcAft>
-              <a:buClr>
-                <a:srgbClr val="12D000"/>
-              </a:buClr>
-              <a:buSzPts val="1000"/>
-              <a:buFont typeface="Montserrat Medium"/>
-              <a:buChar char="●"/>
-            </a:pPr>
-            <a:r>
-              <a:rPr sz="1300" b="0" i="0">
-                <a:solidFill>
-                  <a:srgbClr val="595959"/>
-                </a:solidFill>
-                <a:latin typeface="Montserrat Medium"/>
-                <a:ea typeface="Montserrat Medium"/>
-                <a:cs typeface="Montserrat Medium"/>
-                <a:sym typeface="Montserrat Medium"/>
-              </a:rPr>
-              <a:t>Sem leitura confiável de etapas; sessões, pedidos e origens seguem utilizáveis.</a:t>
-            </a:r>
-          </a:p>
-          <a:p>
-            <a:pPr algn="l" marL="457200" indent="-292100">
-              <a:spcBef>
-                <a:spcPts val="1400"/>
-              </a:spcBef>
-              <a:spcAft>
-                <a:spcPts val="0"/>
-              </a:spcAft>
-              <a:buClr>
-                <a:srgbClr val="12D000"/>
-              </a:buClr>
-              <a:buSzPts val="1000"/>
-              <a:buFont typeface="Montserrat Medium"/>
-              <a:buChar char="●"/>
-            </a:pPr>
-            <a:r>
-              <a:rPr sz="1300" b="0" i="0">
-                <a:solidFill>
-                  <a:srgbClr val="595959"/>
-                </a:solidFill>
-                <a:latin typeface="Montserrat Medium"/>
-                <a:ea typeface="Montserrat Medium"/>
-                <a:cs typeface="Montserrat Medium"/>
-                <a:sym typeface="Montserrat Medium"/>
-              </a:rPr>
-              <a:t>Devemos confirmar com a Tec4U e a Deco o deploy de 30/09 a 01/10.</a:t>
+              <a:t>Sessões por etapa (GA4) contra 24-28/09: produto → carrinho estável (7,1%); sessão → produto cai 7,6 p.p.; mais carrinhos viram compra (33% contra 23%), provável efeito de mix com menos tráfego pago. O checkout não é mensurável.</a:t>
             </a:r>
           </a:p>
         </p:txBody>
@@ -8640,11 +9628,971 @@
                 <a:cs typeface="Montserrat Medium"/>
                 <a:sym typeface="Montserrat Medium"/>
               </a:rPr>
-              <a:t>Base Geral (pedidos e GMV captado), GA4 e planilha de metas | 01 a 05/10 contra 03-07/09 e 24-28/09</a:t>
+              <a:t>GA4 (sessões que chegam a cada etapa) e base Geral | Oscar web, 01 a 05/10 | estimativa; no desktop, muitas compras ocorrem sem evento de carrinho</a:t>
             </a:r>
           </a:p>
         </p:txBody>
       </p:sp>
+      <p:graphicFrame>
+        <p:nvGraphicFramePr>
+          <p:cNvPr id="6" name="Table 5"/>
+          <p:cNvGraphicFramePr>
+            <a:graphicFrameLocks noGrp="1"/>
+          </p:cNvGraphicFramePr>
+          <p:nvPr/>
+        </p:nvGraphicFramePr>
+        <p:xfrm>
+          <a:off x="411480" y="2377440"/>
+          <a:ext cx="8321040" cy="1865376"/>
+        </p:xfrm>
+        <a:graphic>
+          <a:graphicData uri="http://schemas.openxmlformats.org/drawingml/2006/table">
+            <a:tbl>
+              <a:tblPr firstRow="0" bandRow="0" firstCol="0" lastRow="0" lastCol="0" bandCol="0">
+                <a:tableStyleId>{2D5ABB26-0587-4C30-8999-92F81FD0307C}</a:tableStyleId>
+              </a:tblPr>
+              <a:tblGrid>
+                <a:gridCol w="2148840"/>
+                <a:gridCol w="2057400"/>
+                <a:gridCol w="2057400"/>
+                <a:gridCol w="2057400"/>
+              </a:tblGrid>
+              <a:tr h="310896">
+                <a:tc>
+                  <a:txBody>
+                    <a:bodyPr wrap="square"/>
+                    <a:lstStyle/>
+                    <a:p>
+                      <a:pPr algn="l"/>
+                      <a:r>
+                        <a:rPr sz="850" b="1">
+                          <a:solidFill>
+                            <a:srgbClr val="595959"/>
+                          </a:solidFill>
+                          <a:latin typeface="Montserrat"/>
+                          <a:ea typeface="Montserrat"/>
+                          <a:cs typeface="Montserrat"/>
+                          <a:sym typeface="Montserrat"/>
+                        </a:rPr>
+                        <a:t>Etapa (estimada)</a:t>
+                      </a:r>
+                    </a:p>
+                  </a:txBody>
+                  <a:tcPr marL="45720" marR="45720" marT="18288" marB="18288" anchor="t">
+                    <a:lnL w="0">
+                      <a:noFill/>
+                    </a:lnL>
+                    <a:lnR w="0">
+                      <a:noFill/>
+                    </a:lnR>
+                    <a:lnT w="0">
+                      <a:noFill/>
+                    </a:lnT>
+                    <a:lnB w="9525">
+                      <a:solidFill>
+                        <a:srgbClr val="EFEFEF"/>
+                      </a:solidFill>
+                    </a:lnB>
+                    <a:solidFill>
+                      <a:srgbClr val="F3F3F3"/>
+                    </a:solidFill>
+                  </a:tcPr>
+                </a:tc>
+                <a:tc>
+                  <a:txBody>
+                    <a:bodyPr wrap="square"/>
+                    <a:lstStyle/>
+                    <a:p>
+                      <a:pPr algn="ctr"/>
+                      <a:r>
+                        <a:rPr sz="850" b="1">
+                          <a:solidFill>
+                            <a:srgbClr val="595959"/>
+                          </a:solidFill>
+                          <a:latin typeface="Montserrat"/>
+                          <a:ea typeface="Montserrat"/>
+                          <a:cs typeface="Montserrat"/>
+                          <a:sym typeface="Montserrat"/>
+                        </a:rPr>
+                        <a:t>Geral: Out (24-28/09 | Δ)</a:t>
+                      </a:r>
+                    </a:p>
+                  </a:txBody>
+                  <a:tcPr marL="45720" marR="45720" marT="18288" marB="18288" anchor="t">
+                    <a:lnL w="0">
+                      <a:noFill/>
+                    </a:lnL>
+                    <a:lnR w="0">
+                      <a:noFill/>
+                    </a:lnR>
+                    <a:lnT w="0">
+                      <a:noFill/>
+                    </a:lnT>
+                    <a:lnB w="9525">
+                      <a:solidFill>
+                        <a:srgbClr val="EFEFEF"/>
+                      </a:solidFill>
+                    </a:lnB>
+                    <a:solidFill>
+                      <a:srgbClr val="F3F3F3"/>
+                    </a:solidFill>
+                  </a:tcPr>
+                </a:tc>
+                <a:tc>
+                  <a:txBody>
+                    <a:bodyPr wrap="square"/>
+                    <a:lstStyle/>
+                    <a:p>
+                      <a:pPr algn="ctr"/>
+                      <a:r>
+                        <a:rPr sz="850" b="1">
+                          <a:solidFill>
+                            <a:srgbClr val="595959"/>
+                          </a:solidFill>
+                          <a:latin typeface="Montserrat"/>
+                          <a:ea typeface="Montserrat"/>
+                          <a:cs typeface="Montserrat"/>
+                          <a:sym typeface="Montserrat"/>
+                        </a:rPr>
+                        <a:t>Mobile: Out (24-28/09 | Δ)</a:t>
+                      </a:r>
+                    </a:p>
+                  </a:txBody>
+                  <a:tcPr marL="45720" marR="45720" marT="18288" marB="18288" anchor="t">
+                    <a:lnL w="0">
+                      <a:noFill/>
+                    </a:lnL>
+                    <a:lnR w="0">
+                      <a:noFill/>
+                    </a:lnR>
+                    <a:lnT w="0">
+                      <a:noFill/>
+                    </a:lnT>
+                    <a:lnB w="9525">
+                      <a:solidFill>
+                        <a:srgbClr val="EFEFEF"/>
+                      </a:solidFill>
+                    </a:lnB>
+                    <a:solidFill>
+                      <a:srgbClr val="F3F3F3"/>
+                    </a:solidFill>
+                  </a:tcPr>
+                </a:tc>
+                <a:tc>
+                  <a:txBody>
+                    <a:bodyPr wrap="square"/>
+                    <a:lstStyle/>
+                    <a:p>
+                      <a:pPr algn="ctr"/>
+                      <a:r>
+                        <a:rPr sz="850" b="1">
+                          <a:solidFill>
+                            <a:srgbClr val="595959"/>
+                          </a:solidFill>
+                          <a:latin typeface="Montserrat"/>
+                          <a:ea typeface="Montserrat"/>
+                          <a:cs typeface="Montserrat"/>
+                          <a:sym typeface="Montserrat"/>
+                        </a:rPr>
+                        <a:t>Desktop: Out (24-28/09 | Δ)</a:t>
+                      </a:r>
+                    </a:p>
+                  </a:txBody>
+                  <a:tcPr marL="45720" marR="45720" marT="18288" marB="18288" anchor="t">
+                    <a:lnL w="0">
+                      <a:noFill/>
+                    </a:lnL>
+                    <a:lnR w="0">
+                      <a:noFill/>
+                    </a:lnR>
+                    <a:lnT w="0">
+                      <a:noFill/>
+                    </a:lnT>
+                    <a:lnB w="9525">
+                      <a:solidFill>
+                        <a:srgbClr val="EFEFEF"/>
+                      </a:solidFill>
+                    </a:lnB>
+                    <a:solidFill>
+                      <a:srgbClr val="F3F3F3"/>
+                    </a:solidFill>
+                  </a:tcPr>
+                </a:tc>
+              </a:tr>
+              <a:tr h="310896">
+                <a:tc>
+                  <a:txBody>
+                    <a:bodyPr wrap="square"/>
+                    <a:lstStyle/>
+                    <a:p>
+                      <a:pPr algn="l"/>
+                      <a:r>
+                        <a:rPr sz="850" b="0">
+                          <a:solidFill>
+                            <a:srgbClr val="595959"/>
+                          </a:solidFill>
+                          <a:latin typeface="Montserrat Medium"/>
+                          <a:ea typeface="Montserrat Medium"/>
+                          <a:cs typeface="Montserrat Medium"/>
+                          <a:sym typeface="Montserrat Medium"/>
+                        </a:rPr>
+                        <a:t>Sessão → produto</a:t>
+                      </a:r>
+                    </a:p>
+                  </a:txBody>
+                  <a:tcPr marL="45720" marR="45720" marT="18288" marB="18288" anchor="t">
+                    <a:lnL w="0">
+                      <a:noFill/>
+                    </a:lnL>
+                    <a:lnR w="0">
+                      <a:noFill/>
+                    </a:lnR>
+                    <a:lnT w="0">
+                      <a:noFill/>
+                    </a:lnT>
+                    <a:lnB w="9525">
+                      <a:solidFill>
+                        <a:srgbClr val="EFEFEF"/>
+                      </a:solidFill>
+                    </a:lnB>
+                    <a:noFill/>
+                  </a:tcPr>
+                </a:tc>
+                <a:tc>
+                  <a:txBody>
+                    <a:bodyPr wrap="square"/>
+                    <a:lstStyle/>
+                    <a:p>
+                      <a:pPr algn="ctr"/>
+                      <a:r>
+                        <a:rPr sz="850" b="0">
+                          <a:solidFill>
+                            <a:srgbClr val="595959"/>
+                          </a:solidFill>
+                          <a:latin typeface="Montserrat Medium"/>
+                          <a:ea typeface="Montserrat Medium"/>
+                          <a:cs typeface="Montserrat Medium"/>
+                          <a:sym typeface="Montserrat Medium"/>
+                        </a:rPr>
+                        <a:t>60,0% (67,6% | -7,6 p.p.)</a:t>
+                      </a:r>
+                    </a:p>
+                  </a:txBody>
+                  <a:tcPr marL="45720" marR="45720" marT="18288" marB="18288" anchor="t">
+                    <a:lnL w="0">
+                      <a:noFill/>
+                    </a:lnL>
+                    <a:lnR w="0">
+                      <a:noFill/>
+                    </a:lnR>
+                    <a:lnT w="0">
+                      <a:noFill/>
+                    </a:lnT>
+                    <a:lnB w="9525">
+                      <a:solidFill>
+                        <a:srgbClr val="EFEFEF"/>
+                      </a:solidFill>
+                    </a:lnB>
+                    <a:noFill/>
+                  </a:tcPr>
+                </a:tc>
+                <a:tc>
+                  <a:txBody>
+                    <a:bodyPr wrap="square"/>
+                    <a:lstStyle/>
+                    <a:p>
+                      <a:pPr algn="ctr"/>
+                      <a:r>
+                        <a:rPr sz="850" b="0">
+                          <a:solidFill>
+                            <a:srgbClr val="595959"/>
+                          </a:solidFill>
+                          <a:latin typeface="Montserrat Medium"/>
+                          <a:ea typeface="Montserrat Medium"/>
+                          <a:cs typeface="Montserrat Medium"/>
+                          <a:sym typeface="Montserrat Medium"/>
+                        </a:rPr>
+                        <a:t>62,8% (71,6% | -8,9 p.p.)</a:t>
+                      </a:r>
+                    </a:p>
+                  </a:txBody>
+                  <a:tcPr marL="45720" marR="45720" marT="18288" marB="18288" anchor="t">
+                    <a:lnL w="0">
+                      <a:noFill/>
+                    </a:lnL>
+                    <a:lnR w="0">
+                      <a:noFill/>
+                    </a:lnR>
+                    <a:lnT w="0">
+                      <a:noFill/>
+                    </a:lnT>
+                    <a:lnB w="9525">
+                      <a:solidFill>
+                        <a:srgbClr val="EFEFEF"/>
+                      </a:solidFill>
+                    </a:lnB>
+                    <a:noFill/>
+                  </a:tcPr>
+                </a:tc>
+                <a:tc>
+                  <a:txBody>
+                    <a:bodyPr wrap="square"/>
+                    <a:lstStyle/>
+                    <a:p>
+                      <a:pPr algn="ctr"/>
+                      <a:r>
+                        <a:rPr sz="850" b="0">
+                          <a:solidFill>
+                            <a:srgbClr val="595959"/>
+                          </a:solidFill>
+                          <a:latin typeface="Montserrat Medium"/>
+                          <a:ea typeface="Montserrat Medium"/>
+                          <a:cs typeface="Montserrat Medium"/>
+                          <a:sym typeface="Montserrat Medium"/>
+                        </a:rPr>
+                        <a:t>48,6% (50,9% | -2,3 p.p.)</a:t>
+                      </a:r>
+                    </a:p>
+                  </a:txBody>
+                  <a:tcPr marL="45720" marR="45720" marT="18288" marB="18288" anchor="t">
+                    <a:lnL w="0">
+                      <a:noFill/>
+                    </a:lnL>
+                    <a:lnR w="0">
+                      <a:noFill/>
+                    </a:lnR>
+                    <a:lnT w="0">
+                      <a:noFill/>
+                    </a:lnT>
+                    <a:lnB w="9525">
+                      <a:solidFill>
+                        <a:srgbClr val="EFEFEF"/>
+                      </a:solidFill>
+                    </a:lnB>
+                    <a:noFill/>
+                  </a:tcPr>
+                </a:tc>
+              </a:tr>
+              <a:tr h="310896">
+                <a:tc>
+                  <a:txBody>
+                    <a:bodyPr wrap="square"/>
+                    <a:lstStyle/>
+                    <a:p>
+                      <a:pPr algn="l"/>
+                      <a:r>
+                        <a:rPr sz="850" b="0">
+                          <a:solidFill>
+                            <a:srgbClr val="595959"/>
+                          </a:solidFill>
+                          <a:latin typeface="Montserrat Medium"/>
+                          <a:ea typeface="Montserrat Medium"/>
+                          <a:cs typeface="Montserrat Medium"/>
+                          <a:sym typeface="Montserrat Medium"/>
+                        </a:rPr>
+                        <a:t>Produto → carrinho</a:t>
+                      </a:r>
+                    </a:p>
+                  </a:txBody>
+                  <a:tcPr marL="45720" marR="45720" marT="18288" marB="18288" anchor="t">
+                    <a:lnL w="0">
+                      <a:noFill/>
+                    </a:lnL>
+                    <a:lnR w="0">
+                      <a:noFill/>
+                    </a:lnR>
+                    <a:lnT w="0">
+                      <a:noFill/>
+                    </a:lnT>
+                    <a:lnB w="9525">
+                      <a:solidFill>
+                        <a:srgbClr val="EFEFEF"/>
+                      </a:solidFill>
+                    </a:lnB>
+                    <a:noFill/>
+                  </a:tcPr>
+                </a:tc>
+                <a:tc>
+                  <a:txBody>
+                    <a:bodyPr wrap="square"/>
+                    <a:lstStyle/>
+                    <a:p>
+                      <a:pPr algn="ctr"/>
+                      <a:r>
+                        <a:rPr sz="850" b="0">
+                          <a:solidFill>
+                            <a:srgbClr val="595959"/>
+                          </a:solidFill>
+                          <a:latin typeface="Montserrat Medium"/>
+                          <a:ea typeface="Montserrat Medium"/>
+                          <a:cs typeface="Montserrat Medium"/>
+                          <a:sym typeface="Montserrat Medium"/>
+                        </a:rPr>
+                        <a:t>7,1% (7,1% | +0,0 p.p.)</a:t>
+                      </a:r>
+                    </a:p>
+                  </a:txBody>
+                  <a:tcPr marL="45720" marR="45720" marT="18288" marB="18288" anchor="t">
+                    <a:lnL w="0">
+                      <a:noFill/>
+                    </a:lnL>
+                    <a:lnR w="0">
+                      <a:noFill/>
+                    </a:lnR>
+                    <a:lnT w="0">
+                      <a:noFill/>
+                    </a:lnT>
+                    <a:lnB w="9525">
+                      <a:solidFill>
+                        <a:srgbClr val="EFEFEF"/>
+                      </a:solidFill>
+                    </a:lnB>
+                    <a:noFill/>
+                  </a:tcPr>
+                </a:tc>
+                <a:tc>
+                  <a:txBody>
+                    <a:bodyPr wrap="square"/>
+                    <a:lstStyle/>
+                    <a:p>
+                      <a:pPr algn="ctr"/>
+                      <a:r>
+                        <a:rPr sz="850" b="0">
+                          <a:solidFill>
+                            <a:srgbClr val="595959"/>
+                          </a:solidFill>
+                          <a:latin typeface="Montserrat Medium"/>
+                          <a:ea typeface="Montserrat Medium"/>
+                          <a:cs typeface="Montserrat Medium"/>
+                          <a:sym typeface="Montserrat Medium"/>
+                        </a:rPr>
+                        <a:t>6,8% (6,5% | +0,2 p.p.)</a:t>
+                      </a:r>
+                    </a:p>
+                  </a:txBody>
+                  <a:tcPr marL="45720" marR="45720" marT="18288" marB="18288" anchor="t">
+                    <a:lnL w="0">
+                      <a:noFill/>
+                    </a:lnL>
+                    <a:lnR w="0">
+                      <a:noFill/>
+                    </a:lnR>
+                    <a:lnT w="0">
+                      <a:noFill/>
+                    </a:lnT>
+                    <a:lnB w="9525">
+                      <a:solidFill>
+                        <a:srgbClr val="EFEFEF"/>
+                      </a:solidFill>
+                    </a:lnB>
+                    <a:noFill/>
+                  </a:tcPr>
+                </a:tc>
+                <a:tc>
+                  <a:txBody>
+                    <a:bodyPr wrap="square"/>
+                    <a:lstStyle/>
+                    <a:p>
+                      <a:pPr algn="ctr"/>
+                      <a:r>
+                        <a:rPr sz="850" b="0">
+                          <a:solidFill>
+                            <a:srgbClr val="595959"/>
+                          </a:solidFill>
+                          <a:latin typeface="Montserrat Medium"/>
+                          <a:ea typeface="Montserrat Medium"/>
+                          <a:cs typeface="Montserrat Medium"/>
+                          <a:sym typeface="Montserrat Medium"/>
+                        </a:rPr>
+                        <a:t>9,2% (10,9% | -1,6 p.p.)</a:t>
+                      </a:r>
+                    </a:p>
+                  </a:txBody>
+                  <a:tcPr marL="45720" marR="45720" marT="18288" marB="18288" anchor="t">
+                    <a:lnL w="0">
+                      <a:noFill/>
+                    </a:lnL>
+                    <a:lnR w="0">
+                      <a:noFill/>
+                    </a:lnR>
+                    <a:lnT w="0">
+                      <a:noFill/>
+                    </a:lnT>
+                    <a:lnB w="9525">
+                      <a:solidFill>
+                        <a:srgbClr val="EFEFEF"/>
+                      </a:solidFill>
+                    </a:lnB>
+                    <a:noFill/>
+                  </a:tcPr>
+                </a:tc>
+              </a:tr>
+              <a:tr h="310896">
+                <a:tc>
+                  <a:txBody>
+                    <a:bodyPr wrap="square"/>
+                    <a:lstStyle/>
+                    <a:p>
+                      <a:pPr algn="l"/>
+                      <a:r>
+                        <a:rPr sz="850" b="0">
+                          <a:solidFill>
+                            <a:srgbClr val="595959"/>
+                          </a:solidFill>
+                          <a:latin typeface="Montserrat Medium"/>
+                          <a:ea typeface="Montserrat Medium"/>
+                          <a:cs typeface="Montserrat Medium"/>
+                          <a:sym typeface="Montserrat Medium"/>
+                        </a:rPr>
+                        <a:t>Carrinho → checkout (medido, subcontado)</a:t>
+                      </a:r>
+                    </a:p>
+                  </a:txBody>
+                  <a:tcPr marL="45720" marR="45720" marT="18288" marB="18288" anchor="t">
+                    <a:lnL w="0">
+                      <a:noFill/>
+                    </a:lnL>
+                    <a:lnR w="0">
+                      <a:noFill/>
+                    </a:lnR>
+                    <a:lnT w="0">
+                      <a:noFill/>
+                    </a:lnT>
+                    <a:lnB w="9525">
+                      <a:solidFill>
+                        <a:srgbClr val="EFEFEF"/>
+                      </a:solidFill>
+                    </a:lnB>
+                    <a:noFill/>
+                  </a:tcPr>
+                </a:tc>
+                <a:tc>
+                  <a:txBody>
+                    <a:bodyPr wrap="square"/>
+                    <a:lstStyle/>
+                    <a:p>
+                      <a:pPr algn="ctr"/>
+                      <a:r>
+                        <a:rPr sz="850" b="0">
+                          <a:solidFill>
+                            <a:srgbClr val="595959"/>
+                          </a:solidFill>
+                          <a:latin typeface="Montserrat Medium"/>
+                          <a:ea typeface="Montserrat Medium"/>
+                          <a:cs typeface="Montserrat Medium"/>
+                          <a:sym typeface="Montserrat Medium"/>
+                        </a:rPr>
+                        <a:t>53,7% (73,4% | -19,7 p.p.)</a:t>
+                      </a:r>
+                    </a:p>
+                  </a:txBody>
+                  <a:tcPr marL="45720" marR="45720" marT="18288" marB="18288" anchor="t">
+                    <a:lnL w="0">
+                      <a:noFill/>
+                    </a:lnL>
+                    <a:lnR w="0">
+                      <a:noFill/>
+                    </a:lnR>
+                    <a:lnT w="0">
+                      <a:noFill/>
+                    </a:lnT>
+                    <a:lnB w="9525">
+                      <a:solidFill>
+                        <a:srgbClr val="EFEFEF"/>
+                      </a:solidFill>
+                    </a:lnB>
+                    <a:noFill/>
+                  </a:tcPr>
+                </a:tc>
+                <a:tc>
+                  <a:txBody>
+                    <a:bodyPr wrap="square"/>
+                    <a:lstStyle/>
+                    <a:p>
+                      <a:pPr algn="ctr"/>
+                      <a:r>
+                        <a:rPr sz="850" b="0">
+                          <a:solidFill>
+                            <a:srgbClr val="595959"/>
+                          </a:solidFill>
+                          <a:latin typeface="Montserrat Medium"/>
+                          <a:ea typeface="Montserrat Medium"/>
+                          <a:cs typeface="Montserrat Medium"/>
+                          <a:sym typeface="Montserrat Medium"/>
+                        </a:rPr>
+                        <a:t>51,1% (70,2% | -19,1 p.p.)</a:t>
+                      </a:r>
+                    </a:p>
+                  </a:txBody>
+                  <a:tcPr marL="45720" marR="45720" marT="18288" marB="18288" anchor="t">
+                    <a:lnL w="0">
+                      <a:noFill/>
+                    </a:lnL>
+                    <a:lnR w="0">
+                      <a:noFill/>
+                    </a:lnR>
+                    <a:lnT w="0">
+                      <a:noFill/>
+                    </a:lnT>
+                    <a:lnB w="9525">
+                      <a:solidFill>
+                        <a:srgbClr val="EFEFEF"/>
+                      </a:solidFill>
+                    </a:lnB>
+                    <a:noFill/>
+                  </a:tcPr>
+                </a:tc>
+                <a:tc>
+                  <a:txBody>
+                    <a:bodyPr wrap="square"/>
+                    <a:lstStyle/>
+                    <a:p>
+                      <a:pPr algn="ctr"/>
+                      <a:r>
+                        <a:rPr sz="850" b="0">
+                          <a:solidFill>
+                            <a:srgbClr val="595959"/>
+                          </a:solidFill>
+                          <a:latin typeface="Montserrat Medium"/>
+                          <a:ea typeface="Montserrat Medium"/>
+                          <a:cs typeface="Montserrat Medium"/>
+                          <a:sym typeface="Montserrat Medium"/>
+                        </a:rPr>
+                        <a:t>64,0% (84,9% | -20,9 p.p.)</a:t>
+                      </a:r>
+                    </a:p>
+                  </a:txBody>
+                  <a:tcPr marL="45720" marR="45720" marT="18288" marB="18288" anchor="t">
+                    <a:lnL w="0">
+                      <a:noFill/>
+                    </a:lnL>
+                    <a:lnR w="0">
+                      <a:noFill/>
+                    </a:lnR>
+                    <a:lnT w="0">
+                      <a:noFill/>
+                    </a:lnT>
+                    <a:lnB w="9525">
+                      <a:solidFill>
+                        <a:srgbClr val="EFEFEF"/>
+                      </a:solidFill>
+                    </a:lnB>
+                    <a:noFill/>
+                  </a:tcPr>
+                </a:tc>
+              </a:tr>
+              <a:tr h="310896">
+                <a:tc>
+                  <a:txBody>
+                    <a:bodyPr wrap="square"/>
+                    <a:lstStyle/>
+                    <a:p>
+                      <a:pPr algn="l"/>
+                      <a:r>
+                        <a:rPr sz="850" b="0">
+                          <a:solidFill>
+                            <a:srgbClr val="595959"/>
+                          </a:solidFill>
+                          <a:latin typeface="Montserrat Medium"/>
+                          <a:ea typeface="Montserrat Medium"/>
+                          <a:cs typeface="Montserrat Medium"/>
+                          <a:sym typeface="Montserrat Medium"/>
+                        </a:rPr>
+                        <a:t>Carrinho → compra</a:t>
+                      </a:r>
+                    </a:p>
+                  </a:txBody>
+                  <a:tcPr marL="45720" marR="45720" marT="18288" marB="18288" anchor="t">
+                    <a:lnL w="0">
+                      <a:noFill/>
+                    </a:lnL>
+                    <a:lnR w="0">
+                      <a:noFill/>
+                    </a:lnR>
+                    <a:lnT w="0">
+                      <a:noFill/>
+                    </a:lnT>
+                    <a:lnB w="9525">
+                      <a:solidFill>
+                        <a:srgbClr val="EFEFEF"/>
+                      </a:solidFill>
+                    </a:lnB>
+                    <a:noFill/>
+                  </a:tcPr>
+                </a:tc>
+                <a:tc>
+                  <a:txBody>
+                    <a:bodyPr wrap="square"/>
+                    <a:lstStyle/>
+                    <a:p>
+                      <a:pPr algn="ctr"/>
+                      <a:r>
+                        <a:rPr sz="850" b="0">
+                          <a:solidFill>
+                            <a:srgbClr val="595959"/>
+                          </a:solidFill>
+                          <a:latin typeface="Montserrat Medium"/>
+                          <a:ea typeface="Montserrat Medium"/>
+                          <a:cs typeface="Montserrat Medium"/>
+                          <a:sym typeface="Montserrat Medium"/>
+                        </a:rPr>
+                        <a:t>33,3% (23,0% | +10,3 p.p.)</a:t>
+                      </a:r>
+                    </a:p>
+                  </a:txBody>
+                  <a:tcPr marL="45720" marR="45720" marT="18288" marB="18288" anchor="t">
+                    <a:lnL w="0">
+                      <a:noFill/>
+                    </a:lnL>
+                    <a:lnR w="0">
+                      <a:noFill/>
+                    </a:lnR>
+                    <a:lnT w="0">
+                      <a:noFill/>
+                    </a:lnT>
+                    <a:lnB w="9525">
+                      <a:solidFill>
+                        <a:srgbClr val="EFEFEF"/>
+                      </a:solidFill>
+                    </a:lnB>
+                    <a:noFill/>
+                  </a:tcPr>
+                </a:tc>
+                <a:tc>
+                  <a:txBody>
+                    <a:bodyPr wrap="square"/>
+                    <a:lstStyle/>
+                    <a:p>
+                      <a:pPr algn="ctr"/>
+                      <a:r>
+                        <a:rPr sz="850" b="0">
+                          <a:solidFill>
+                            <a:srgbClr val="595959"/>
+                          </a:solidFill>
+                          <a:latin typeface="Montserrat Medium"/>
+                          <a:ea typeface="Montserrat Medium"/>
+                          <a:cs typeface="Montserrat Medium"/>
+                          <a:sym typeface="Montserrat Medium"/>
+                        </a:rPr>
+                        <a:t>17,8% (13,2% | +4,7 p.p.)</a:t>
+                      </a:r>
+                    </a:p>
+                  </a:txBody>
+                  <a:tcPr marL="45720" marR="45720" marT="18288" marB="18288" anchor="t">
+                    <a:lnL w="0">
+                      <a:noFill/>
+                    </a:lnL>
+                    <a:lnR w="0">
+                      <a:noFill/>
+                    </a:lnR>
+                    <a:lnT w="0">
+                      <a:noFill/>
+                    </a:lnT>
+                    <a:lnB w="9525">
+                      <a:solidFill>
+                        <a:srgbClr val="EFEFEF"/>
+                      </a:solidFill>
+                    </a:lnB>
+                    <a:noFill/>
+                  </a:tcPr>
+                </a:tc>
+                <a:tc>
+                  <a:txBody>
+                    <a:bodyPr wrap="square"/>
+                    <a:lstStyle/>
+                    <a:p>
+                      <a:pPr algn="ctr"/>
+                      <a:r>
+                        <a:rPr sz="850" b="0">
+                          <a:solidFill>
+                            <a:srgbClr val="595959"/>
+                          </a:solidFill>
+                          <a:latin typeface="Montserrat Medium"/>
+                          <a:ea typeface="Montserrat Medium"/>
+                          <a:cs typeface="Montserrat Medium"/>
+                          <a:sym typeface="Montserrat Medium"/>
+                        </a:rPr>
+                        <a:t>93,9% (57,4% | +36,5 p.p.)</a:t>
+                      </a:r>
+                    </a:p>
+                  </a:txBody>
+                  <a:tcPr marL="45720" marR="45720" marT="18288" marB="18288" anchor="t">
+                    <a:lnL w="0">
+                      <a:noFill/>
+                    </a:lnL>
+                    <a:lnR w="0">
+                      <a:noFill/>
+                    </a:lnR>
+                    <a:lnT w="0">
+                      <a:noFill/>
+                    </a:lnT>
+                    <a:lnB w="9525">
+                      <a:solidFill>
+                        <a:srgbClr val="EFEFEF"/>
+                      </a:solidFill>
+                    </a:lnB>
+                    <a:noFill/>
+                  </a:tcPr>
+                </a:tc>
+              </a:tr>
+              <a:tr h="310896">
+                <a:tc>
+                  <a:txBody>
+                    <a:bodyPr wrap="square"/>
+                    <a:lstStyle/>
+                    <a:p>
+                      <a:pPr algn="l"/>
+                      <a:r>
+                        <a:rPr sz="850" b="0">
+                          <a:solidFill>
+                            <a:srgbClr val="595959"/>
+                          </a:solidFill>
+                          <a:latin typeface="Montserrat Medium"/>
+                          <a:ea typeface="Montserrat Medium"/>
+                          <a:cs typeface="Montserrat Medium"/>
+                          <a:sym typeface="Montserrat Medium"/>
+                        </a:rPr>
+                        <a:t>Sessão → compra (base Geral)</a:t>
+                      </a:r>
+                    </a:p>
+                  </a:txBody>
+                  <a:tcPr marL="45720" marR="45720" marT="18288" marB="18288" anchor="t">
+                    <a:lnL w="0">
+                      <a:noFill/>
+                    </a:lnL>
+                    <a:lnR w="0">
+                      <a:noFill/>
+                    </a:lnR>
+                    <a:lnT w="0">
+                      <a:noFill/>
+                    </a:lnT>
+                    <a:lnB w="9525">
+                      <a:solidFill>
+                        <a:srgbClr val="EFEFEF"/>
+                      </a:solidFill>
+                    </a:lnB>
+                    <a:noFill/>
+                  </a:tcPr>
+                </a:tc>
+                <a:tc>
+                  <a:txBody>
+                    <a:bodyPr wrap="square"/>
+                    <a:lstStyle/>
+                    <a:p>
+                      <a:pPr algn="ctr"/>
+                      <a:r>
+                        <a:rPr sz="850" b="0">
+                          <a:solidFill>
+                            <a:srgbClr val="595959"/>
+                          </a:solidFill>
+                          <a:latin typeface="Montserrat Medium"/>
+                          <a:ea typeface="Montserrat Medium"/>
+                          <a:cs typeface="Montserrat Medium"/>
+                          <a:sym typeface="Montserrat Medium"/>
+                        </a:rPr>
+                        <a:t>1,48% (1,11% | +0,4 p.p.)</a:t>
+                      </a:r>
+                    </a:p>
+                  </a:txBody>
+                  <a:tcPr marL="45720" marR="45720" marT="18288" marB="18288" anchor="t">
+                    <a:lnL w="0">
+                      <a:noFill/>
+                    </a:lnL>
+                    <a:lnR w="0">
+                      <a:noFill/>
+                    </a:lnR>
+                    <a:lnT w="0">
+                      <a:noFill/>
+                    </a:lnT>
+                    <a:lnB w="9525">
+                      <a:solidFill>
+                        <a:srgbClr val="EFEFEF"/>
+                      </a:solidFill>
+                    </a:lnB>
+                    <a:noFill/>
+                  </a:tcPr>
+                </a:tc>
+                <a:tc>
+                  <a:txBody>
+                    <a:bodyPr wrap="square"/>
+                    <a:lstStyle/>
+                    <a:p>
+                      <a:pPr algn="ctr"/>
+                      <a:r>
+                        <a:rPr sz="850" b="0">
+                          <a:solidFill>
+                            <a:srgbClr val="595959"/>
+                          </a:solidFill>
+                          <a:latin typeface="Montserrat Medium"/>
+                          <a:ea typeface="Montserrat Medium"/>
+                          <a:cs typeface="Montserrat Medium"/>
+                          <a:sym typeface="Montserrat Medium"/>
+                        </a:rPr>
+                        <a:t>0,67% (0,60% | +0,1 p.p.)</a:t>
+                      </a:r>
+                    </a:p>
+                  </a:txBody>
+                  <a:tcPr marL="45720" marR="45720" marT="18288" marB="18288" anchor="t">
+                    <a:lnL w="0">
+                      <a:noFill/>
+                    </a:lnL>
+                    <a:lnR w="0">
+                      <a:noFill/>
+                    </a:lnR>
+                    <a:lnT w="0">
+                      <a:noFill/>
+                    </a:lnT>
+                    <a:lnB w="9525">
+                      <a:solidFill>
+                        <a:srgbClr val="EFEFEF"/>
+                      </a:solidFill>
+                    </a:lnB>
+                    <a:noFill/>
+                  </a:tcPr>
+                </a:tc>
+                <a:tc>
+                  <a:txBody>
+                    <a:bodyPr wrap="square"/>
+                    <a:lstStyle/>
+                    <a:p>
+                      <a:pPr algn="ctr"/>
+                      <a:r>
+                        <a:rPr sz="850" b="0">
+                          <a:solidFill>
+                            <a:srgbClr val="595959"/>
+                          </a:solidFill>
+                          <a:latin typeface="Montserrat Medium"/>
+                          <a:ea typeface="Montserrat Medium"/>
+                          <a:cs typeface="Montserrat Medium"/>
+                          <a:sym typeface="Montserrat Medium"/>
+                        </a:rPr>
+                        <a:t>5,01% (3,30% | +1,7 p.p.)</a:t>
+                      </a:r>
+                    </a:p>
+                  </a:txBody>
+                  <a:tcPr marL="45720" marR="45720" marT="18288" marB="18288" anchor="t">
+                    <a:lnL w="0">
+                      <a:noFill/>
+                    </a:lnL>
+                    <a:lnR w="0">
+                      <a:noFill/>
+                    </a:lnR>
+                    <a:lnT w="0">
+                      <a:noFill/>
+                    </a:lnT>
+                    <a:lnB w="9525">
+                      <a:solidFill>
+                        <a:srgbClr val="EFEFEF"/>
+                      </a:solidFill>
+                    </a:lnB>
+                    <a:noFill/>
+                  </a:tcPr>
+                </a:tc>
+              </a:tr>
+            </a:tbl>
+          </a:graphicData>
+        </a:graphic>
+      </p:graphicFrame>
     </p:spTree>
   </p:cSld>
   <p:clrMapOvr>
@@ -8653,7 +10601,7 @@
 </p:sld>
 </file>
 
-<file path=ppt/slides/slide16.xml><?xml version="1.0" encoding="utf-8"?>
+<file path=ppt/slides/slide17.xml><?xml version="1.0" encoding="utf-8"?>
 <p:sld xmlns:a="http://schemas.openxmlformats.org/drawingml/2006/main" xmlns:p="http://schemas.openxmlformats.org/presentationml/2006/main" xmlns:r="http://schemas.openxmlformats.org/officeDocument/2006/relationships">
   <p:cSld>
     <p:spTree>
@@ -8827,7 +10775,7 @@
                 <a:cs typeface="Montserrat Medium"/>
                 <a:sym typeface="Montserrat Medium"/>
               </a:rPr>
-              <a:t>volume. As sessões estão 40% e 22% abaixo das referências (27,8 mil); a conversão (1,48%) e o ticket (R$ 361) compensam, e o GMV captado se mantém 6% e 11% acima.</a:t>
+              <a:t>volume. As sessões estão 40% e 22% abaixo das referências (27,8 mil); a conversão (1,48%) e o ticket (R$ 361) compensam, em parte por mix (menos tráfego pago e mais direto e CRM), e o GMV captado se mantém 6% e 11% acima.</a:t>
             </a:r>
           </a:p>
           <a:p>
@@ -8883,7 +10831,7 @@
                 <a:cs typeface="Montserrat"/>
                 <a:sym typeface="Montserrat"/>
               </a:rPr>
-              <a:t>Etapas críticas: </a:t>
+              <a:t>Etapas críticas (estimadas): </a:t>
             </a:r>
             <a:r>
               <a:rPr sz="1300" b="0" i="0">
@@ -8895,7 +10843,7 @@
                 <a:cs typeface="Montserrat Medium"/>
                 <a:sym typeface="Montserrat Medium"/>
               </a:rPr>
-              <a:t>sem leitura confiável: a coleta de eventos de checkout mudou em 01/10. Sessões e pedidos seguem utilizáveis.</a:t>
+              <a:t>sessão → produto cai de 67,6% para 60,0% (-7,6 p.p.); produto → carrinho segue estável (7,1%) e mais carrinhos viram compra (33% contra 23%). O checkout não é mensurável: 280 na Nemu, abaixo dos 411 pedidos.</a:t>
             </a:r>
           </a:p>
           <a:p>
@@ -8929,7 +10877,7 @@
                 <a:cs typeface="Montserrat Medium"/>
                 <a:sym typeface="Montserrat Medium"/>
               </a:rPr>
-              <a:t>devemos retomar o tráfego do google / cpc e do Meta Ads, validar a coleta de eventos com a Tec4U e a Deco e manter a alavanca de CRM, que converte a 11% no desktop.</a:t>
+              <a:t>devemos levar mais sessões ao produto, retomar o google / cpc e o Meta Ads, validar com a Tec4U e a Deco o checkout (deploy de 30/09 a 01/10) e pedir à Nemu um filtro de bots.</a:t>
             </a:r>
           </a:p>
         </p:txBody>
@@ -8942,7 +10890,7 @@
 </p:sld>
 </file>
 
-<file path=ppt/slides/slide17.xml><?xml version="1.0" encoding="utf-8"?>
+<file path=ppt/slides/slide18.xml><?xml version="1.0" encoding="utf-8"?>
 <p:sld xmlns:a="http://schemas.openxmlformats.org/drawingml/2006/main" xmlns:p="http://schemas.openxmlformats.org/presentationml/2006/main" xmlns:r="http://schemas.openxmlformats.org/officeDocument/2006/relationships">
   <p:cSld>
     <p:bg>
@@ -9080,7 +11028,7 @@
 </p:sld>
 </file>
 
-<file path=ppt/slides/slide18.xml><?xml version="1.0" encoding="utf-8"?>
+<file path=ppt/slides/slide19.xml><?xml version="1.0" encoding="utf-8"?>
 <p:sld xmlns:a="http://schemas.openxmlformats.org/drawingml/2006/main" xmlns:p="http://schemas.openxmlformats.org/presentationml/2006/main" xmlns:r="http://schemas.openxmlformats.org/officeDocument/2006/relationships">
   <p:cSld>
     <p:spTree>
@@ -9678,1143 +11626,6 @@
                           <a:sym typeface="Montserrat Medium"/>
                         </a:rPr>
                         <a:t>R$ 326.764</a:t>
-                      </a:r>
-                    </a:p>
-                  </a:txBody>
-                  <a:tcPr marL="45720" marR="45720" marT="18288" marB="18288" anchor="t">
-                    <a:lnL w="0">
-                      <a:noFill/>
-                    </a:lnL>
-                    <a:lnR w="0">
-                      <a:noFill/>
-                    </a:lnR>
-                    <a:lnT w="0">
-                      <a:noFill/>
-                    </a:lnT>
-                    <a:lnB w="9525">
-                      <a:solidFill>
-                        <a:srgbClr val="EFEFEF"/>
-                      </a:solidFill>
-                    </a:lnB>
-                    <a:noFill/>
-                  </a:tcPr>
-                </a:tc>
-              </a:tr>
-            </a:tbl>
-          </a:graphicData>
-        </a:graphic>
-      </p:graphicFrame>
-    </p:spTree>
-  </p:cSld>
-  <p:clrMapOvr>
-    <a:masterClrMapping/>
-  </p:clrMapOvr>
-</p:sld>
-</file>
-
-<file path=ppt/slides/slide19.xml><?xml version="1.0" encoding="utf-8"?>
-<p:sld xmlns:a="http://schemas.openxmlformats.org/drawingml/2006/main" xmlns:p="http://schemas.openxmlformats.org/presentationml/2006/main" xmlns:r="http://schemas.openxmlformats.org/officeDocument/2006/relationships">
-  <p:cSld>
-    <p:spTree>
-      <p:nvGrpSpPr>
-        <p:cNvPr id="1" name=""/>
-        <p:cNvGrpSpPr/>
-        <p:nvPr/>
-      </p:nvGrpSpPr>
-      <p:grpSpPr/>
-      <p:sp>
-        <p:nvSpPr>
-          <p:cNvPr id="2" name="TextBox 1"/>
-          <p:cNvSpPr txBox="1"/>
-          <p:nvPr/>
-        </p:nvSpPr>
-        <p:spPr>
-          <a:xfrm>
-            <a:off x="301752" y="301752"/>
-            <a:ext cx="8458200" cy="630936"/>
-          </a:xfrm>
-          <a:prstGeom prst="rect">
-            <a:avLst/>
-          </a:prstGeom>
-          <a:noFill/>
-        </p:spPr>
-        <p:txBody>
-          <a:bodyPr wrap="square" lIns="91425" rIns="91425" tIns="91425" bIns="91425">
-            <a:spAutoFit/>
-          </a:bodyPr>
-          <a:lstStyle/>
-          <a:p>
-            <a:pPr algn="l">
-              <a:spcBef>
-                <a:spcPts val="0"/>
-              </a:spcBef>
-              <a:spcAft>
-                <a:spcPts val="0"/>
-              </a:spcAft>
-            </a:pPr>
-            <a:r>
-              <a:rPr sz="2400" b="1" i="0">
-                <a:solidFill>
-                  <a:srgbClr val="595959"/>
-                </a:solidFill>
-                <a:latin typeface="Montserrat"/>
-                <a:ea typeface="Montserrat"/>
-                <a:cs typeface="Montserrat"/>
-                <a:sym typeface="Montserrat"/>
-              </a:rPr>
-              <a:t>iOS perde mais receita que o Android</a:t>
-            </a:r>
-          </a:p>
-        </p:txBody>
-      </p:sp>
-      <p:cxnSp>
-        <p:nvCxnSpPr>
-          <p:cNvPr id="3" name="Connector 2"/>
-          <p:cNvCxnSpPr/>
-          <p:nvPr/>
-        </p:nvCxnSpPr>
-        <p:spPr>
-          <a:xfrm>
-            <a:off x="411480" y="932688"/>
-            <a:ext cx="8247887" cy="0"/>
-          </a:xfrm>
-          <a:prstGeom prst="line">
-            <a:avLst/>
-          </a:prstGeom>
-          <a:ln w="19050">
-            <a:solidFill>
-              <a:srgbClr val="EFEFEF"/>
-            </a:solidFill>
-          </a:ln>
-          <a:effectLst/>
-        </p:spPr>
-      </p:cxnSp>
-      <p:sp>
-        <p:nvSpPr>
-          <p:cNvPr id="4" name="TextBox 3"/>
-          <p:cNvSpPr txBox="1"/>
-          <p:nvPr/>
-        </p:nvSpPr>
-        <p:spPr>
-          <a:xfrm>
-            <a:off x="411480" y="1197864"/>
-            <a:ext cx="8458200" cy="2523744"/>
-          </a:xfrm>
-          <a:prstGeom prst="rect">
-            <a:avLst/>
-          </a:prstGeom>
-          <a:noFill/>
-        </p:spPr>
-        <p:txBody>
-          <a:bodyPr wrap="square" lIns="91425" rIns="91425" tIns="91425" bIns="91425">
-            <a:spAutoFit/>
-          </a:bodyPr>
-          <a:lstStyle/>
-          <a:p>
-            <a:pPr algn="l">
-              <a:spcBef>
-                <a:spcPts val="1000"/>
-              </a:spcBef>
-              <a:spcAft>
-                <a:spcPts val="0"/>
-              </a:spcAft>
-            </a:pPr>
-            <a:r>
-              <a:rPr sz="1300" b="0" i="0">
-                <a:solidFill>
-                  <a:srgbClr val="595959"/>
-                </a:solidFill>
-                <a:latin typeface="Montserrat Medium"/>
-                <a:ea typeface="Montserrat Medium"/>
-                <a:cs typeface="Montserrat Medium"/>
-                <a:sym typeface="Montserrat Medium"/>
-              </a:rPr>
-              <a:t>Receita captada projetada -R$ 51 mil (-14,8%): iOS -R$ 39 mil (sessões -12%, CVR de 2,26% para 2,05%) e Android -R$ 11 mil (sessões -8%).</a:t>
-            </a:r>
-          </a:p>
-        </p:txBody>
-      </p:sp>
-      <p:sp>
-        <p:nvSpPr>
-          <p:cNvPr id="5" name="TextBox 4"/>
-          <p:cNvSpPr txBox="1"/>
-          <p:nvPr/>
-        </p:nvSpPr>
-        <p:spPr>
-          <a:xfrm>
-            <a:off x="411480" y="4553712"/>
-            <a:ext cx="8458200" cy="310896"/>
-          </a:xfrm>
-          <a:prstGeom prst="rect">
-            <a:avLst/>
-          </a:prstGeom>
-          <a:noFill/>
-        </p:spPr>
-        <p:txBody>
-          <a:bodyPr wrap="square" lIns="91425" rIns="91425" tIns="91425" bIns="91425">
-            <a:spAutoFit/>
-          </a:bodyPr>
-          <a:lstStyle/>
-          <a:p>
-            <a:pPr algn="l">
-              <a:spcBef>
-                <a:spcPts val="0"/>
-              </a:spcBef>
-              <a:spcAft>
-                <a:spcPts val="0"/>
-              </a:spcAft>
-            </a:pPr>
-            <a:r>
-              <a:rPr sz="1000" b="0" i="0">
-                <a:solidFill>
-                  <a:srgbClr val="B7B7B7"/>
-                </a:solidFill>
-                <a:latin typeface="Montserrat Medium"/>
-                <a:ea typeface="Montserrat Medium"/>
-                <a:cs typeface="Montserrat Medium"/>
-                <a:sym typeface="Montserrat Medium"/>
-              </a:rPr>
-              <a:t>Dados do GA4 e planilha de metas | setembro contra agosto; app: CVR e TKM de 01 a 24/09 (compra duplicada desde 25/09)</a:t>
-            </a:r>
-          </a:p>
-        </p:txBody>
-      </p:sp>
-      <p:graphicFrame>
-        <p:nvGraphicFramePr>
-          <p:cNvPr id="6" name="Table 5"/>
-          <p:cNvGraphicFramePr>
-            <a:graphicFrameLocks noGrp="1"/>
-          </p:cNvGraphicFramePr>
-          <p:nvPr/>
-        </p:nvGraphicFramePr>
-        <p:xfrm>
-          <a:off x="411480" y="2240280"/>
-          <a:ext cx="8321040" cy="1536192"/>
-        </p:xfrm>
-        <a:graphic>
-          <a:graphicData uri="http://schemas.openxmlformats.org/drawingml/2006/table">
-            <a:tbl>
-              <a:tblPr firstRow="0" bandRow="0" firstCol="0" lastRow="0" lastCol="0" bandCol="0">
-                <a:tableStyleId>{2D5ABB26-0587-4C30-8999-92F81FD0307C}</a:tableStyleId>
-              </a:tblPr>
-              <a:tblGrid>
-                <a:gridCol w="822960"/>
-                <a:gridCol w="1828800"/>
-                <a:gridCol w="1371600"/>
-                <a:gridCol w="731520"/>
-                <a:gridCol w="1783080"/>
-                <a:gridCol w="1783080"/>
-              </a:tblGrid>
-              <a:tr h="384048">
-                <a:tc>
-                  <a:txBody>
-                    <a:bodyPr wrap="square"/>
-                    <a:lstStyle/>
-                    <a:p>
-                      <a:pPr algn="l"/>
-                      <a:r>
-                        <a:rPr sz="850" b="1">
-                          <a:solidFill>
-                            <a:srgbClr val="595959"/>
-                          </a:solidFill>
-                          <a:latin typeface="Montserrat"/>
-                          <a:ea typeface="Montserrat"/>
-                          <a:cs typeface="Montserrat"/>
-                          <a:sym typeface="Montserrat"/>
-                        </a:rPr>
-                        <a:t>Recorte</a:t>
-                      </a:r>
-                    </a:p>
-                  </a:txBody>
-                  <a:tcPr marL="45720" marR="45720" marT="18288" marB="18288" anchor="t">
-                    <a:lnL w="0">
-                      <a:noFill/>
-                    </a:lnL>
-                    <a:lnR w="0">
-                      <a:noFill/>
-                    </a:lnR>
-                    <a:lnT w="0">
-                      <a:noFill/>
-                    </a:lnT>
-                    <a:lnB w="9525">
-                      <a:solidFill>
-                        <a:srgbClr val="EFEFEF"/>
-                      </a:solidFill>
-                    </a:lnB>
-                    <a:solidFill>
-                      <a:srgbClr val="F3F3F3"/>
-                    </a:solidFill>
-                  </a:tcPr>
-                </a:tc>
-                <a:tc>
-                  <a:txBody>
-                    <a:bodyPr wrap="square"/>
-                    <a:lstStyle/>
-                    <a:p>
-                      <a:pPr algn="ctr"/>
-                      <a:r>
-                        <a:rPr sz="850" b="1">
-                          <a:solidFill>
-                            <a:srgbClr val="595959"/>
-                          </a:solidFill>
-                          <a:latin typeface="Montserrat"/>
-                          <a:ea typeface="Montserrat"/>
-                          <a:cs typeface="Montserrat"/>
-                          <a:sym typeface="Montserrat"/>
-                        </a:rPr>
-                        <a:t>Receita (Ago → Set)</a:t>
-                      </a:r>
-                    </a:p>
-                  </a:txBody>
-                  <a:tcPr marL="45720" marR="45720" marT="18288" marB="18288" anchor="t">
-                    <a:lnL w="0">
-                      <a:noFill/>
-                    </a:lnL>
-                    <a:lnR w="0">
-                      <a:noFill/>
-                    </a:lnR>
-                    <a:lnT w="0">
-                      <a:noFill/>
-                    </a:lnT>
-                    <a:lnB w="9525">
-                      <a:solidFill>
-                        <a:srgbClr val="EFEFEF"/>
-                      </a:solidFill>
-                    </a:lnB>
-                    <a:solidFill>
-                      <a:srgbClr val="F3F3F3"/>
-                    </a:solidFill>
-                  </a:tcPr>
-                </a:tc>
-                <a:tc>
-                  <a:txBody>
-                    <a:bodyPr wrap="square"/>
-                    <a:lstStyle/>
-                    <a:p>
-                      <a:pPr algn="ctr"/>
-                      <a:r>
-                        <a:rPr sz="850" b="1">
-                          <a:solidFill>
-                            <a:srgbClr val="595959"/>
-                          </a:solidFill>
-                          <a:latin typeface="Montserrat"/>
-                          <a:ea typeface="Montserrat"/>
-                          <a:cs typeface="Montserrat"/>
-                          <a:sym typeface="Montserrat"/>
-                        </a:rPr>
-                        <a:t>Δ receita</a:t>
-                      </a:r>
-                    </a:p>
-                  </a:txBody>
-                  <a:tcPr marL="45720" marR="45720" marT="18288" marB="18288" anchor="t">
-                    <a:lnL w="0">
-                      <a:noFill/>
-                    </a:lnL>
-                    <a:lnR w="0">
-                      <a:noFill/>
-                    </a:lnR>
-                    <a:lnT w="0">
-                      <a:noFill/>
-                    </a:lnT>
-                    <a:lnB w="9525">
-                      <a:solidFill>
-                        <a:srgbClr val="EFEFEF"/>
-                      </a:solidFill>
-                    </a:lnB>
-                    <a:solidFill>
-                      <a:srgbClr val="F3F3F3"/>
-                    </a:solidFill>
-                  </a:tcPr>
-                </a:tc>
-                <a:tc>
-                  <a:txBody>
-                    <a:bodyPr wrap="square"/>
-                    <a:lstStyle/>
-                    <a:p>
-                      <a:pPr algn="ctr"/>
-                      <a:r>
-                        <a:rPr sz="850" b="1">
-                          <a:solidFill>
-                            <a:srgbClr val="595959"/>
-                          </a:solidFill>
-                          <a:latin typeface="Montserrat"/>
-                          <a:ea typeface="Montserrat"/>
-                          <a:cs typeface="Montserrat"/>
-                          <a:sym typeface="Montserrat"/>
-                        </a:rPr>
-                        <a:t>Δ sessões</a:t>
-                      </a:r>
-                    </a:p>
-                  </a:txBody>
-                  <a:tcPr marL="45720" marR="45720" marT="18288" marB="18288" anchor="t">
-                    <a:lnL w="0">
-                      <a:noFill/>
-                    </a:lnL>
-                    <a:lnR w="0">
-                      <a:noFill/>
-                    </a:lnR>
-                    <a:lnT w="0">
-                      <a:noFill/>
-                    </a:lnT>
-                    <a:lnB w="9525">
-                      <a:solidFill>
-                        <a:srgbClr val="EFEFEF"/>
-                      </a:solidFill>
-                    </a:lnB>
-                    <a:solidFill>
-                      <a:srgbClr val="F3F3F3"/>
-                    </a:solidFill>
-                  </a:tcPr>
-                </a:tc>
-                <a:tc>
-                  <a:txBody>
-                    <a:bodyPr wrap="square"/>
-                    <a:lstStyle/>
-                    <a:p>
-                      <a:pPr algn="ctr"/>
-                      <a:r>
-                        <a:rPr sz="850" b="1">
-                          <a:solidFill>
-                            <a:srgbClr val="595959"/>
-                          </a:solidFill>
-                          <a:latin typeface="Montserrat"/>
-                          <a:ea typeface="Montserrat"/>
-                          <a:cs typeface="Montserrat"/>
-                          <a:sym typeface="Montserrat"/>
-                        </a:rPr>
-                        <a:t>CVR (Ago → Set)</a:t>
-                      </a:r>
-                    </a:p>
-                  </a:txBody>
-                  <a:tcPr marL="45720" marR="45720" marT="18288" marB="18288" anchor="t">
-                    <a:lnL w="0">
-                      <a:noFill/>
-                    </a:lnL>
-                    <a:lnR w="0">
-                      <a:noFill/>
-                    </a:lnR>
-                    <a:lnT w="0">
-                      <a:noFill/>
-                    </a:lnT>
-                    <a:lnB w="9525">
-                      <a:solidFill>
-                        <a:srgbClr val="EFEFEF"/>
-                      </a:solidFill>
-                    </a:lnB>
-                    <a:solidFill>
-                      <a:srgbClr val="F3F3F3"/>
-                    </a:solidFill>
-                  </a:tcPr>
-                </a:tc>
-                <a:tc>
-                  <a:txBody>
-                    <a:bodyPr wrap="square"/>
-                    <a:lstStyle/>
-                    <a:p>
-                      <a:pPr algn="ctr"/>
-                      <a:r>
-                        <a:rPr sz="850" b="1">
-                          <a:solidFill>
-                            <a:srgbClr val="595959"/>
-                          </a:solidFill>
-                          <a:latin typeface="Montserrat"/>
-                          <a:ea typeface="Montserrat"/>
-                          <a:cs typeface="Montserrat"/>
-                          <a:sym typeface="Montserrat"/>
-                        </a:rPr>
-                        <a:t>TKM (Ago → Set)</a:t>
-                      </a:r>
-                    </a:p>
-                  </a:txBody>
-                  <a:tcPr marL="45720" marR="45720" marT="18288" marB="18288" anchor="t">
-                    <a:lnL w="0">
-                      <a:noFill/>
-                    </a:lnL>
-                    <a:lnR w="0">
-                      <a:noFill/>
-                    </a:lnR>
-                    <a:lnT w="0">
-                      <a:noFill/>
-                    </a:lnT>
-                    <a:lnB w="9525">
-                      <a:solidFill>
-                        <a:srgbClr val="EFEFEF"/>
-                      </a:solidFill>
-                    </a:lnB>
-                    <a:solidFill>
-                      <a:srgbClr val="F3F3F3"/>
-                    </a:solidFill>
-                  </a:tcPr>
-                </a:tc>
-              </a:tr>
-              <a:tr h="384048">
-                <a:tc>
-                  <a:txBody>
-                    <a:bodyPr wrap="square"/>
-                    <a:lstStyle/>
-                    <a:p>
-                      <a:pPr algn="l"/>
-                      <a:r>
-                        <a:rPr sz="850" b="0">
-                          <a:solidFill>
-                            <a:srgbClr val="595959"/>
-                          </a:solidFill>
-                          <a:latin typeface="Montserrat Medium"/>
-                          <a:ea typeface="Montserrat Medium"/>
-                          <a:cs typeface="Montserrat Medium"/>
-                          <a:sym typeface="Montserrat Medium"/>
-                        </a:rPr>
-                        <a:t>Geral</a:t>
-                      </a:r>
-                    </a:p>
-                  </a:txBody>
-                  <a:tcPr marL="45720" marR="45720" marT="18288" marB="18288" anchor="t">
-                    <a:lnL w="0">
-                      <a:noFill/>
-                    </a:lnL>
-                    <a:lnR w="0">
-                      <a:noFill/>
-                    </a:lnR>
-                    <a:lnT w="0">
-                      <a:noFill/>
-                    </a:lnT>
-                    <a:lnB w="9525">
-                      <a:solidFill>
-                        <a:srgbClr val="EFEFEF"/>
-                      </a:solidFill>
-                    </a:lnB>
-                    <a:noFill/>
-                  </a:tcPr>
-                </a:tc>
-                <a:tc>
-                  <a:txBody>
-                    <a:bodyPr wrap="square"/>
-                    <a:lstStyle/>
-                    <a:p>
-                      <a:pPr algn="ctr"/>
-                      <a:r>
-                        <a:rPr sz="850" b="0">
-                          <a:solidFill>
-                            <a:srgbClr val="595959"/>
-                          </a:solidFill>
-                          <a:latin typeface="Montserrat Medium"/>
-                          <a:ea typeface="Montserrat Medium"/>
-                          <a:cs typeface="Montserrat Medium"/>
-                          <a:sym typeface="Montserrat Medium"/>
-                        </a:rPr>
-                        <a:t>R$ 342.224 → R$ 291.637</a:t>
-                      </a:r>
-                    </a:p>
-                  </a:txBody>
-                  <a:tcPr marL="45720" marR="45720" marT="18288" marB="18288" anchor="t">
-                    <a:lnL w="0">
-                      <a:noFill/>
-                    </a:lnL>
-                    <a:lnR w="0">
-                      <a:noFill/>
-                    </a:lnR>
-                    <a:lnT w="0">
-                      <a:noFill/>
-                    </a:lnT>
-                    <a:lnB w="9525">
-                      <a:solidFill>
-                        <a:srgbClr val="EFEFEF"/>
-                      </a:solidFill>
-                    </a:lnB>
-                    <a:noFill/>
-                  </a:tcPr>
-                </a:tc>
-                <a:tc>
-                  <a:txBody>
-                    <a:bodyPr wrap="square"/>
-                    <a:lstStyle/>
-                    <a:p>
-                      <a:pPr algn="ctr"/>
-                      <a:r>
-                        <a:rPr sz="850" b="0">
-                          <a:solidFill>
-                            <a:srgbClr val="C5221F"/>
-                          </a:solidFill>
-                          <a:latin typeface="Montserrat Medium"/>
-                          <a:ea typeface="Montserrat Medium"/>
-                          <a:cs typeface="Montserrat Medium"/>
-                          <a:sym typeface="Montserrat Medium"/>
-                        </a:rPr>
-                        <a:t>-R$ 50.587 (-14,8%)</a:t>
-                      </a:r>
-                    </a:p>
-                  </a:txBody>
-                  <a:tcPr marL="45720" marR="45720" marT="18288" marB="18288" anchor="t">
-                    <a:lnL w="0">
-                      <a:noFill/>
-                    </a:lnL>
-                    <a:lnR w="0">
-                      <a:noFill/>
-                    </a:lnR>
-                    <a:lnT w="0">
-                      <a:noFill/>
-                    </a:lnT>
-                    <a:lnB w="9525">
-                      <a:solidFill>
-                        <a:srgbClr val="EFEFEF"/>
-                      </a:solidFill>
-                    </a:lnB>
-                    <a:noFill/>
-                  </a:tcPr>
-                </a:tc>
-                <a:tc>
-                  <a:txBody>
-                    <a:bodyPr wrap="square"/>
-                    <a:lstStyle/>
-                    <a:p>
-                      <a:pPr algn="ctr"/>
-                      <a:r>
-                        <a:rPr sz="850" b="0">
-                          <a:solidFill>
-                            <a:srgbClr val="C5221F"/>
-                          </a:solidFill>
-                          <a:latin typeface="Montserrat Medium"/>
-                          <a:ea typeface="Montserrat Medium"/>
-                          <a:cs typeface="Montserrat Medium"/>
-                          <a:sym typeface="Montserrat Medium"/>
-                        </a:rPr>
-                        <a:t>-8,8%</a:t>
-                      </a:r>
-                    </a:p>
-                  </a:txBody>
-                  <a:tcPr marL="45720" marR="45720" marT="18288" marB="18288" anchor="t">
-                    <a:lnL w="0">
-                      <a:noFill/>
-                    </a:lnL>
-                    <a:lnR w="0">
-                      <a:noFill/>
-                    </a:lnR>
-                    <a:lnT w="0">
-                      <a:noFill/>
-                    </a:lnT>
-                    <a:lnB w="9525">
-                      <a:solidFill>
-                        <a:srgbClr val="EFEFEF"/>
-                      </a:solidFill>
-                    </a:lnB>
-                    <a:noFill/>
-                  </a:tcPr>
-                </a:tc>
-                <a:tc>
-                  <a:txBody>
-                    <a:bodyPr wrap="square"/>
-                    <a:lstStyle/>
-                    <a:p>
-                      <a:pPr algn="ctr"/>
-                      <a:r>
-                        <a:rPr sz="850" b="0">
-                          <a:solidFill>
-                            <a:srgbClr val="595959"/>
-                          </a:solidFill>
-                          <a:latin typeface="Montserrat Medium"/>
-                          <a:ea typeface="Montserrat Medium"/>
-                          <a:cs typeface="Montserrat Medium"/>
-                          <a:sym typeface="Montserrat Medium"/>
-                        </a:rPr>
-                        <a:t>1,27% → 1,14% (-0,13 p.p.)</a:t>
-                      </a:r>
-                    </a:p>
-                  </a:txBody>
-                  <a:tcPr marL="45720" marR="45720" marT="18288" marB="18288" anchor="t">
-                    <a:lnL w="0">
-                      <a:noFill/>
-                    </a:lnL>
-                    <a:lnR w="0">
-                      <a:noFill/>
-                    </a:lnR>
-                    <a:lnT w="0">
-                      <a:noFill/>
-                    </a:lnT>
-                    <a:lnB w="9525">
-                      <a:solidFill>
-                        <a:srgbClr val="EFEFEF"/>
-                      </a:solidFill>
-                    </a:lnB>
-                    <a:noFill/>
-                  </a:tcPr>
-                </a:tc>
-                <a:tc>
-                  <a:txBody>
-                    <a:bodyPr wrap="square"/>
-                    <a:lstStyle/>
-                    <a:p>
-                      <a:pPr algn="ctr"/>
-                      <a:r>
-                        <a:rPr sz="850" b="0">
-                          <a:solidFill>
-                            <a:srgbClr val="595959"/>
-                          </a:solidFill>
-                          <a:latin typeface="Montserrat Medium"/>
-                          <a:ea typeface="Montserrat Medium"/>
-                          <a:cs typeface="Montserrat Medium"/>
-                          <a:sym typeface="Montserrat Medium"/>
-                        </a:rPr>
-                        <a:t>R$ 344 → R$ 359 (+4,4%)</a:t>
-                      </a:r>
-                    </a:p>
-                  </a:txBody>
-                  <a:tcPr marL="45720" marR="45720" marT="18288" marB="18288" anchor="t">
-                    <a:lnL w="0">
-                      <a:noFill/>
-                    </a:lnL>
-                    <a:lnR w="0">
-                      <a:noFill/>
-                    </a:lnR>
-                    <a:lnT w="0">
-                      <a:noFill/>
-                    </a:lnT>
-                    <a:lnB w="9525">
-                      <a:solidFill>
-                        <a:srgbClr val="EFEFEF"/>
-                      </a:solidFill>
-                    </a:lnB>
-                    <a:noFill/>
-                  </a:tcPr>
-                </a:tc>
-              </a:tr>
-              <a:tr h="384048">
-                <a:tc>
-                  <a:txBody>
-                    <a:bodyPr wrap="square"/>
-                    <a:lstStyle/>
-                    <a:p>
-                      <a:pPr algn="l"/>
-                      <a:r>
-                        <a:rPr sz="850" b="0">
-                          <a:solidFill>
-                            <a:srgbClr val="595959"/>
-                          </a:solidFill>
-                          <a:latin typeface="Montserrat Medium"/>
-                          <a:ea typeface="Montserrat Medium"/>
-                          <a:cs typeface="Montserrat Medium"/>
-                          <a:sym typeface="Montserrat Medium"/>
-                        </a:rPr>
-                        <a:t>Android</a:t>
-                      </a:r>
-                    </a:p>
-                  </a:txBody>
-                  <a:tcPr marL="45720" marR="45720" marT="18288" marB="18288" anchor="t">
-                    <a:lnL w="0">
-                      <a:noFill/>
-                    </a:lnL>
-                    <a:lnR w="0">
-                      <a:noFill/>
-                    </a:lnR>
-                    <a:lnT w="0">
-                      <a:noFill/>
-                    </a:lnT>
-                    <a:lnB w="9525">
-                      <a:solidFill>
-                        <a:srgbClr val="EFEFEF"/>
-                      </a:solidFill>
-                    </a:lnB>
-                    <a:noFill/>
-                  </a:tcPr>
-                </a:tc>
-                <a:tc>
-                  <a:txBody>
-                    <a:bodyPr wrap="square"/>
-                    <a:lstStyle/>
-                    <a:p>
-                      <a:pPr algn="ctr"/>
-                      <a:r>
-                        <a:rPr sz="850" b="0">
-                          <a:solidFill>
-                            <a:srgbClr val="595959"/>
-                          </a:solidFill>
-                          <a:latin typeface="Montserrat Medium"/>
-                          <a:ea typeface="Montserrat Medium"/>
-                          <a:cs typeface="Montserrat Medium"/>
-                          <a:sym typeface="Montserrat Medium"/>
-                        </a:rPr>
-                        <a:t>R$ 181.473 → R$ 170.215</a:t>
-                      </a:r>
-                    </a:p>
-                  </a:txBody>
-                  <a:tcPr marL="45720" marR="45720" marT="18288" marB="18288" anchor="t">
-                    <a:lnL w="0">
-                      <a:noFill/>
-                    </a:lnL>
-                    <a:lnR w="0">
-                      <a:noFill/>
-                    </a:lnR>
-                    <a:lnT w="0">
-                      <a:noFill/>
-                    </a:lnT>
-                    <a:lnB w="9525">
-                      <a:solidFill>
-                        <a:srgbClr val="EFEFEF"/>
-                      </a:solidFill>
-                    </a:lnB>
-                    <a:noFill/>
-                  </a:tcPr>
-                </a:tc>
-                <a:tc>
-                  <a:txBody>
-                    <a:bodyPr wrap="square"/>
-                    <a:lstStyle/>
-                    <a:p>
-                      <a:pPr algn="ctr"/>
-                      <a:r>
-                        <a:rPr sz="850" b="0">
-                          <a:solidFill>
-                            <a:srgbClr val="C5221F"/>
-                          </a:solidFill>
-                          <a:latin typeface="Montserrat Medium"/>
-                          <a:ea typeface="Montserrat Medium"/>
-                          <a:cs typeface="Montserrat Medium"/>
-                          <a:sym typeface="Montserrat Medium"/>
-                        </a:rPr>
-                        <a:t>-R$ 11.257 (-6,2%)</a:t>
-                      </a:r>
-                    </a:p>
-                  </a:txBody>
-                  <a:tcPr marL="45720" marR="45720" marT="18288" marB="18288" anchor="t">
-                    <a:lnL w="0">
-                      <a:noFill/>
-                    </a:lnL>
-                    <a:lnR w="0">
-                      <a:noFill/>
-                    </a:lnR>
-                    <a:lnT w="0">
-                      <a:noFill/>
-                    </a:lnT>
-                    <a:lnB w="9525">
-                      <a:solidFill>
-                        <a:srgbClr val="EFEFEF"/>
-                      </a:solidFill>
-                    </a:lnB>
-                    <a:noFill/>
-                  </a:tcPr>
-                </a:tc>
-                <a:tc>
-                  <a:txBody>
-                    <a:bodyPr wrap="square"/>
-                    <a:lstStyle/>
-                    <a:p>
-                      <a:pPr algn="ctr"/>
-                      <a:r>
-                        <a:rPr sz="850" b="0">
-                          <a:solidFill>
-                            <a:srgbClr val="C5221F"/>
-                          </a:solidFill>
-                          <a:latin typeface="Montserrat Medium"/>
-                          <a:ea typeface="Montserrat Medium"/>
-                          <a:cs typeface="Montserrat Medium"/>
-                          <a:sym typeface="Montserrat Medium"/>
-                        </a:rPr>
-                        <a:t>-7,7%</a:t>
-                      </a:r>
-                    </a:p>
-                  </a:txBody>
-                  <a:tcPr marL="45720" marR="45720" marT="18288" marB="18288" anchor="t">
-                    <a:lnL w="0">
-                      <a:noFill/>
-                    </a:lnL>
-                    <a:lnR w="0">
-                      <a:noFill/>
-                    </a:lnR>
-                    <a:lnT w="0">
-                      <a:noFill/>
-                    </a:lnT>
-                    <a:lnB w="9525">
-                      <a:solidFill>
-                        <a:srgbClr val="EFEFEF"/>
-                      </a:solidFill>
-                    </a:lnB>
-                    <a:noFill/>
-                  </a:tcPr>
-                </a:tc>
-                <a:tc>
-                  <a:txBody>
-                    <a:bodyPr wrap="square"/>
-                    <a:lstStyle/>
-                    <a:p>
-                      <a:pPr algn="ctr"/>
-                      <a:r>
-                        <a:rPr sz="850" b="0">
-                          <a:solidFill>
-                            <a:srgbClr val="595959"/>
-                          </a:solidFill>
-                          <a:latin typeface="Montserrat Medium"/>
-                          <a:ea typeface="Montserrat Medium"/>
-                          <a:cs typeface="Montserrat Medium"/>
-                          <a:sym typeface="Montserrat Medium"/>
-                        </a:rPr>
-                        <a:t>0,97% → 0,87% (-0,10 p.p.)</a:t>
-                      </a:r>
-                    </a:p>
-                  </a:txBody>
-                  <a:tcPr marL="45720" marR="45720" marT="18288" marB="18288" anchor="t">
-                    <a:lnL w="0">
-                      <a:noFill/>
-                    </a:lnL>
-                    <a:lnR w="0">
-                      <a:noFill/>
-                    </a:lnR>
-                    <a:lnT w="0">
-                      <a:noFill/>
-                    </a:lnT>
-                    <a:lnB w="9525">
-                      <a:solidFill>
-                        <a:srgbClr val="EFEFEF"/>
-                      </a:solidFill>
-                    </a:lnB>
-                    <a:noFill/>
-                  </a:tcPr>
-                </a:tc>
-                <a:tc>
-                  <a:txBody>
-                    <a:bodyPr wrap="square"/>
-                    <a:lstStyle/>
-                    <a:p>
-                      <a:pPr algn="ctr"/>
-                      <a:r>
-                        <a:rPr sz="850" b="0">
-                          <a:solidFill>
-                            <a:srgbClr val="595959"/>
-                          </a:solidFill>
-                          <a:latin typeface="Montserrat Medium"/>
-                          <a:ea typeface="Montserrat Medium"/>
-                          <a:cs typeface="Montserrat Medium"/>
-                          <a:sym typeface="Montserrat Medium"/>
-                        </a:rPr>
-                        <a:t>R$ 311 → R$ 352 (+13,2%)</a:t>
-                      </a:r>
-                    </a:p>
-                  </a:txBody>
-                  <a:tcPr marL="45720" marR="45720" marT="18288" marB="18288" anchor="t">
-                    <a:lnL w="0">
-                      <a:noFill/>
-                    </a:lnL>
-                    <a:lnR w="0">
-                      <a:noFill/>
-                    </a:lnR>
-                    <a:lnT w="0">
-                      <a:noFill/>
-                    </a:lnT>
-                    <a:lnB w="9525">
-                      <a:solidFill>
-                        <a:srgbClr val="EFEFEF"/>
-                      </a:solidFill>
-                    </a:lnB>
-                    <a:noFill/>
-                  </a:tcPr>
-                </a:tc>
-              </a:tr>
-              <a:tr h="384048">
-                <a:tc>
-                  <a:txBody>
-                    <a:bodyPr wrap="square"/>
-                    <a:lstStyle/>
-                    <a:p>
-                      <a:pPr algn="l"/>
-                      <a:r>
-                        <a:rPr sz="850" b="0">
-                          <a:solidFill>
-                            <a:srgbClr val="595959"/>
-                          </a:solidFill>
-                          <a:latin typeface="Montserrat Medium"/>
-                          <a:ea typeface="Montserrat Medium"/>
-                          <a:cs typeface="Montserrat Medium"/>
-                          <a:sym typeface="Montserrat Medium"/>
-                        </a:rPr>
-                        <a:t>iOS</a:t>
-                      </a:r>
-                    </a:p>
-                  </a:txBody>
-                  <a:tcPr marL="45720" marR="45720" marT="18288" marB="18288" anchor="t">
-                    <a:lnL w="0">
-                      <a:noFill/>
-                    </a:lnL>
-                    <a:lnR w="0">
-                      <a:noFill/>
-                    </a:lnR>
-                    <a:lnT w="0">
-                      <a:noFill/>
-                    </a:lnT>
-                    <a:lnB w="9525">
-                      <a:solidFill>
-                        <a:srgbClr val="EFEFEF"/>
-                      </a:solidFill>
-                    </a:lnB>
-                    <a:noFill/>
-                  </a:tcPr>
-                </a:tc>
-                <a:tc>
-                  <a:txBody>
-                    <a:bodyPr wrap="square"/>
-                    <a:lstStyle/>
-                    <a:p>
-                      <a:pPr algn="ctr"/>
-                      <a:r>
-                        <a:rPr sz="850" b="0">
-                          <a:solidFill>
-                            <a:srgbClr val="595959"/>
-                          </a:solidFill>
-                          <a:latin typeface="Montserrat Medium"/>
-                          <a:ea typeface="Montserrat Medium"/>
-                          <a:cs typeface="Montserrat Medium"/>
-                          <a:sym typeface="Montserrat Medium"/>
-                        </a:rPr>
-                        <a:t>R$ 160.751 → R$ 121.422</a:t>
-                      </a:r>
-                    </a:p>
-                  </a:txBody>
-                  <a:tcPr marL="45720" marR="45720" marT="18288" marB="18288" anchor="t">
-                    <a:lnL w="0">
-                      <a:noFill/>
-                    </a:lnL>
-                    <a:lnR w="0">
-                      <a:noFill/>
-                    </a:lnR>
-                    <a:lnT w="0">
-                      <a:noFill/>
-                    </a:lnT>
-                    <a:lnB w="9525">
-                      <a:solidFill>
-                        <a:srgbClr val="EFEFEF"/>
-                      </a:solidFill>
-                    </a:lnB>
-                    <a:noFill/>
-                  </a:tcPr>
-                </a:tc>
-                <a:tc>
-                  <a:txBody>
-                    <a:bodyPr wrap="square"/>
-                    <a:lstStyle/>
-                    <a:p>
-                      <a:pPr algn="ctr"/>
-                      <a:r>
-                        <a:rPr sz="850" b="0">
-                          <a:solidFill>
-                            <a:srgbClr val="C5221F"/>
-                          </a:solidFill>
-                          <a:latin typeface="Montserrat Medium"/>
-                          <a:ea typeface="Montserrat Medium"/>
-                          <a:cs typeface="Montserrat Medium"/>
-                          <a:sym typeface="Montserrat Medium"/>
-                        </a:rPr>
-                        <a:t>-R$ 39.329 (-24,5%)</a:t>
-                      </a:r>
-                    </a:p>
-                  </a:txBody>
-                  <a:tcPr marL="45720" marR="45720" marT="18288" marB="18288" anchor="t">
-                    <a:lnL w="0">
-                      <a:noFill/>
-                    </a:lnL>
-                    <a:lnR w="0">
-                      <a:noFill/>
-                    </a:lnR>
-                    <a:lnT w="0">
-                      <a:noFill/>
-                    </a:lnT>
-                    <a:lnB w="9525">
-                      <a:solidFill>
-                        <a:srgbClr val="EFEFEF"/>
-                      </a:solidFill>
-                    </a:lnB>
-                    <a:noFill/>
-                  </a:tcPr>
-                </a:tc>
-                <a:tc>
-                  <a:txBody>
-                    <a:bodyPr wrap="square"/>
-                    <a:lstStyle/>
-                    <a:p>
-                      <a:pPr algn="ctr"/>
-                      <a:r>
-                        <a:rPr sz="850" b="0">
-                          <a:solidFill>
-                            <a:srgbClr val="C5221F"/>
-                          </a:solidFill>
-                          <a:latin typeface="Montserrat Medium"/>
-                          <a:ea typeface="Montserrat Medium"/>
-                          <a:cs typeface="Montserrat Medium"/>
-                          <a:sym typeface="Montserrat Medium"/>
-                        </a:rPr>
-                        <a:t>-12,1%</a:t>
-                      </a:r>
-                    </a:p>
-                  </a:txBody>
-                  <a:tcPr marL="45720" marR="45720" marT="18288" marB="18288" anchor="t">
-                    <a:lnL w="0">
-                      <a:noFill/>
-                    </a:lnL>
-                    <a:lnR w="0">
-                      <a:noFill/>
-                    </a:lnR>
-                    <a:lnT w="0">
-                      <a:noFill/>
-                    </a:lnT>
-                    <a:lnB w="9525">
-                      <a:solidFill>
-                        <a:srgbClr val="EFEFEF"/>
-                      </a:solidFill>
-                    </a:lnB>
-                    <a:noFill/>
-                  </a:tcPr>
-                </a:tc>
-                <a:tc>
-                  <a:txBody>
-                    <a:bodyPr wrap="square"/>
-                    <a:lstStyle/>
-                    <a:p>
-                      <a:pPr algn="ctr"/>
-                      <a:r>
-                        <a:rPr sz="850" b="0">
-                          <a:solidFill>
-                            <a:srgbClr val="595959"/>
-                          </a:solidFill>
-                          <a:latin typeface="Montserrat Medium"/>
-                          <a:ea typeface="Montserrat Medium"/>
-                          <a:cs typeface="Montserrat Medium"/>
-                          <a:sym typeface="Montserrat Medium"/>
-                        </a:rPr>
-                        <a:t>2,26% → 2,05% (-0,21 p.p.)</a:t>
-                      </a:r>
-                    </a:p>
-                  </a:txBody>
-                  <a:tcPr marL="45720" marR="45720" marT="18288" marB="18288" anchor="t">
-                    <a:lnL w="0">
-                      <a:noFill/>
-                    </a:lnL>
-                    <a:lnR w="0">
-                      <a:noFill/>
-                    </a:lnR>
-                    <a:lnT w="0">
-                      <a:noFill/>
-                    </a:lnT>
-                    <a:lnB w="9525">
-                      <a:solidFill>
-                        <a:srgbClr val="EFEFEF"/>
-                      </a:solidFill>
-                    </a:lnB>
-                    <a:noFill/>
-                  </a:tcPr>
-                </a:tc>
-                <a:tc>
-                  <a:txBody>
-                    <a:bodyPr wrap="square"/>
-                    <a:lstStyle/>
-                    <a:p>
-                      <a:pPr algn="ctr"/>
-                      <a:r>
-                        <a:rPr sz="850" b="0">
-                          <a:solidFill>
-                            <a:srgbClr val="595959"/>
-                          </a:solidFill>
-                          <a:latin typeface="Montserrat Medium"/>
-                          <a:ea typeface="Montserrat Medium"/>
-                          <a:cs typeface="Montserrat Medium"/>
-                          <a:sym typeface="Montserrat Medium"/>
-                        </a:rPr>
-                        <a:t>R$ 391 → R$ 370 (-5,3%)</a:t>
                       </a:r>
                     </a:p>
                   </a:txBody>
@@ -11177,6 +11988,1143 @@
                 <a:cs typeface="Montserrat"/>
                 <a:sym typeface="Montserrat"/>
               </a:rPr>
+              <a:t>iOS perde mais receita que o Android</a:t>
+            </a:r>
+          </a:p>
+        </p:txBody>
+      </p:sp>
+      <p:cxnSp>
+        <p:nvCxnSpPr>
+          <p:cNvPr id="3" name="Connector 2"/>
+          <p:cNvCxnSpPr/>
+          <p:nvPr/>
+        </p:nvCxnSpPr>
+        <p:spPr>
+          <a:xfrm>
+            <a:off x="411480" y="932688"/>
+            <a:ext cx="8247887" cy="0"/>
+          </a:xfrm>
+          <a:prstGeom prst="line">
+            <a:avLst/>
+          </a:prstGeom>
+          <a:ln w="19050">
+            <a:solidFill>
+              <a:srgbClr val="EFEFEF"/>
+            </a:solidFill>
+          </a:ln>
+          <a:effectLst/>
+        </p:spPr>
+      </p:cxnSp>
+      <p:sp>
+        <p:nvSpPr>
+          <p:cNvPr id="4" name="TextBox 3"/>
+          <p:cNvSpPr txBox="1"/>
+          <p:nvPr/>
+        </p:nvSpPr>
+        <p:spPr>
+          <a:xfrm>
+            <a:off x="411480" y="1197864"/>
+            <a:ext cx="8458200" cy="2523744"/>
+          </a:xfrm>
+          <a:prstGeom prst="rect">
+            <a:avLst/>
+          </a:prstGeom>
+          <a:noFill/>
+        </p:spPr>
+        <p:txBody>
+          <a:bodyPr wrap="square" lIns="91425" rIns="91425" tIns="91425" bIns="91425">
+            <a:spAutoFit/>
+          </a:bodyPr>
+          <a:lstStyle/>
+          <a:p>
+            <a:pPr algn="l">
+              <a:spcBef>
+                <a:spcPts val="1000"/>
+              </a:spcBef>
+              <a:spcAft>
+                <a:spcPts val="0"/>
+              </a:spcAft>
+            </a:pPr>
+            <a:r>
+              <a:rPr sz="1300" b="0" i="0">
+                <a:solidFill>
+                  <a:srgbClr val="595959"/>
+                </a:solidFill>
+                <a:latin typeface="Montserrat Medium"/>
+                <a:ea typeface="Montserrat Medium"/>
+                <a:cs typeface="Montserrat Medium"/>
+                <a:sym typeface="Montserrat Medium"/>
+              </a:rPr>
+              <a:t>Receita captada projetada -R$ 51 mil (-14,8%): iOS -R$ 39 mil (sessões -12%, CVR de 2,26% para 2,05%) e Android -R$ 11 mil (sessões -8%).</a:t>
+            </a:r>
+          </a:p>
+        </p:txBody>
+      </p:sp>
+      <p:sp>
+        <p:nvSpPr>
+          <p:cNvPr id="5" name="TextBox 4"/>
+          <p:cNvSpPr txBox="1"/>
+          <p:nvPr/>
+        </p:nvSpPr>
+        <p:spPr>
+          <a:xfrm>
+            <a:off x="411480" y="4553712"/>
+            <a:ext cx="8458200" cy="310896"/>
+          </a:xfrm>
+          <a:prstGeom prst="rect">
+            <a:avLst/>
+          </a:prstGeom>
+          <a:noFill/>
+        </p:spPr>
+        <p:txBody>
+          <a:bodyPr wrap="square" lIns="91425" rIns="91425" tIns="91425" bIns="91425">
+            <a:spAutoFit/>
+          </a:bodyPr>
+          <a:lstStyle/>
+          <a:p>
+            <a:pPr algn="l">
+              <a:spcBef>
+                <a:spcPts val="0"/>
+              </a:spcBef>
+              <a:spcAft>
+                <a:spcPts val="0"/>
+              </a:spcAft>
+            </a:pPr>
+            <a:r>
+              <a:rPr sz="1000" b="0" i="0">
+                <a:solidFill>
+                  <a:srgbClr val="B7B7B7"/>
+                </a:solidFill>
+                <a:latin typeface="Montserrat Medium"/>
+                <a:ea typeface="Montserrat Medium"/>
+                <a:cs typeface="Montserrat Medium"/>
+                <a:sym typeface="Montserrat Medium"/>
+              </a:rPr>
+              <a:t>Dados do GA4 e planilha de metas | setembro contra agosto; app: CVR e TKM de 01 a 24/09 (compra duplicada desde 25/09)</a:t>
+            </a:r>
+          </a:p>
+        </p:txBody>
+      </p:sp>
+      <p:graphicFrame>
+        <p:nvGraphicFramePr>
+          <p:cNvPr id="6" name="Table 5"/>
+          <p:cNvGraphicFramePr>
+            <a:graphicFrameLocks noGrp="1"/>
+          </p:cNvGraphicFramePr>
+          <p:nvPr/>
+        </p:nvGraphicFramePr>
+        <p:xfrm>
+          <a:off x="411480" y="2240280"/>
+          <a:ext cx="8321040" cy="1536192"/>
+        </p:xfrm>
+        <a:graphic>
+          <a:graphicData uri="http://schemas.openxmlformats.org/drawingml/2006/table">
+            <a:tbl>
+              <a:tblPr firstRow="0" bandRow="0" firstCol="0" lastRow="0" lastCol="0" bandCol="0">
+                <a:tableStyleId>{2D5ABB26-0587-4C30-8999-92F81FD0307C}</a:tableStyleId>
+              </a:tblPr>
+              <a:tblGrid>
+                <a:gridCol w="822960"/>
+                <a:gridCol w="1828800"/>
+                <a:gridCol w="1371600"/>
+                <a:gridCol w="731520"/>
+                <a:gridCol w="1783080"/>
+                <a:gridCol w="1783080"/>
+              </a:tblGrid>
+              <a:tr h="384048">
+                <a:tc>
+                  <a:txBody>
+                    <a:bodyPr wrap="square"/>
+                    <a:lstStyle/>
+                    <a:p>
+                      <a:pPr algn="l"/>
+                      <a:r>
+                        <a:rPr sz="850" b="1">
+                          <a:solidFill>
+                            <a:srgbClr val="595959"/>
+                          </a:solidFill>
+                          <a:latin typeface="Montserrat"/>
+                          <a:ea typeface="Montserrat"/>
+                          <a:cs typeface="Montserrat"/>
+                          <a:sym typeface="Montserrat"/>
+                        </a:rPr>
+                        <a:t>Recorte</a:t>
+                      </a:r>
+                    </a:p>
+                  </a:txBody>
+                  <a:tcPr marL="45720" marR="45720" marT="18288" marB="18288" anchor="t">
+                    <a:lnL w="0">
+                      <a:noFill/>
+                    </a:lnL>
+                    <a:lnR w="0">
+                      <a:noFill/>
+                    </a:lnR>
+                    <a:lnT w="0">
+                      <a:noFill/>
+                    </a:lnT>
+                    <a:lnB w="9525">
+                      <a:solidFill>
+                        <a:srgbClr val="EFEFEF"/>
+                      </a:solidFill>
+                    </a:lnB>
+                    <a:solidFill>
+                      <a:srgbClr val="F3F3F3"/>
+                    </a:solidFill>
+                  </a:tcPr>
+                </a:tc>
+                <a:tc>
+                  <a:txBody>
+                    <a:bodyPr wrap="square"/>
+                    <a:lstStyle/>
+                    <a:p>
+                      <a:pPr algn="ctr"/>
+                      <a:r>
+                        <a:rPr sz="850" b="1">
+                          <a:solidFill>
+                            <a:srgbClr val="595959"/>
+                          </a:solidFill>
+                          <a:latin typeface="Montserrat"/>
+                          <a:ea typeface="Montserrat"/>
+                          <a:cs typeface="Montserrat"/>
+                          <a:sym typeface="Montserrat"/>
+                        </a:rPr>
+                        <a:t>Receita (Ago → Set)</a:t>
+                      </a:r>
+                    </a:p>
+                  </a:txBody>
+                  <a:tcPr marL="45720" marR="45720" marT="18288" marB="18288" anchor="t">
+                    <a:lnL w="0">
+                      <a:noFill/>
+                    </a:lnL>
+                    <a:lnR w="0">
+                      <a:noFill/>
+                    </a:lnR>
+                    <a:lnT w="0">
+                      <a:noFill/>
+                    </a:lnT>
+                    <a:lnB w="9525">
+                      <a:solidFill>
+                        <a:srgbClr val="EFEFEF"/>
+                      </a:solidFill>
+                    </a:lnB>
+                    <a:solidFill>
+                      <a:srgbClr val="F3F3F3"/>
+                    </a:solidFill>
+                  </a:tcPr>
+                </a:tc>
+                <a:tc>
+                  <a:txBody>
+                    <a:bodyPr wrap="square"/>
+                    <a:lstStyle/>
+                    <a:p>
+                      <a:pPr algn="ctr"/>
+                      <a:r>
+                        <a:rPr sz="850" b="1">
+                          <a:solidFill>
+                            <a:srgbClr val="595959"/>
+                          </a:solidFill>
+                          <a:latin typeface="Montserrat"/>
+                          <a:ea typeface="Montserrat"/>
+                          <a:cs typeface="Montserrat"/>
+                          <a:sym typeface="Montserrat"/>
+                        </a:rPr>
+                        <a:t>Δ receita</a:t>
+                      </a:r>
+                    </a:p>
+                  </a:txBody>
+                  <a:tcPr marL="45720" marR="45720" marT="18288" marB="18288" anchor="t">
+                    <a:lnL w="0">
+                      <a:noFill/>
+                    </a:lnL>
+                    <a:lnR w="0">
+                      <a:noFill/>
+                    </a:lnR>
+                    <a:lnT w="0">
+                      <a:noFill/>
+                    </a:lnT>
+                    <a:lnB w="9525">
+                      <a:solidFill>
+                        <a:srgbClr val="EFEFEF"/>
+                      </a:solidFill>
+                    </a:lnB>
+                    <a:solidFill>
+                      <a:srgbClr val="F3F3F3"/>
+                    </a:solidFill>
+                  </a:tcPr>
+                </a:tc>
+                <a:tc>
+                  <a:txBody>
+                    <a:bodyPr wrap="square"/>
+                    <a:lstStyle/>
+                    <a:p>
+                      <a:pPr algn="ctr"/>
+                      <a:r>
+                        <a:rPr sz="850" b="1">
+                          <a:solidFill>
+                            <a:srgbClr val="595959"/>
+                          </a:solidFill>
+                          <a:latin typeface="Montserrat"/>
+                          <a:ea typeface="Montserrat"/>
+                          <a:cs typeface="Montserrat"/>
+                          <a:sym typeface="Montserrat"/>
+                        </a:rPr>
+                        <a:t>Δ sessões</a:t>
+                      </a:r>
+                    </a:p>
+                  </a:txBody>
+                  <a:tcPr marL="45720" marR="45720" marT="18288" marB="18288" anchor="t">
+                    <a:lnL w="0">
+                      <a:noFill/>
+                    </a:lnL>
+                    <a:lnR w="0">
+                      <a:noFill/>
+                    </a:lnR>
+                    <a:lnT w="0">
+                      <a:noFill/>
+                    </a:lnT>
+                    <a:lnB w="9525">
+                      <a:solidFill>
+                        <a:srgbClr val="EFEFEF"/>
+                      </a:solidFill>
+                    </a:lnB>
+                    <a:solidFill>
+                      <a:srgbClr val="F3F3F3"/>
+                    </a:solidFill>
+                  </a:tcPr>
+                </a:tc>
+                <a:tc>
+                  <a:txBody>
+                    <a:bodyPr wrap="square"/>
+                    <a:lstStyle/>
+                    <a:p>
+                      <a:pPr algn="ctr"/>
+                      <a:r>
+                        <a:rPr sz="850" b="1">
+                          <a:solidFill>
+                            <a:srgbClr val="595959"/>
+                          </a:solidFill>
+                          <a:latin typeface="Montserrat"/>
+                          <a:ea typeface="Montserrat"/>
+                          <a:cs typeface="Montserrat"/>
+                          <a:sym typeface="Montserrat"/>
+                        </a:rPr>
+                        <a:t>CVR (Ago → Set)</a:t>
+                      </a:r>
+                    </a:p>
+                  </a:txBody>
+                  <a:tcPr marL="45720" marR="45720" marT="18288" marB="18288" anchor="t">
+                    <a:lnL w="0">
+                      <a:noFill/>
+                    </a:lnL>
+                    <a:lnR w="0">
+                      <a:noFill/>
+                    </a:lnR>
+                    <a:lnT w="0">
+                      <a:noFill/>
+                    </a:lnT>
+                    <a:lnB w="9525">
+                      <a:solidFill>
+                        <a:srgbClr val="EFEFEF"/>
+                      </a:solidFill>
+                    </a:lnB>
+                    <a:solidFill>
+                      <a:srgbClr val="F3F3F3"/>
+                    </a:solidFill>
+                  </a:tcPr>
+                </a:tc>
+                <a:tc>
+                  <a:txBody>
+                    <a:bodyPr wrap="square"/>
+                    <a:lstStyle/>
+                    <a:p>
+                      <a:pPr algn="ctr"/>
+                      <a:r>
+                        <a:rPr sz="850" b="1">
+                          <a:solidFill>
+                            <a:srgbClr val="595959"/>
+                          </a:solidFill>
+                          <a:latin typeface="Montserrat"/>
+                          <a:ea typeface="Montserrat"/>
+                          <a:cs typeface="Montserrat"/>
+                          <a:sym typeface="Montserrat"/>
+                        </a:rPr>
+                        <a:t>TKM (Ago → Set)</a:t>
+                      </a:r>
+                    </a:p>
+                  </a:txBody>
+                  <a:tcPr marL="45720" marR="45720" marT="18288" marB="18288" anchor="t">
+                    <a:lnL w="0">
+                      <a:noFill/>
+                    </a:lnL>
+                    <a:lnR w="0">
+                      <a:noFill/>
+                    </a:lnR>
+                    <a:lnT w="0">
+                      <a:noFill/>
+                    </a:lnT>
+                    <a:lnB w="9525">
+                      <a:solidFill>
+                        <a:srgbClr val="EFEFEF"/>
+                      </a:solidFill>
+                    </a:lnB>
+                    <a:solidFill>
+                      <a:srgbClr val="F3F3F3"/>
+                    </a:solidFill>
+                  </a:tcPr>
+                </a:tc>
+              </a:tr>
+              <a:tr h="384048">
+                <a:tc>
+                  <a:txBody>
+                    <a:bodyPr wrap="square"/>
+                    <a:lstStyle/>
+                    <a:p>
+                      <a:pPr algn="l"/>
+                      <a:r>
+                        <a:rPr sz="850" b="0">
+                          <a:solidFill>
+                            <a:srgbClr val="595959"/>
+                          </a:solidFill>
+                          <a:latin typeface="Montserrat Medium"/>
+                          <a:ea typeface="Montserrat Medium"/>
+                          <a:cs typeface="Montserrat Medium"/>
+                          <a:sym typeface="Montserrat Medium"/>
+                        </a:rPr>
+                        <a:t>Geral</a:t>
+                      </a:r>
+                    </a:p>
+                  </a:txBody>
+                  <a:tcPr marL="45720" marR="45720" marT="18288" marB="18288" anchor="t">
+                    <a:lnL w="0">
+                      <a:noFill/>
+                    </a:lnL>
+                    <a:lnR w="0">
+                      <a:noFill/>
+                    </a:lnR>
+                    <a:lnT w="0">
+                      <a:noFill/>
+                    </a:lnT>
+                    <a:lnB w="9525">
+                      <a:solidFill>
+                        <a:srgbClr val="EFEFEF"/>
+                      </a:solidFill>
+                    </a:lnB>
+                    <a:noFill/>
+                  </a:tcPr>
+                </a:tc>
+                <a:tc>
+                  <a:txBody>
+                    <a:bodyPr wrap="square"/>
+                    <a:lstStyle/>
+                    <a:p>
+                      <a:pPr algn="ctr"/>
+                      <a:r>
+                        <a:rPr sz="850" b="0">
+                          <a:solidFill>
+                            <a:srgbClr val="595959"/>
+                          </a:solidFill>
+                          <a:latin typeface="Montserrat Medium"/>
+                          <a:ea typeface="Montserrat Medium"/>
+                          <a:cs typeface="Montserrat Medium"/>
+                          <a:sym typeface="Montserrat Medium"/>
+                        </a:rPr>
+                        <a:t>R$ 342.224 → R$ 291.637</a:t>
+                      </a:r>
+                    </a:p>
+                  </a:txBody>
+                  <a:tcPr marL="45720" marR="45720" marT="18288" marB="18288" anchor="t">
+                    <a:lnL w="0">
+                      <a:noFill/>
+                    </a:lnL>
+                    <a:lnR w="0">
+                      <a:noFill/>
+                    </a:lnR>
+                    <a:lnT w="0">
+                      <a:noFill/>
+                    </a:lnT>
+                    <a:lnB w="9525">
+                      <a:solidFill>
+                        <a:srgbClr val="EFEFEF"/>
+                      </a:solidFill>
+                    </a:lnB>
+                    <a:noFill/>
+                  </a:tcPr>
+                </a:tc>
+                <a:tc>
+                  <a:txBody>
+                    <a:bodyPr wrap="square"/>
+                    <a:lstStyle/>
+                    <a:p>
+                      <a:pPr algn="ctr"/>
+                      <a:r>
+                        <a:rPr sz="850" b="0">
+                          <a:solidFill>
+                            <a:srgbClr val="C5221F"/>
+                          </a:solidFill>
+                          <a:latin typeface="Montserrat Medium"/>
+                          <a:ea typeface="Montserrat Medium"/>
+                          <a:cs typeface="Montserrat Medium"/>
+                          <a:sym typeface="Montserrat Medium"/>
+                        </a:rPr>
+                        <a:t>-R$ 50.587 (-14,8%)</a:t>
+                      </a:r>
+                    </a:p>
+                  </a:txBody>
+                  <a:tcPr marL="45720" marR="45720" marT="18288" marB="18288" anchor="t">
+                    <a:lnL w="0">
+                      <a:noFill/>
+                    </a:lnL>
+                    <a:lnR w="0">
+                      <a:noFill/>
+                    </a:lnR>
+                    <a:lnT w="0">
+                      <a:noFill/>
+                    </a:lnT>
+                    <a:lnB w="9525">
+                      <a:solidFill>
+                        <a:srgbClr val="EFEFEF"/>
+                      </a:solidFill>
+                    </a:lnB>
+                    <a:noFill/>
+                  </a:tcPr>
+                </a:tc>
+                <a:tc>
+                  <a:txBody>
+                    <a:bodyPr wrap="square"/>
+                    <a:lstStyle/>
+                    <a:p>
+                      <a:pPr algn="ctr"/>
+                      <a:r>
+                        <a:rPr sz="850" b="0">
+                          <a:solidFill>
+                            <a:srgbClr val="C5221F"/>
+                          </a:solidFill>
+                          <a:latin typeface="Montserrat Medium"/>
+                          <a:ea typeface="Montserrat Medium"/>
+                          <a:cs typeface="Montserrat Medium"/>
+                          <a:sym typeface="Montserrat Medium"/>
+                        </a:rPr>
+                        <a:t>-8,8%</a:t>
+                      </a:r>
+                    </a:p>
+                  </a:txBody>
+                  <a:tcPr marL="45720" marR="45720" marT="18288" marB="18288" anchor="t">
+                    <a:lnL w="0">
+                      <a:noFill/>
+                    </a:lnL>
+                    <a:lnR w="0">
+                      <a:noFill/>
+                    </a:lnR>
+                    <a:lnT w="0">
+                      <a:noFill/>
+                    </a:lnT>
+                    <a:lnB w="9525">
+                      <a:solidFill>
+                        <a:srgbClr val="EFEFEF"/>
+                      </a:solidFill>
+                    </a:lnB>
+                    <a:noFill/>
+                  </a:tcPr>
+                </a:tc>
+                <a:tc>
+                  <a:txBody>
+                    <a:bodyPr wrap="square"/>
+                    <a:lstStyle/>
+                    <a:p>
+                      <a:pPr algn="ctr"/>
+                      <a:r>
+                        <a:rPr sz="850" b="0">
+                          <a:solidFill>
+                            <a:srgbClr val="595959"/>
+                          </a:solidFill>
+                          <a:latin typeface="Montserrat Medium"/>
+                          <a:ea typeface="Montserrat Medium"/>
+                          <a:cs typeface="Montserrat Medium"/>
+                          <a:sym typeface="Montserrat Medium"/>
+                        </a:rPr>
+                        <a:t>1,27% → 1,14% (-0,13 p.p.)</a:t>
+                      </a:r>
+                    </a:p>
+                  </a:txBody>
+                  <a:tcPr marL="45720" marR="45720" marT="18288" marB="18288" anchor="t">
+                    <a:lnL w="0">
+                      <a:noFill/>
+                    </a:lnL>
+                    <a:lnR w="0">
+                      <a:noFill/>
+                    </a:lnR>
+                    <a:lnT w="0">
+                      <a:noFill/>
+                    </a:lnT>
+                    <a:lnB w="9525">
+                      <a:solidFill>
+                        <a:srgbClr val="EFEFEF"/>
+                      </a:solidFill>
+                    </a:lnB>
+                    <a:noFill/>
+                  </a:tcPr>
+                </a:tc>
+                <a:tc>
+                  <a:txBody>
+                    <a:bodyPr wrap="square"/>
+                    <a:lstStyle/>
+                    <a:p>
+                      <a:pPr algn="ctr"/>
+                      <a:r>
+                        <a:rPr sz="850" b="0">
+                          <a:solidFill>
+                            <a:srgbClr val="595959"/>
+                          </a:solidFill>
+                          <a:latin typeface="Montserrat Medium"/>
+                          <a:ea typeface="Montserrat Medium"/>
+                          <a:cs typeface="Montserrat Medium"/>
+                          <a:sym typeface="Montserrat Medium"/>
+                        </a:rPr>
+                        <a:t>R$ 344 → R$ 359 (+4,4%)</a:t>
+                      </a:r>
+                    </a:p>
+                  </a:txBody>
+                  <a:tcPr marL="45720" marR="45720" marT="18288" marB="18288" anchor="t">
+                    <a:lnL w="0">
+                      <a:noFill/>
+                    </a:lnL>
+                    <a:lnR w="0">
+                      <a:noFill/>
+                    </a:lnR>
+                    <a:lnT w="0">
+                      <a:noFill/>
+                    </a:lnT>
+                    <a:lnB w="9525">
+                      <a:solidFill>
+                        <a:srgbClr val="EFEFEF"/>
+                      </a:solidFill>
+                    </a:lnB>
+                    <a:noFill/>
+                  </a:tcPr>
+                </a:tc>
+              </a:tr>
+              <a:tr h="384048">
+                <a:tc>
+                  <a:txBody>
+                    <a:bodyPr wrap="square"/>
+                    <a:lstStyle/>
+                    <a:p>
+                      <a:pPr algn="l"/>
+                      <a:r>
+                        <a:rPr sz="850" b="0">
+                          <a:solidFill>
+                            <a:srgbClr val="595959"/>
+                          </a:solidFill>
+                          <a:latin typeface="Montserrat Medium"/>
+                          <a:ea typeface="Montserrat Medium"/>
+                          <a:cs typeface="Montserrat Medium"/>
+                          <a:sym typeface="Montserrat Medium"/>
+                        </a:rPr>
+                        <a:t>Android</a:t>
+                      </a:r>
+                    </a:p>
+                  </a:txBody>
+                  <a:tcPr marL="45720" marR="45720" marT="18288" marB="18288" anchor="t">
+                    <a:lnL w="0">
+                      <a:noFill/>
+                    </a:lnL>
+                    <a:lnR w="0">
+                      <a:noFill/>
+                    </a:lnR>
+                    <a:lnT w="0">
+                      <a:noFill/>
+                    </a:lnT>
+                    <a:lnB w="9525">
+                      <a:solidFill>
+                        <a:srgbClr val="EFEFEF"/>
+                      </a:solidFill>
+                    </a:lnB>
+                    <a:noFill/>
+                  </a:tcPr>
+                </a:tc>
+                <a:tc>
+                  <a:txBody>
+                    <a:bodyPr wrap="square"/>
+                    <a:lstStyle/>
+                    <a:p>
+                      <a:pPr algn="ctr"/>
+                      <a:r>
+                        <a:rPr sz="850" b="0">
+                          <a:solidFill>
+                            <a:srgbClr val="595959"/>
+                          </a:solidFill>
+                          <a:latin typeface="Montserrat Medium"/>
+                          <a:ea typeface="Montserrat Medium"/>
+                          <a:cs typeface="Montserrat Medium"/>
+                          <a:sym typeface="Montserrat Medium"/>
+                        </a:rPr>
+                        <a:t>R$ 181.473 → R$ 170.215</a:t>
+                      </a:r>
+                    </a:p>
+                  </a:txBody>
+                  <a:tcPr marL="45720" marR="45720" marT="18288" marB="18288" anchor="t">
+                    <a:lnL w="0">
+                      <a:noFill/>
+                    </a:lnL>
+                    <a:lnR w="0">
+                      <a:noFill/>
+                    </a:lnR>
+                    <a:lnT w="0">
+                      <a:noFill/>
+                    </a:lnT>
+                    <a:lnB w="9525">
+                      <a:solidFill>
+                        <a:srgbClr val="EFEFEF"/>
+                      </a:solidFill>
+                    </a:lnB>
+                    <a:noFill/>
+                  </a:tcPr>
+                </a:tc>
+                <a:tc>
+                  <a:txBody>
+                    <a:bodyPr wrap="square"/>
+                    <a:lstStyle/>
+                    <a:p>
+                      <a:pPr algn="ctr"/>
+                      <a:r>
+                        <a:rPr sz="850" b="0">
+                          <a:solidFill>
+                            <a:srgbClr val="C5221F"/>
+                          </a:solidFill>
+                          <a:latin typeface="Montserrat Medium"/>
+                          <a:ea typeface="Montserrat Medium"/>
+                          <a:cs typeface="Montserrat Medium"/>
+                          <a:sym typeface="Montserrat Medium"/>
+                        </a:rPr>
+                        <a:t>-R$ 11.257 (-6,2%)</a:t>
+                      </a:r>
+                    </a:p>
+                  </a:txBody>
+                  <a:tcPr marL="45720" marR="45720" marT="18288" marB="18288" anchor="t">
+                    <a:lnL w="0">
+                      <a:noFill/>
+                    </a:lnL>
+                    <a:lnR w="0">
+                      <a:noFill/>
+                    </a:lnR>
+                    <a:lnT w="0">
+                      <a:noFill/>
+                    </a:lnT>
+                    <a:lnB w="9525">
+                      <a:solidFill>
+                        <a:srgbClr val="EFEFEF"/>
+                      </a:solidFill>
+                    </a:lnB>
+                    <a:noFill/>
+                  </a:tcPr>
+                </a:tc>
+                <a:tc>
+                  <a:txBody>
+                    <a:bodyPr wrap="square"/>
+                    <a:lstStyle/>
+                    <a:p>
+                      <a:pPr algn="ctr"/>
+                      <a:r>
+                        <a:rPr sz="850" b="0">
+                          <a:solidFill>
+                            <a:srgbClr val="C5221F"/>
+                          </a:solidFill>
+                          <a:latin typeface="Montserrat Medium"/>
+                          <a:ea typeface="Montserrat Medium"/>
+                          <a:cs typeface="Montserrat Medium"/>
+                          <a:sym typeface="Montserrat Medium"/>
+                        </a:rPr>
+                        <a:t>-7,7%</a:t>
+                      </a:r>
+                    </a:p>
+                  </a:txBody>
+                  <a:tcPr marL="45720" marR="45720" marT="18288" marB="18288" anchor="t">
+                    <a:lnL w="0">
+                      <a:noFill/>
+                    </a:lnL>
+                    <a:lnR w="0">
+                      <a:noFill/>
+                    </a:lnR>
+                    <a:lnT w="0">
+                      <a:noFill/>
+                    </a:lnT>
+                    <a:lnB w="9525">
+                      <a:solidFill>
+                        <a:srgbClr val="EFEFEF"/>
+                      </a:solidFill>
+                    </a:lnB>
+                    <a:noFill/>
+                  </a:tcPr>
+                </a:tc>
+                <a:tc>
+                  <a:txBody>
+                    <a:bodyPr wrap="square"/>
+                    <a:lstStyle/>
+                    <a:p>
+                      <a:pPr algn="ctr"/>
+                      <a:r>
+                        <a:rPr sz="850" b="0">
+                          <a:solidFill>
+                            <a:srgbClr val="595959"/>
+                          </a:solidFill>
+                          <a:latin typeface="Montserrat Medium"/>
+                          <a:ea typeface="Montserrat Medium"/>
+                          <a:cs typeface="Montserrat Medium"/>
+                          <a:sym typeface="Montserrat Medium"/>
+                        </a:rPr>
+                        <a:t>0,97% → 0,87% (-0,10 p.p.)</a:t>
+                      </a:r>
+                    </a:p>
+                  </a:txBody>
+                  <a:tcPr marL="45720" marR="45720" marT="18288" marB="18288" anchor="t">
+                    <a:lnL w="0">
+                      <a:noFill/>
+                    </a:lnL>
+                    <a:lnR w="0">
+                      <a:noFill/>
+                    </a:lnR>
+                    <a:lnT w="0">
+                      <a:noFill/>
+                    </a:lnT>
+                    <a:lnB w="9525">
+                      <a:solidFill>
+                        <a:srgbClr val="EFEFEF"/>
+                      </a:solidFill>
+                    </a:lnB>
+                    <a:noFill/>
+                  </a:tcPr>
+                </a:tc>
+                <a:tc>
+                  <a:txBody>
+                    <a:bodyPr wrap="square"/>
+                    <a:lstStyle/>
+                    <a:p>
+                      <a:pPr algn="ctr"/>
+                      <a:r>
+                        <a:rPr sz="850" b="0">
+                          <a:solidFill>
+                            <a:srgbClr val="595959"/>
+                          </a:solidFill>
+                          <a:latin typeface="Montserrat Medium"/>
+                          <a:ea typeface="Montserrat Medium"/>
+                          <a:cs typeface="Montserrat Medium"/>
+                          <a:sym typeface="Montserrat Medium"/>
+                        </a:rPr>
+                        <a:t>R$ 311 → R$ 352 (+13,2%)</a:t>
+                      </a:r>
+                    </a:p>
+                  </a:txBody>
+                  <a:tcPr marL="45720" marR="45720" marT="18288" marB="18288" anchor="t">
+                    <a:lnL w="0">
+                      <a:noFill/>
+                    </a:lnL>
+                    <a:lnR w="0">
+                      <a:noFill/>
+                    </a:lnR>
+                    <a:lnT w="0">
+                      <a:noFill/>
+                    </a:lnT>
+                    <a:lnB w="9525">
+                      <a:solidFill>
+                        <a:srgbClr val="EFEFEF"/>
+                      </a:solidFill>
+                    </a:lnB>
+                    <a:noFill/>
+                  </a:tcPr>
+                </a:tc>
+              </a:tr>
+              <a:tr h="384048">
+                <a:tc>
+                  <a:txBody>
+                    <a:bodyPr wrap="square"/>
+                    <a:lstStyle/>
+                    <a:p>
+                      <a:pPr algn="l"/>
+                      <a:r>
+                        <a:rPr sz="850" b="0">
+                          <a:solidFill>
+                            <a:srgbClr val="595959"/>
+                          </a:solidFill>
+                          <a:latin typeface="Montserrat Medium"/>
+                          <a:ea typeface="Montserrat Medium"/>
+                          <a:cs typeface="Montserrat Medium"/>
+                          <a:sym typeface="Montserrat Medium"/>
+                        </a:rPr>
+                        <a:t>iOS</a:t>
+                      </a:r>
+                    </a:p>
+                  </a:txBody>
+                  <a:tcPr marL="45720" marR="45720" marT="18288" marB="18288" anchor="t">
+                    <a:lnL w="0">
+                      <a:noFill/>
+                    </a:lnL>
+                    <a:lnR w="0">
+                      <a:noFill/>
+                    </a:lnR>
+                    <a:lnT w="0">
+                      <a:noFill/>
+                    </a:lnT>
+                    <a:lnB w="9525">
+                      <a:solidFill>
+                        <a:srgbClr val="EFEFEF"/>
+                      </a:solidFill>
+                    </a:lnB>
+                    <a:noFill/>
+                  </a:tcPr>
+                </a:tc>
+                <a:tc>
+                  <a:txBody>
+                    <a:bodyPr wrap="square"/>
+                    <a:lstStyle/>
+                    <a:p>
+                      <a:pPr algn="ctr"/>
+                      <a:r>
+                        <a:rPr sz="850" b="0">
+                          <a:solidFill>
+                            <a:srgbClr val="595959"/>
+                          </a:solidFill>
+                          <a:latin typeface="Montserrat Medium"/>
+                          <a:ea typeface="Montserrat Medium"/>
+                          <a:cs typeface="Montserrat Medium"/>
+                          <a:sym typeface="Montserrat Medium"/>
+                        </a:rPr>
+                        <a:t>R$ 160.751 → R$ 121.422</a:t>
+                      </a:r>
+                    </a:p>
+                  </a:txBody>
+                  <a:tcPr marL="45720" marR="45720" marT="18288" marB="18288" anchor="t">
+                    <a:lnL w="0">
+                      <a:noFill/>
+                    </a:lnL>
+                    <a:lnR w="0">
+                      <a:noFill/>
+                    </a:lnR>
+                    <a:lnT w="0">
+                      <a:noFill/>
+                    </a:lnT>
+                    <a:lnB w="9525">
+                      <a:solidFill>
+                        <a:srgbClr val="EFEFEF"/>
+                      </a:solidFill>
+                    </a:lnB>
+                    <a:noFill/>
+                  </a:tcPr>
+                </a:tc>
+                <a:tc>
+                  <a:txBody>
+                    <a:bodyPr wrap="square"/>
+                    <a:lstStyle/>
+                    <a:p>
+                      <a:pPr algn="ctr"/>
+                      <a:r>
+                        <a:rPr sz="850" b="0">
+                          <a:solidFill>
+                            <a:srgbClr val="C5221F"/>
+                          </a:solidFill>
+                          <a:latin typeface="Montserrat Medium"/>
+                          <a:ea typeface="Montserrat Medium"/>
+                          <a:cs typeface="Montserrat Medium"/>
+                          <a:sym typeface="Montserrat Medium"/>
+                        </a:rPr>
+                        <a:t>-R$ 39.329 (-24,5%)</a:t>
+                      </a:r>
+                    </a:p>
+                  </a:txBody>
+                  <a:tcPr marL="45720" marR="45720" marT="18288" marB="18288" anchor="t">
+                    <a:lnL w="0">
+                      <a:noFill/>
+                    </a:lnL>
+                    <a:lnR w="0">
+                      <a:noFill/>
+                    </a:lnR>
+                    <a:lnT w="0">
+                      <a:noFill/>
+                    </a:lnT>
+                    <a:lnB w="9525">
+                      <a:solidFill>
+                        <a:srgbClr val="EFEFEF"/>
+                      </a:solidFill>
+                    </a:lnB>
+                    <a:noFill/>
+                  </a:tcPr>
+                </a:tc>
+                <a:tc>
+                  <a:txBody>
+                    <a:bodyPr wrap="square"/>
+                    <a:lstStyle/>
+                    <a:p>
+                      <a:pPr algn="ctr"/>
+                      <a:r>
+                        <a:rPr sz="850" b="0">
+                          <a:solidFill>
+                            <a:srgbClr val="C5221F"/>
+                          </a:solidFill>
+                          <a:latin typeface="Montserrat Medium"/>
+                          <a:ea typeface="Montserrat Medium"/>
+                          <a:cs typeface="Montserrat Medium"/>
+                          <a:sym typeface="Montserrat Medium"/>
+                        </a:rPr>
+                        <a:t>-12,1%</a:t>
+                      </a:r>
+                    </a:p>
+                  </a:txBody>
+                  <a:tcPr marL="45720" marR="45720" marT="18288" marB="18288" anchor="t">
+                    <a:lnL w="0">
+                      <a:noFill/>
+                    </a:lnL>
+                    <a:lnR w="0">
+                      <a:noFill/>
+                    </a:lnR>
+                    <a:lnT w="0">
+                      <a:noFill/>
+                    </a:lnT>
+                    <a:lnB w="9525">
+                      <a:solidFill>
+                        <a:srgbClr val="EFEFEF"/>
+                      </a:solidFill>
+                    </a:lnB>
+                    <a:noFill/>
+                  </a:tcPr>
+                </a:tc>
+                <a:tc>
+                  <a:txBody>
+                    <a:bodyPr wrap="square"/>
+                    <a:lstStyle/>
+                    <a:p>
+                      <a:pPr algn="ctr"/>
+                      <a:r>
+                        <a:rPr sz="850" b="0">
+                          <a:solidFill>
+                            <a:srgbClr val="595959"/>
+                          </a:solidFill>
+                          <a:latin typeface="Montserrat Medium"/>
+                          <a:ea typeface="Montserrat Medium"/>
+                          <a:cs typeface="Montserrat Medium"/>
+                          <a:sym typeface="Montserrat Medium"/>
+                        </a:rPr>
+                        <a:t>2,26% → 2,05% (-0,21 p.p.)</a:t>
+                      </a:r>
+                    </a:p>
+                  </a:txBody>
+                  <a:tcPr marL="45720" marR="45720" marT="18288" marB="18288" anchor="t">
+                    <a:lnL w="0">
+                      <a:noFill/>
+                    </a:lnL>
+                    <a:lnR w="0">
+                      <a:noFill/>
+                    </a:lnR>
+                    <a:lnT w="0">
+                      <a:noFill/>
+                    </a:lnT>
+                    <a:lnB w="9525">
+                      <a:solidFill>
+                        <a:srgbClr val="EFEFEF"/>
+                      </a:solidFill>
+                    </a:lnB>
+                    <a:noFill/>
+                  </a:tcPr>
+                </a:tc>
+                <a:tc>
+                  <a:txBody>
+                    <a:bodyPr wrap="square"/>
+                    <a:lstStyle/>
+                    <a:p>
+                      <a:pPr algn="ctr"/>
+                      <a:r>
+                        <a:rPr sz="850" b="0">
+                          <a:solidFill>
+                            <a:srgbClr val="595959"/>
+                          </a:solidFill>
+                          <a:latin typeface="Montserrat Medium"/>
+                          <a:ea typeface="Montserrat Medium"/>
+                          <a:cs typeface="Montserrat Medium"/>
+                          <a:sym typeface="Montserrat Medium"/>
+                        </a:rPr>
+                        <a:t>R$ 391 → R$ 370 (-5,3%)</a:t>
+                      </a:r>
+                    </a:p>
+                  </a:txBody>
+                  <a:tcPr marL="45720" marR="45720" marT="18288" marB="18288" anchor="t">
+                    <a:lnL w="0">
+                      <a:noFill/>
+                    </a:lnL>
+                    <a:lnR w="0">
+                      <a:noFill/>
+                    </a:lnR>
+                    <a:lnT w="0">
+                      <a:noFill/>
+                    </a:lnT>
+                    <a:lnB w="9525">
+                      <a:solidFill>
+                        <a:srgbClr val="EFEFEF"/>
+                      </a:solidFill>
+                    </a:lnB>
+                    <a:noFill/>
+                  </a:tcPr>
+                </a:tc>
+              </a:tr>
+            </a:tbl>
+          </a:graphicData>
+        </a:graphic>
+      </p:graphicFrame>
+    </p:spTree>
+  </p:cSld>
+  <p:clrMapOvr>
+    <a:masterClrMapping/>
+  </p:clrMapOvr>
+</p:sld>
+</file>
+
+<file path=ppt/slides/slide21.xml><?xml version="1.0" encoding="utf-8"?>
+<p:sld xmlns:a="http://schemas.openxmlformats.org/drawingml/2006/main" xmlns:p="http://schemas.openxmlformats.org/presentationml/2006/main" xmlns:r="http://schemas.openxmlformats.org/officeDocument/2006/relationships">
+  <p:cSld>
+    <p:spTree>
+      <p:nvGrpSpPr>
+        <p:cNvPr id="1" name=""/>
+        <p:cNvGrpSpPr/>
+        <p:nvPr/>
+      </p:nvGrpSpPr>
+      <p:grpSpPr/>
+      <p:sp>
+        <p:nvSpPr>
+          <p:cNvPr id="2" name="TextBox 1"/>
+          <p:cNvSpPr txBox="1"/>
+          <p:nvPr/>
+        </p:nvSpPr>
+        <p:spPr>
+          <a:xfrm>
+            <a:off x="301752" y="301752"/>
+            <a:ext cx="8458200" cy="630936"/>
+          </a:xfrm>
+          <a:prstGeom prst="rect">
+            <a:avLst/>
+          </a:prstGeom>
+          <a:noFill/>
+        </p:spPr>
+        <p:txBody>
+          <a:bodyPr wrap="square" lIns="91425" rIns="91425" tIns="91425" bIns="91425">
+            <a:spAutoFit/>
+          </a:bodyPr>
+          <a:lstStyle/>
+          <a:p>
+            <a:pPr algn="l">
+              <a:spcBef>
+                <a:spcPts val="0"/>
+              </a:spcBef>
+              <a:spcAft>
+                <a:spcPts val="0"/>
+              </a:spcAft>
+            </a:pPr>
+            <a:r>
+              <a:rPr sz="2400" b="1" i="0">
+                <a:solidFill>
+                  <a:srgbClr val="595959"/>
+                </a:solidFill>
+                <a:latin typeface="Montserrat"/>
+                <a:ea typeface="Montserrat"/>
+                <a:cs typeface="Montserrat"/>
+                <a:sym typeface="Montserrat"/>
+              </a:rPr>
               <a:t>Google Ads no iOS é a maior perda</a:t>
             </a:r>
           </a:p>
@@ -12995,7 +14943,7 @@
 </p:sld>
 </file>
 
-<file path=ppt/slides/slide21.xml><?xml version="1.0" encoding="utf-8"?>
+<file path=ppt/slides/slide22.xml><?xml version="1.0" encoding="utf-8"?>
 <p:sld xmlns:a="http://schemas.openxmlformats.org/drawingml/2006/main" xmlns:p="http://schemas.openxmlformats.org/presentationml/2006/main" xmlns:r="http://schemas.openxmlformats.org/officeDocument/2006/relationships">
   <p:cSld>
     <p:spTree>
@@ -14284,7 +16232,7 @@
 </p:sld>
 </file>
 
-<file path=ppt/slides/slide22.xml><?xml version="1.0" encoding="utf-8"?>
+<file path=ppt/slides/slide23.xml><?xml version="1.0" encoding="utf-8"?>
 <p:sld xmlns:a="http://schemas.openxmlformats.org/drawingml/2006/main" xmlns:p="http://schemas.openxmlformats.org/presentationml/2006/main" xmlns:r="http://schemas.openxmlformats.org/officeDocument/2006/relationships">
   <p:cSld>
     <p:spTree>
@@ -14573,7 +16521,7 @@
 </p:sld>
 </file>
 
-<file path=ppt/slides/slide23.xml><?xml version="1.0" encoding="utf-8"?>
+<file path=ppt/slides/slide24.xml><?xml version="1.0" encoding="utf-8"?>
 <p:sld xmlns:a="http://schemas.openxmlformats.org/drawingml/2006/main" xmlns:p="http://schemas.openxmlformats.org/presentationml/2006/main" xmlns:r="http://schemas.openxmlformats.org/officeDocument/2006/relationships">
   <p:cSld>
     <p:spTree>
@@ -15589,7 +17537,7 @@
 </p:sld>
 </file>
 
-<file path=ppt/slides/slide24.xml><?xml version="1.0" encoding="utf-8"?>
+<file path=ppt/slides/slide25.xml><?xml version="1.0" encoding="utf-8"?>
 <p:sld xmlns:a="http://schemas.openxmlformats.org/drawingml/2006/main" xmlns:p="http://schemas.openxmlformats.org/presentationml/2006/main" xmlns:r="http://schemas.openxmlformats.org/officeDocument/2006/relationships">
   <p:cSld>
     <p:spTree>
@@ -16416,7 +18364,7 @@
 </p:sld>
 </file>
 
-<file path=ppt/slides/slide25.xml><?xml version="1.0" encoding="utf-8"?>
+<file path=ppt/slides/slide26.xml><?xml version="1.0" encoding="utf-8"?>
 <p:sld xmlns:a="http://schemas.openxmlformats.org/drawingml/2006/main" xmlns:p="http://schemas.openxmlformats.org/presentationml/2006/main" xmlns:r="http://schemas.openxmlformats.org/officeDocument/2006/relationships">
   <p:cSld>
     <p:spTree>
@@ -17976,7 +19924,7 @@
 </p:sld>
 </file>
 
-<file path=ppt/slides/slide26.xml><?xml version="1.0" encoding="utf-8"?>
+<file path=ppt/slides/slide27.xml><?xml version="1.0" encoding="utf-8"?>
 <p:sld xmlns:a="http://schemas.openxmlformats.org/drawingml/2006/main" xmlns:p="http://schemas.openxmlformats.org/presentationml/2006/main" xmlns:r="http://schemas.openxmlformats.org/officeDocument/2006/relationships">
   <p:cSld>
     <p:spTree>
@@ -19265,7 +21213,7 @@
 </p:sld>
 </file>
 
-<file path=ppt/slides/slide27.xml><?xml version="1.0" encoding="utf-8"?>
+<file path=ppt/slides/slide28.xml><?xml version="1.0" encoding="utf-8"?>
 <p:sld xmlns:a="http://schemas.openxmlformats.org/drawingml/2006/main" xmlns:p="http://schemas.openxmlformats.org/presentationml/2006/main" xmlns:r="http://schemas.openxmlformats.org/officeDocument/2006/relationships">
   <p:cSld>
     <p:spTree>
@@ -19554,7 +21502,7 @@
 </p:sld>
 </file>
 
-<file path=ppt/slides/slide28.xml><?xml version="1.0" encoding="utf-8"?>
+<file path=ppt/slides/slide29.xml><?xml version="1.0" encoding="utf-8"?>
 <p:sld xmlns:a="http://schemas.openxmlformats.org/drawingml/2006/main" xmlns:p="http://schemas.openxmlformats.org/presentationml/2006/main" xmlns:r="http://schemas.openxmlformats.org/officeDocument/2006/relationships">
   <p:cSld>
     <p:bg>
@@ -19692,7 +21640,145 @@
 </p:sld>
 </file>
 
-<file path=ppt/slides/slide29.xml><?xml version="1.0" encoding="utf-8"?>
+<file path=ppt/slides/slide3.xml><?xml version="1.0" encoding="utf-8"?>
+<p:sld xmlns:a="http://schemas.openxmlformats.org/drawingml/2006/main" xmlns:p="http://schemas.openxmlformats.org/presentationml/2006/main" xmlns:r="http://schemas.openxmlformats.org/officeDocument/2006/relationships">
+  <p:cSld>
+    <p:bg>
+      <p:bgPr>
+        <a:solidFill>
+          <a:srgbClr val="434343"/>
+        </a:solidFill>
+        <a:effectLst/>
+      </p:bgPr>
+    </p:bg>
+    <p:spTree>
+      <p:nvGrpSpPr>
+        <p:cNvPr id="1" name=""/>
+        <p:cNvGrpSpPr/>
+        <p:nvPr/>
+      </p:nvGrpSpPr>
+      <p:grpSpPr/>
+      <p:sp>
+        <p:nvSpPr>
+          <p:cNvPr id="2" name="TextBox 1"/>
+          <p:cNvSpPr txBox="1"/>
+          <p:nvPr/>
+        </p:nvSpPr>
+        <p:spPr>
+          <a:xfrm>
+            <a:off x="329184" y="1463040"/>
+            <a:ext cx="4764024" cy="1783080"/>
+          </a:xfrm>
+          <a:prstGeom prst="rect">
+            <a:avLst/>
+          </a:prstGeom>
+          <a:noFill/>
+        </p:spPr>
+        <p:txBody>
+          <a:bodyPr wrap="square" lIns="91425" rIns="91425" tIns="91425" bIns="91425">
+            <a:spAutoFit/>
+          </a:bodyPr>
+          <a:lstStyle/>
+          <a:p>
+            <a:pPr algn="l">
+              <a:spcBef>
+                <a:spcPts val="0"/>
+              </a:spcBef>
+              <a:spcAft>
+                <a:spcPts val="0"/>
+              </a:spcAft>
+            </a:pPr>
+            <a:r>
+              <a:rPr sz="4800" b="1" i="0">
+                <a:solidFill>
+                  <a:srgbClr val="FFFFFF"/>
+                </a:solidFill>
+                <a:latin typeface="Montserrat"/>
+                <a:ea typeface="Montserrat"/>
+                <a:cs typeface="Montserrat"/>
+                <a:sym typeface="Montserrat"/>
+              </a:rPr>
+              <a:t>Visão do Grupo</a:t>
+            </a:r>
+          </a:p>
+        </p:txBody>
+      </p:sp>
+      <p:sp>
+        <p:nvSpPr>
+          <p:cNvPr id="3" name="TextBox 2"/>
+          <p:cNvSpPr txBox="1"/>
+          <p:nvPr/>
+        </p:nvSpPr>
+        <p:spPr>
+          <a:xfrm>
+            <a:off x="329184" y="4178808"/>
+            <a:ext cx="6373368" cy="658368"/>
+          </a:xfrm>
+          <a:prstGeom prst="rect">
+            <a:avLst/>
+          </a:prstGeom>
+          <a:noFill/>
+        </p:spPr>
+        <p:txBody>
+          <a:bodyPr wrap="square" lIns="91425" rIns="91425" tIns="91425" bIns="91425">
+            <a:spAutoFit/>
+          </a:bodyPr>
+          <a:lstStyle/>
+          <a:p>
+            <a:pPr algn="l">
+              <a:spcBef>
+                <a:spcPts val="0"/>
+              </a:spcBef>
+              <a:spcAft>
+                <a:spcPts val="0"/>
+              </a:spcAft>
+            </a:pPr>
+            <a:r>
+              <a:rPr sz="1200" b="1" i="0">
+                <a:solidFill>
+                  <a:srgbClr val="FFFFFF"/>
+                </a:solidFill>
+                <a:latin typeface="Montserrat"/>
+                <a:ea typeface="Montserrat"/>
+                <a:cs typeface="Montserrat"/>
+                <a:sym typeface="Montserrat"/>
+              </a:rPr>
+              <a:t>GROWTH | CRO</a:t>
+            </a:r>
+          </a:p>
+          <a:p>
+            <a:pPr algn="l">
+              <a:spcBef>
+                <a:spcPts val="0"/>
+              </a:spcBef>
+              <a:spcAft>
+                <a:spcPts val="0"/>
+              </a:spcAft>
+            </a:pPr>
+            <a:r>
+              <a:rPr sz="1200" b="1" i="0">
+                <a:solidFill>
+                  <a:srgbClr val="FFFFFF"/>
+                </a:solidFill>
+                <a:latin typeface="Montserrat"/>
+                <a:ea typeface="Montserrat"/>
+                <a:cs typeface="Montserrat"/>
+                <a:sym typeface="Montserrat"/>
+              </a:rPr>
+              <a:t>Setembro e tendência de outubro por bandeira</a:t>
+            </a:r>
+          </a:p>
+        </p:txBody>
+      </p:sp>
+    </p:spTree>
+  </p:cSld>
+  <p:clrMapOvr>
+    <a:masterClrMapping/>
+  </p:clrMapOvr>
+</p:sld>
+</file>
+
+<file path=ppt/slides/slide30.xml><?xml version="1.0" encoding="utf-8"?>
 <p:sld xmlns:a="http://schemas.openxmlformats.org/drawingml/2006/main" xmlns:p="http://schemas.openxmlformats.org/presentationml/2006/main" xmlns:r="http://schemas.openxmlformats.org/officeDocument/2006/relationships">
   <p:cSld>
     <p:spTree>
@@ -20324,145 +22410,7 @@
 </p:sld>
 </file>
 
-<file path=ppt/slides/slide3.xml><?xml version="1.0" encoding="utf-8"?>
-<p:sld xmlns:a="http://schemas.openxmlformats.org/drawingml/2006/main" xmlns:p="http://schemas.openxmlformats.org/presentationml/2006/main" xmlns:r="http://schemas.openxmlformats.org/officeDocument/2006/relationships">
-  <p:cSld>
-    <p:bg>
-      <p:bgPr>
-        <a:solidFill>
-          <a:srgbClr val="434343"/>
-        </a:solidFill>
-        <a:effectLst/>
-      </p:bgPr>
-    </p:bg>
-    <p:spTree>
-      <p:nvGrpSpPr>
-        <p:cNvPr id="1" name=""/>
-        <p:cNvGrpSpPr/>
-        <p:nvPr/>
-      </p:nvGrpSpPr>
-      <p:grpSpPr/>
-      <p:sp>
-        <p:nvSpPr>
-          <p:cNvPr id="2" name="TextBox 1"/>
-          <p:cNvSpPr txBox="1"/>
-          <p:nvPr/>
-        </p:nvSpPr>
-        <p:spPr>
-          <a:xfrm>
-            <a:off x="329184" y="1463040"/>
-            <a:ext cx="4764024" cy="1783080"/>
-          </a:xfrm>
-          <a:prstGeom prst="rect">
-            <a:avLst/>
-          </a:prstGeom>
-          <a:noFill/>
-        </p:spPr>
-        <p:txBody>
-          <a:bodyPr wrap="square" lIns="91425" rIns="91425" tIns="91425" bIns="91425">
-            <a:spAutoFit/>
-          </a:bodyPr>
-          <a:lstStyle/>
-          <a:p>
-            <a:pPr algn="l">
-              <a:spcBef>
-                <a:spcPts val="0"/>
-              </a:spcBef>
-              <a:spcAft>
-                <a:spcPts val="0"/>
-              </a:spcAft>
-            </a:pPr>
-            <a:r>
-              <a:rPr sz="4800" b="1" i="0">
-                <a:solidFill>
-                  <a:srgbClr val="FFFFFF"/>
-                </a:solidFill>
-                <a:latin typeface="Montserrat"/>
-                <a:ea typeface="Montserrat"/>
-                <a:cs typeface="Montserrat"/>
-                <a:sym typeface="Montserrat"/>
-              </a:rPr>
-              <a:t>Visão do Grupo</a:t>
-            </a:r>
-          </a:p>
-        </p:txBody>
-      </p:sp>
-      <p:sp>
-        <p:nvSpPr>
-          <p:cNvPr id="3" name="TextBox 2"/>
-          <p:cNvSpPr txBox="1"/>
-          <p:nvPr/>
-        </p:nvSpPr>
-        <p:spPr>
-          <a:xfrm>
-            <a:off x="329184" y="4178808"/>
-            <a:ext cx="6373368" cy="658368"/>
-          </a:xfrm>
-          <a:prstGeom prst="rect">
-            <a:avLst/>
-          </a:prstGeom>
-          <a:noFill/>
-        </p:spPr>
-        <p:txBody>
-          <a:bodyPr wrap="square" lIns="91425" rIns="91425" tIns="91425" bIns="91425">
-            <a:spAutoFit/>
-          </a:bodyPr>
-          <a:lstStyle/>
-          <a:p>
-            <a:pPr algn="l">
-              <a:spcBef>
-                <a:spcPts val="0"/>
-              </a:spcBef>
-              <a:spcAft>
-                <a:spcPts val="0"/>
-              </a:spcAft>
-            </a:pPr>
-            <a:r>
-              <a:rPr sz="1200" b="1" i="0">
-                <a:solidFill>
-                  <a:srgbClr val="FFFFFF"/>
-                </a:solidFill>
-                <a:latin typeface="Montserrat"/>
-                <a:ea typeface="Montserrat"/>
-                <a:cs typeface="Montserrat"/>
-                <a:sym typeface="Montserrat"/>
-              </a:rPr>
-              <a:t>GROWTH | CRO</a:t>
-            </a:r>
-          </a:p>
-          <a:p>
-            <a:pPr algn="l">
-              <a:spcBef>
-                <a:spcPts val="0"/>
-              </a:spcBef>
-              <a:spcAft>
-                <a:spcPts val="0"/>
-              </a:spcAft>
-            </a:pPr>
-            <a:r>
-              <a:rPr sz="1200" b="1" i="0">
-                <a:solidFill>
-                  <a:srgbClr val="FFFFFF"/>
-                </a:solidFill>
-                <a:latin typeface="Montserrat"/>
-                <a:ea typeface="Montserrat"/>
-                <a:cs typeface="Montserrat"/>
-                <a:sym typeface="Montserrat"/>
-              </a:rPr>
-              <a:t>Setembro e tendência de outubro por bandeira</a:t>
-            </a:r>
-          </a:p>
-        </p:txBody>
-      </p:sp>
-    </p:spTree>
-  </p:cSld>
-  <p:clrMapOvr>
-    <a:masterClrMapping/>
-  </p:clrMapOvr>
-</p:sld>
-</file>
-
-<file path=ppt/slides/slide30.xml><?xml version="1.0" encoding="utf-8"?>
+<file path=ppt/slides/slide31.xml><?xml version="1.0" encoding="utf-8"?>
 <p:sld xmlns:a="http://schemas.openxmlformats.org/drawingml/2006/main" xmlns:p="http://schemas.openxmlformats.org/presentationml/2006/main" xmlns:r="http://schemas.openxmlformats.org/officeDocument/2006/relationships">
   <p:cSld>
     <p:spTree>
@@ -21599,7 +23547,7 @@
 </p:sld>
 </file>
 
-<file path=ppt/slides/slide31.xml><?xml version="1.0" encoding="utf-8"?>
+<file path=ppt/slides/slide32.xml><?xml version="1.0" encoding="utf-8"?>
 <p:sld xmlns:a="http://schemas.openxmlformats.org/drawingml/2006/main" xmlns:p="http://schemas.openxmlformats.org/presentationml/2006/main" xmlns:r="http://schemas.openxmlformats.org/officeDocument/2006/relationships">
   <p:cSld>
     <p:spTree>
@@ -23467,7 +25415,7 @@
 </p:sld>
 </file>
 
-<file path=ppt/slides/slide32.xml><?xml version="1.0" encoding="utf-8"?>
+<file path=ppt/slides/slide33.xml><?xml version="1.0" encoding="utf-8"?>
 <p:sld xmlns:a="http://schemas.openxmlformats.org/drawingml/2006/main" xmlns:p="http://schemas.openxmlformats.org/presentationml/2006/main" xmlns:r="http://schemas.openxmlformats.org/officeDocument/2006/relationships">
   <p:cSld>
     <p:spTree>
@@ -24756,7 +26704,7 @@
 </p:sld>
 </file>
 
-<file path=ppt/slides/slide33.xml><?xml version="1.0" encoding="utf-8"?>
+<file path=ppt/slides/slide34.xml><?xml version="1.0" encoding="utf-8"?>
 <p:sld xmlns:a="http://schemas.openxmlformats.org/drawingml/2006/main" xmlns:p="http://schemas.openxmlformats.org/presentationml/2006/main" xmlns:r="http://schemas.openxmlformats.org/officeDocument/2006/relationships">
   <p:cSld>
     <p:spTree>
@@ -25045,7 +26993,7 @@
 </p:sld>
 </file>
 
-<file path=ppt/slides/slide34.xml><?xml version="1.0" encoding="utf-8"?>
+<file path=ppt/slides/slide35.xml><?xml version="1.0" encoding="utf-8"?>
 <p:sld xmlns:a="http://schemas.openxmlformats.org/drawingml/2006/main" xmlns:p="http://schemas.openxmlformats.org/presentationml/2006/main" xmlns:r="http://schemas.openxmlformats.org/officeDocument/2006/relationships">
   <p:cSld>
     <p:spTree>
@@ -26061,7 +28009,7 @@
 </p:sld>
 </file>
 
-<file path=ppt/slides/slide35.xml><?xml version="1.0" encoding="utf-8"?>
+<file path=ppt/slides/slide36.xml><?xml version="1.0" encoding="utf-8"?>
 <p:sld xmlns:a="http://schemas.openxmlformats.org/drawingml/2006/main" xmlns:p="http://schemas.openxmlformats.org/presentationml/2006/main" xmlns:r="http://schemas.openxmlformats.org/officeDocument/2006/relationships">
   <p:cSld>
     <p:spTree>
@@ -27043,7 +28991,7 @@
 </p:sld>
 </file>
 
-<file path=ppt/slides/slide36.xml><?xml version="1.0" encoding="utf-8"?>
+<file path=ppt/slides/slide37.xml><?xml version="1.0" encoding="utf-8"?>
 <p:sld xmlns:a="http://schemas.openxmlformats.org/drawingml/2006/main" xmlns:p="http://schemas.openxmlformats.org/presentationml/2006/main" xmlns:r="http://schemas.openxmlformats.org/officeDocument/2006/relationships">
   <p:cSld>
     <p:spTree>
@@ -28603,7 +30551,7 @@
 </p:sld>
 </file>
 
-<file path=ppt/slides/slide37.xml><?xml version="1.0" encoding="utf-8"?>
+<file path=ppt/slides/slide38.xml><?xml version="1.0" encoding="utf-8"?>
 <p:sld xmlns:a="http://schemas.openxmlformats.org/drawingml/2006/main" xmlns:p="http://schemas.openxmlformats.org/presentationml/2006/main" xmlns:r="http://schemas.openxmlformats.org/officeDocument/2006/relationships">
   <p:cSld>
     <p:spTree>
@@ -29892,7 +31840,7 @@
 </p:sld>
 </file>
 
-<file path=ppt/slides/slide38.xml><?xml version="1.0" encoding="utf-8"?>
+<file path=ppt/slides/slide39.xml><?xml version="1.0" encoding="utf-8"?>
 <p:sld xmlns:a="http://schemas.openxmlformats.org/drawingml/2006/main" xmlns:p="http://schemas.openxmlformats.org/presentationml/2006/main" xmlns:r="http://schemas.openxmlformats.org/officeDocument/2006/relationships">
   <p:cSld>
     <p:spTree>
@@ -30181,144 +32129,6 @@
 </p:sld>
 </file>
 
-<file path=ppt/slides/slide39.xml><?xml version="1.0" encoding="utf-8"?>
-<p:sld xmlns:a="http://schemas.openxmlformats.org/drawingml/2006/main" xmlns:p="http://schemas.openxmlformats.org/presentationml/2006/main" xmlns:r="http://schemas.openxmlformats.org/officeDocument/2006/relationships">
-  <p:cSld>
-    <p:bg>
-      <p:bgPr>
-        <a:solidFill>
-          <a:srgbClr val="434343"/>
-        </a:solidFill>
-        <a:effectLst/>
-      </p:bgPr>
-    </p:bg>
-    <p:spTree>
-      <p:nvGrpSpPr>
-        <p:cNvPr id="1" name=""/>
-        <p:cNvGrpSpPr/>
-        <p:nvPr/>
-      </p:nvGrpSpPr>
-      <p:grpSpPr/>
-      <p:sp>
-        <p:nvSpPr>
-          <p:cNvPr id="2" name="TextBox 1"/>
-          <p:cNvSpPr txBox="1"/>
-          <p:nvPr/>
-        </p:nvSpPr>
-        <p:spPr>
-          <a:xfrm>
-            <a:off x="329184" y="1463040"/>
-            <a:ext cx="4764024" cy="1783080"/>
-          </a:xfrm>
-          <a:prstGeom prst="rect">
-            <a:avLst/>
-          </a:prstGeom>
-          <a:noFill/>
-        </p:spPr>
-        <p:txBody>
-          <a:bodyPr wrap="square" lIns="91425" rIns="91425" tIns="91425" bIns="91425">
-            <a:spAutoFit/>
-          </a:bodyPr>
-          <a:lstStyle/>
-          <a:p>
-            <a:pPr algn="l">
-              <a:spcBef>
-                <a:spcPts val="0"/>
-              </a:spcBef>
-              <a:spcAft>
-                <a:spcPts val="0"/>
-              </a:spcAft>
-            </a:pPr>
-            <a:r>
-              <a:rPr sz="4800" b="1" i="0">
-                <a:solidFill>
-                  <a:srgbClr val="FFFFFF"/>
-                </a:solidFill>
-                <a:latin typeface="Montserrat"/>
-                <a:ea typeface="Montserrat"/>
-                <a:cs typeface="Montserrat"/>
-                <a:sym typeface="Montserrat"/>
-              </a:rPr>
-              <a:t>Paquetá Calçados</a:t>
-            </a:r>
-          </a:p>
-        </p:txBody>
-      </p:sp>
-      <p:sp>
-        <p:nvSpPr>
-          <p:cNvPr id="3" name="TextBox 2"/>
-          <p:cNvSpPr txBox="1"/>
-          <p:nvPr/>
-        </p:nvSpPr>
-        <p:spPr>
-          <a:xfrm>
-            <a:off x="329184" y="4178808"/>
-            <a:ext cx="6373368" cy="658368"/>
-          </a:xfrm>
-          <a:prstGeom prst="rect">
-            <a:avLst/>
-          </a:prstGeom>
-          <a:noFill/>
-        </p:spPr>
-        <p:txBody>
-          <a:bodyPr wrap="square" lIns="91425" rIns="91425" tIns="91425" bIns="91425">
-            <a:spAutoFit/>
-          </a:bodyPr>
-          <a:lstStyle/>
-          <a:p>
-            <a:pPr algn="l">
-              <a:spcBef>
-                <a:spcPts val="0"/>
-              </a:spcBef>
-              <a:spcAft>
-                <a:spcPts val="0"/>
-              </a:spcAft>
-            </a:pPr>
-            <a:r>
-              <a:rPr sz="1200" b="1" i="0">
-                <a:solidFill>
-                  <a:srgbClr val="FFFFFF"/>
-                </a:solidFill>
-                <a:latin typeface="Montserrat"/>
-                <a:ea typeface="Montserrat"/>
-                <a:cs typeface="Montserrat"/>
-                <a:sym typeface="Montserrat"/>
-              </a:rPr>
-              <a:t>GROWTH | CRO</a:t>
-            </a:r>
-          </a:p>
-          <a:p>
-            <a:pPr algn="l">
-              <a:spcBef>
-                <a:spcPts val="0"/>
-              </a:spcBef>
-              <a:spcAft>
-                <a:spcPts val="0"/>
-              </a:spcAft>
-            </a:pPr>
-            <a:r>
-              <a:rPr sz="1200" b="1" i="0">
-                <a:solidFill>
-                  <a:srgbClr val="FFFFFF"/>
-                </a:solidFill>
-                <a:latin typeface="Montserrat"/>
-                <a:ea typeface="Montserrat"/>
-                <a:cs typeface="Montserrat"/>
-                <a:sym typeface="Montserrat"/>
-              </a:rPr>
-              <a:t>Setembro e tendência de outubro por bandeira</a:t>
-            </a:r>
-          </a:p>
-        </p:txBody>
-      </p:sp>
-    </p:spTree>
-  </p:cSld>
-  <p:clrMapOvr>
-    <a:masterClrMapping/>
-  </p:clrMapOvr>
-</p:sld>
-</file>
-
 <file path=ppt/slides/slide4.xml><?xml version="1.0" encoding="utf-8"?>
 <p:sld xmlns:a="http://schemas.openxmlformats.org/drawingml/2006/main" xmlns:p="http://schemas.openxmlformats.org/presentationml/2006/main" xmlns:r="http://schemas.openxmlformats.org/officeDocument/2006/relationships">
   <p:cSld>
@@ -32148,6 +33958,144 @@
 </file>
 
 <file path=ppt/slides/slide40.xml><?xml version="1.0" encoding="utf-8"?>
+<p:sld xmlns:a="http://schemas.openxmlformats.org/drawingml/2006/main" xmlns:p="http://schemas.openxmlformats.org/presentationml/2006/main" xmlns:r="http://schemas.openxmlformats.org/officeDocument/2006/relationships">
+  <p:cSld>
+    <p:bg>
+      <p:bgPr>
+        <a:solidFill>
+          <a:srgbClr val="434343"/>
+        </a:solidFill>
+        <a:effectLst/>
+      </p:bgPr>
+    </p:bg>
+    <p:spTree>
+      <p:nvGrpSpPr>
+        <p:cNvPr id="1" name=""/>
+        <p:cNvGrpSpPr/>
+        <p:nvPr/>
+      </p:nvGrpSpPr>
+      <p:grpSpPr/>
+      <p:sp>
+        <p:nvSpPr>
+          <p:cNvPr id="2" name="TextBox 1"/>
+          <p:cNvSpPr txBox="1"/>
+          <p:nvPr/>
+        </p:nvSpPr>
+        <p:spPr>
+          <a:xfrm>
+            <a:off x="329184" y="1463040"/>
+            <a:ext cx="4764024" cy="1783080"/>
+          </a:xfrm>
+          <a:prstGeom prst="rect">
+            <a:avLst/>
+          </a:prstGeom>
+          <a:noFill/>
+        </p:spPr>
+        <p:txBody>
+          <a:bodyPr wrap="square" lIns="91425" rIns="91425" tIns="91425" bIns="91425">
+            <a:spAutoFit/>
+          </a:bodyPr>
+          <a:lstStyle/>
+          <a:p>
+            <a:pPr algn="l">
+              <a:spcBef>
+                <a:spcPts val="0"/>
+              </a:spcBef>
+              <a:spcAft>
+                <a:spcPts val="0"/>
+              </a:spcAft>
+            </a:pPr>
+            <a:r>
+              <a:rPr sz="4800" b="1" i="0">
+                <a:solidFill>
+                  <a:srgbClr val="FFFFFF"/>
+                </a:solidFill>
+                <a:latin typeface="Montserrat"/>
+                <a:ea typeface="Montserrat"/>
+                <a:cs typeface="Montserrat"/>
+                <a:sym typeface="Montserrat"/>
+              </a:rPr>
+              <a:t>Paquetá Calçados</a:t>
+            </a:r>
+          </a:p>
+        </p:txBody>
+      </p:sp>
+      <p:sp>
+        <p:nvSpPr>
+          <p:cNvPr id="3" name="TextBox 2"/>
+          <p:cNvSpPr txBox="1"/>
+          <p:nvPr/>
+        </p:nvSpPr>
+        <p:spPr>
+          <a:xfrm>
+            <a:off x="329184" y="4178808"/>
+            <a:ext cx="6373368" cy="658368"/>
+          </a:xfrm>
+          <a:prstGeom prst="rect">
+            <a:avLst/>
+          </a:prstGeom>
+          <a:noFill/>
+        </p:spPr>
+        <p:txBody>
+          <a:bodyPr wrap="square" lIns="91425" rIns="91425" tIns="91425" bIns="91425">
+            <a:spAutoFit/>
+          </a:bodyPr>
+          <a:lstStyle/>
+          <a:p>
+            <a:pPr algn="l">
+              <a:spcBef>
+                <a:spcPts val="0"/>
+              </a:spcBef>
+              <a:spcAft>
+                <a:spcPts val="0"/>
+              </a:spcAft>
+            </a:pPr>
+            <a:r>
+              <a:rPr sz="1200" b="1" i="0">
+                <a:solidFill>
+                  <a:srgbClr val="FFFFFF"/>
+                </a:solidFill>
+                <a:latin typeface="Montserrat"/>
+                <a:ea typeface="Montserrat"/>
+                <a:cs typeface="Montserrat"/>
+                <a:sym typeface="Montserrat"/>
+              </a:rPr>
+              <a:t>GROWTH | CRO</a:t>
+            </a:r>
+          </a:p>
+          <a:p>
+            <a:pPr algn="l">
+              <a:spcBef>
+                <a:spcPts val="0"/>
+              </a:spcBef>
+              <a:spcAft>
+                <a:spcPts val="0"/>
+              </a:spcAft>
+            </a:pPr>
+            <a:r>
+              <a:rPr sz="1200" b="1" i="0">
+                <a:solidFill>
+                  <a:srgbClr val="FFFFFF"/>
+                </a:solidFill>
+                <a:latin typeface="Montserrat"/>
+                <a:ea typeface="Montserrat"/>
+                <a:cs typeface="Montserrat"/>
+                <a:sym typeface="Montserrat"/>
+              </a:rPr>
+              <a:t>Setembro e tendência de outubro por bandeira</a:t>
+            </a:r>
+          </a:p>
+        </p:txBody>
+      </p:sp>
+    </p:spTree>
+  </p:cSld>
+  <p:clrMapOvr>
+    <a:masterClrMapping/>
+  </p:clrMapOvr>
+</p:sld>
+</file>
+
+<file path=ppt/slides/slide41.xml><?xml version="1.0" encoding="utf-8"?>
 <p:sld xmlns:a="http://schemas.openxmlformats.org/drawingml/2006/main" xmlns:p="http://schemas.openxmlformats.org/presentationml/2006/main" xmlns:r="http://schemas.openxmlformats.org/officeDocument/2006/relationships">
   <p:cSld>
     <p:spTree>
@@ -32779,7 +34727,7 @@
 </p:sld>
 </file>
 
-<file path=ppt/slides/slide41.xml><?xml version="1.0" encoding="utf-8"?>
+<file path=ppt/slides/slide42.xml><?xml version="1.0" encoding="utf-8"?>
 <p:sld xmlns:a="http://schemas.openxmlformats.org/drawingml/2006/main" xmlns:p="http://schemas.openxmlformats.org/presentationml/2006/main" xmlns:r="http://schemas.openxmlformats.org/officeDocument/2006/relationships">
   <p:cSld>
     <p:spTree>
@@ -33916,7 +35864,7 @@
 </p:sld>
 </file>
 
-<file path=ppt/slides/slide42.xml><?xml version="1.0" encoding="utf-8"?>
+<file path=ppt/slides/slide43.xml><?xml version="1.0" encoding="utf-8"?>
 <p:sld xmlns:a="http://schemas.openxmlformats.org/drawingml/2006/main" xmlns:p="http://schemas.openxmlformats.org/presentationml/2006/main" xmlns:r="http://schemas.openxmlformats.org/officeDocument/2006/relationships">
   <p:cSld>
     <p:spTree>
@@ -35784,7 +37732,7 @@
 </p:sld>
 </file>
 
-<file path=ppt/slides/slide43.xml><?xml version="1.0" encoding="utf-8"?>
+<file path=ppt/slides/slide44.xml><?xml version="1.0" encoding="utf-8"?>
 <p:sld xmlns:a="http://schemas.openxmlformats.org/drawingml/2006/main" xmlns:p="http://schemas.openxmlformats.org/presentationml/2006/main" xmlns:r="http://schemas.openxmlformats.org/officeDocument/2006/relationships">
   <p:cSld>
     <p:spTree>
@@ -37073,7 +39021,7 @@
 </p:sld>
 </file>
 
-<file path=ppt/slides/slide44.xml><?xml version="1.0" encoding="utf-8"?>
+<file path=ppt/slides/slide45.xml><?xml version="1.0" encoding="utf-8"?>
 <p:sld xmlns:a="http://schemas.openxmlformats.org/drawingml/2006/main" xmlns:p="http://schemas.openxmlformats.org/presentationml/2006/main" xmlns:r="http://schemas.openxmlformats.org/officeDocument/2006/relationships">
   <p:cSld>
     <p:spTree>
@@ -37362,7 +39310,7 @@
 </p:sld>
 </file>
 
-<file path=ppt/slides/slide45.xml><?xml version="1.0" encoding="utf-8"?>
+<file path=ppt/slides/slide46.xml><?xml version="1.0" encoding="utf-8"?>
 <p:sld xmlns:a="http://schemas.openxmlformats.org/drawingml/2006/main" xmlns:p="http://schemas.openxmlformats.org/presentationml/2006/main" xmlns:r="http://schemas.openxmlformats.org/officeDocument/2006/relationships">
   <p:cSld>
     <p:spTree>
@@ -38378,7 +40326,7 @@
 </p:sld>
 </file>
 
-<file path=ppt/slides/slide46.xml><?xml version="1.0" encoding="utf-8"?>
+<file path=ppt/slides/slide47.xml><?xml version="1.0" encoding="utf-8"?>
 <p:sld xmlns:a="http://schemas.openxmlformats.org/drawingml/2006/main" xmlns:p="http://schemas.openxmlformats.org/presentationml/2006/main" xmlns:r="http://schemas.openxmlformats.org/officeDocument/2006/relationships">
   <p:cSld>
     <p:spTree>
@@ -39360,7 +41308,7 @@
 </p:sld>
 </file>
 
-<file path=ppt/slides/slide47.xml><?xml version="1.0" encoding="utf-8"?>
+<file path=ppt/slides/slide48.xml><?xml version="1.0" encoding="utf-8"?>
 <p:sld xmlns:a="http://schemas.openxmlformats.org/drawingml/2006/main" xmlns:p="http://schemas.openxmlformats.org/presentationml/2006/main" xmlns:r="http://schemas.openxmlformats.org/officeDocument/2006/relationships">
   <p:cSld>
     <p:spTree>
@@ -40920,7 +42868,7 @@
 </p:sld>
 </file>
 
-<file path=ppt/slides/slide48.xml><?xml version="1.0" encoding="utf-8"?>
+<file path=ppt/slides/slide49.xml><?xml version="1.0" encoding="utf-8"?>
 <p:sld xmlns:a="http://schemas.openxmlformats.org/drawingml/2006/main" xmlns:p="http://schemas.openxmlformats.org/presentationml/2006/main" xmlns:r="http://schemas.openxmlformats.org/officeDocument/2006/relationships">
   <p:cSld>
     <p:spTree>
@@ -42209,7 +44157,1373 @@
 </p:sld>
 </file>
 
-<file path=ppt/slides/slide49.xml><?xml version="1.0" encoding="utf-8"?>
+<file path=ppt/slides/slide5.xml><?xml version="1.0" encoding="utf-8"?>
+<p:sld xmlns:a="http://schemas.openxmlformats.org/drawingml/2006/main" xmlns:p="http://schemas.openxmlformats.org/presentationml/2006/main" xmlns:r="http://schemas.openxmlformats.org/officeDocument/2006/relationships">
+  <p:cSld>
+    <p:spTree>
+      <p:nvGrpSpPr>
+        <p:cNvPr id="1" name=""/>
+        <p:cNvGrpSpPr/>
+        <p:nvPr/>
+      </p:nvGrpSpPr>
+      <p:grpSpPr/>
+      <p:sp>
+        <p:nvSpPr>
+          <p:cNvPr id="2" name="TextBox 1"/>
+          <p:cNvSpPr txBox="1"/>
+          <p:nvPr/>
+        </p:nvSpPr>
+        <p:spPr>
+          <a:xfrm>
+            <a:off x="301752" y="301752"/>
+            <a:ext cx="8458200" cy="630936"/>
+          </a:xfrm>
+          <a:prstGeom prst="rect">
+            <a:avLst/>
+          </a:prstGeom>
+          <a:noFill/>
+        </p:spPr>
+        <p:txBody>
+          <a:bodyPr wrap="square" lIns="91425" rIns="91425" tIns="91425" bIns="91425">
+            <a:spAutoFit/>
+          </a:bodyPr>
+          <a:lstStyle/>
+          <a:p>
+            <a:pPr algn="l">
+              <a:spcBef>
+                <a:spcPts val="0"/>
+              </a:spcBef>
+              <a:spcAft>
+                <a:spcPts val="0"/>
+              </a:spcAft>
+            </a:pPr>
+            <a:r>
+              <a:rPr sz="2400" b="1" i="0">
+                <a:solidFill>
+                  <a:srgbClr val="595959"/>
+                </a:solidFill>
+                <a:latin typeface="Montserrat"/>
+                <a:ea typeface="Montserrat"/>
+                <a:cs typeface="Montserrat"/>
+                <a:sym typeface="Montserrat"/>
+              </a:rPr>
+              <a:t>Grupo: 83% da meta de 01 a 05/10</a:t>
+            </a:r>
+          </a:p>
+        </p:txBody>
+      </p:sp>
+      <p:cxnSp>
+        <p:nvCxnSpPr>
+          <p:cNvPr id="3" name="Connector 2"/>
+          <p:cNvCxnSpPr/>
+          <p:nvPr/>
+        </p:nvCxnSpPr>
+        <p:spPr>
+          <a:xfrm>
+            <a:off x="411480" y="932688"/>
+            <a:ext cx="8247887" cy="0"/>
+          </a:xfrm>
+          <a:prstGeom prst="line">
+            <a:avLst/>
+          </a:prstGeom>
+          <a:ln w="19050">
+            <a:solidFill>
+              <a:srgbClr val="EFEFEF"/>
+            </a:solidFill>
+          </a:ln>
+          <a:effectLst/>
+        </p:spPr>
+      </p:cxnSp>
+      <p:sp>
+        <p:nvSpPr>
+          <p:cNvPr id="4" name="TextBox 3"/>
+          <p:cNvSpPr txBox="1"/>
+          <p:nvPr/>
+        </p:nvSpPr>
+        <p:spPr>
+          <a:xfrm>
+            <a:off x="411480" y="1197864"/>
+            <a:ext cx="8458200" cy="2523744"/>
+          </a:xfrm>
+          <a:prstGeom prst="rect">
+            <a:avLst/>
+          </a:prstGeom>
+          <a:noFill/>
+        </p:spPr>
+        <p:txBody>
+          <a:bodyPr wrap="square" lIns="91425" rIns="91425" tIns="91425" bIns="91425">
+            <a:spAutoFit/>
+          </a:bodyPr>
+          <a:lstStyle/>
+          <a:p>
+            <a:pPr algn="l">
+              <a:spcBef>
+                <a:spcPts val="1000"/>
+              </a:spcBef>
+              <a:spcAft>
+                <a:spcPts val="0"/>
+              </a:spcAft>
+            </a:pPr>
+            <a:r>
+              <a:rPr sz="1300" b="0" i="0">
+                <a:solidFill>
+                  <a:srgbClr val="595959"/>
+                </a:solidFill>
+                <a:latin typeface="Montserrat Medium"/>
+                <a:ea typeface="Montserrat Medium"/>
+                <a:cs typeface="Montserrat Medium"/>
+                <a:sym typeface="Montserrat Medium"/>
+              </a:rPr>
+              <a:t>Gap de R$ 36.919: Oscar web, app e Esportes abaixo da meta; Calçados acima. O faturado de outubro ainda está amadurecendo.</a:t>
+            </a:r>
+          </a:p>
+        </p:txBody>
+      </p:sp>
+      <p:sp>
+        <p:nvSpPr>
+          <p:cNvPr id="5" name="TextBox 4"/>
+          <p:cNvSpPr txBox="1"/>
+          <p:nvPr/>
+        </p:nvSpPr>
+        <p:spPr>
+          <a:xfrm>
+            <a:off x="411480" y="4553712"/>
+            <a:ext cx="8458200" cy="310896"/>
+          </a:xfrm>
+          <a:prstGeom prst="rect">
+            <a:avLst/>
+          </a:prstGeom>
+          <a:noFill/>
+        </p:spPr>
+        <p:txBody>
+          <a:bodyPr wrap="square" lIns="91425" rIns="91425" tIns="91425" bIns="91425">
+            <a:spAutoFit/>
+          </a:bodyPr>
+          <a:lstStyle/>
+          <a:p>
+            <a:pPr algn="l">
+              <a:spcBef>
+                <a:spcPts val="0"/>
+              </a:spcBef>
+              <a:spcAft>
+                <a:spcPts val="0"/>
+              </a:spcAft>
+            </a:pPr>
+            <a:r>
+              <a:rPr sz="1000" b="0" i="0">
+                <a:solidFill>
+                  <a:srgbClr val="B7B7B7"/>
+                </a:solidFill>
+                <a:latin typeface="Montserrat Medium"/>
+                <a:ea typeface="Montserrat Medium"/>
+                <a:cs typeface="Montserrat Medium"/>
+                <a:sym typeface="Montserrat Medium"/>
+              </a:rPr>
+              <a:t>Dados do GA4 e planilha de metas | 01 a 05/10 contra 03-07/09 e 24-28/09 | faturado</a:t>
+            </a:r>
+          </a:p>
+        </p:txBody>
+      </p:sp>
+      <p:graphicFrame>
+        <p:nvGraphicFramePr>
+          <p:cNvPr id="6" name="Table 5"/>
+          <p:cNvGraphicFramePr>
+            <a:graphicFrameLocks noGrp="1"/>
+          </p:cNvGraphicFramePr>
+          <p:nvPr/>
+        </p:nvGraphicFramePr>
+        <p:xfrm>
+          <a:off x="411480" y="2148840"/>
+          <a:ext cx="8321040" cy="1975104"/>
+        </p:xfrm>
+        <a:graphic>
+          <a:graphicData uri="http://schemas.openxmlformats.org/drawingml/2006/table">
+            <a:tbl>
+              <a:tblPr firstRow="0" bandRow="0" firstCol="0" lastRow="0" lastCol="0" bandCol="0">
+                <a:tableStyleId>{2D5ABB26-0587-4C30-8999-92F81FD0307C}</a:tableStyleId>
+              </a:tblPr>
+              <a:tblGrid>
+                <a:gridCol w="2194560"/>
+                <a:gridCol w="1463040"/>
+                <a:gridCol w="1463040"/>
+                <a:gridCol w="1554480"/>
+                <a:gridCol w="1645920"/>
+              </a:tblGrid>
+              <a:tr h="329184">
+                <a:tc>
+                  <a:txBody>
+                    <a:bodyPr wrap="square"/>
+                    <a:lstStyle/>
+                    <a:p>
+                      <a:pPr algn="l"/>
+                      <a:r>
+                        <a:rPr sz="950" b="1">
+                          <a:solidFill>
+                            <a:srgbClr val="595959"/>
+                          </a:solidFill>
+                          <a:latin typeface="Montserrat"/>
+                          <a:ea typeface="Montserrat"/>
+                          <a:cs typeface="Montserrat"/>
+                          <a:sym typeface="Montserrat"/>
+                        </a:rPr>
+                        <a:t>Bandeira</a:t>
+                      </a:r>
+                    </a:p>
+                  </a:txBody>
+                  <a:tcPr marL="45720" marR="45720" marT="18288" marB="18288" anchor="t">
+                    <a:lnL w="0">
+                      <a:noFill/>
+                    </a:lnL>
+                    <a:lnR w="0">
+                      <a:noFill/>
+                    </a:lnR>
+                    <a:lnT w="0">
+                      <a:noFill/>
+                    </a:lnT>
+                    <a:lnB w="9525">
+                      <a:solidFill>
+                        <a:srgbClr val="EFEFEF"/>
+                      </a:solidFill>
+                    </a:lnB>
+                    <a:solidFill>
+                      <a:srgbClr val="F3F3F3"/>
+                    </a:solidFill>
+                  </a:tcPr>
+                </a:tc>
+                <a:tc>
+                  <a:txBody>
+                    <a:bodyPr wrap="square"/>
+                    <a:lstStyle/>
+                    <a:p>
+                      <a:pPr algn="ctr"/>
+                      <a:r>
+                        <a:rPr sz="950" b="1">
+                          <a:solidFill>
+                            <a:srgbClr val="595959"/>
+                          </a:solidFill>
+                          <a:latin typeface="Montserrat"/>
+                          <a:ea typeface="Montserrat"/>
+                          <a:cs typeface="Montserrat"/>
+                          <a:sym typeface="Montserrat"/>
+                        </a:rPr>
+                        <a:t>Meta 01-05</a:t>
+                      </a:r>
+                    </a:p>
+                  </a:txBody>
+                  <a:tcPr marL="45720" marR="45720" marT="18288" marB="18288" anchor="t">
+                    <a:lnL w="0">
+                      <a:noFill/>
+                    </a:lnL>
+                    <a:lnR w="0">
+                      <a:noFill/>
+                    </a:lnR>
+                    <a:lnT w="0">
+                      <a:noFill/>
+                    </a:lnT>
+                    <a:lnB w="9525">
+                      <a:solidFill>
+                        <a:srgbClr val="EFEFEF"/>
+                      </a:solidFill>
+                    </a:lnB>
+                    <a:solidFill>
+                      <a:srgbClr val="F3F3F3"/>
+                    </a:solidFill>
+                  </a:tcPr>
+                </a:tc>
+                <a:tc>
+                  <a:txBody>
+                    <a:bodyPr wrap="square"/>
+                    <a:lstStyle/>
+                    <a:p>
+                      <a:pPr algn="ctr"/>
+                      <a:r>
+                        <a:rPr sz="950" b="1">
+                          <a:solidFill>
+                            <a:srgbClr val="595959"/>
+                          </a:solidFill>
+                          <a:latin typeface="Montserrat"/>
+                          <a:ea typeface="Montserrat"/>
+                          <a:cs typeface="Montserrat"/>
+                          <a:sym typeface="Montserrat"/>
+                        </a:rPr>
+                        <a:t>Faturado</a:t>
+                      </a:r>
+                    </a:p>
+                  </a:txBody>
+                  <a:tcPr marL="45720" marR="45720" marT="18288" marB="18288" anchor="t">
+                    <a:lnL w="0">
+                      <a:noFill/>
+                    </a:lnL>
+                    <a:lnR w="0">
+                      <a:noFill/>
+                    </a:lnR>
+                    <a:lnT w="0">
+                      <a:noFill/>
+                    </a:lnT>
+                    <a:lnB w="9525">
+                      <a:solidFill>
+                        <a:srgbClr val="EFEFEF"/>
+                      </a:solidFill>
+                    </a:lnB>
+                    <a:solidFill>
+                      <a:srgbClr val="F3F3F3"/>
+                    </a:solidFill>
+                  </a:tcPr>
+                </a:tc>
+                <a:tc>
+                  <a:txBody>
+                    <a:bodyPr wrap="square"/>
+                    <a:lstStyle/>
+                    <a:p>
+                      <a:pPr algn="ctr"/>
+                      <a:r>
+                        <a:rPr sz="950" b="1">
+                          <a:solidFill>
+                            <a:srgbClr val="595959"/>
+                          </a:solidFill>
+                          <a:latin typeface="Montserrat"/>
+                          <a:ea typeface="Montserrat"/>
+                          <a:cs typeface="Montserrat"/>
+                          <a:sym typeface="Montserrat"/>
+                        </a:rPr>
+                        <a:t>Atingimento</a:t>
+                      </a:r>
+                    </a:p>
+                  </a:txBody>
+                  <a:tcPr marL="45720" marR="45720" marT="18288" marB="18288" anchor="t">
+                    <a:lnL w="0">
+                      <a:noFill/>
+                    </a:lnL>
+                    <a:lnR w="0">
+                      <a:noFill/>
+                    </a:lnR>
+                    <a:lnT w="0">
+                      <a:noFill/>
+                    </a:lnT>
+                    <a:lnB w="9525">
+                      <a:solidFill>
+                        <a:srgbClr val="EFEFEF"/>
+                      </a:solidFill>
+                    </a:lnB>
+                    <a:solidFill>
+                      <a:srgbClr val="F3F3F3"/>
+                    </a:solidFill>
+                  </a:tcPr>
+                </a:tc>
+                <a:tc>
+                  <a:txBody>
+                    <a:bodyPr wrap="square"/>
+                    <a:lstStyle/>
+                    <a:p>
+                      <a:pPr algn="ctr"/>
+                      <a:r>
+                        <a:rPr sz="950" b="1">
+                          <a:solidFill>
+                            <a:srgbClr val="595959"/>
+                          </a:solidFill>
+                          <a:latin typeface="Montserrat"/>
+                          <a:ea typeface="Montserrat"/>
+                          <a:cs typeface="Montserrat"/>
+                          <a:sym typeface="Montserrat"/>
+                        </a:rPr>
+                        <a:t>Gap</a:t>
+                      </a:r>
+                    </a:p>
+                  </a:txBody>
+                  <a:tcPr marL="45720" marR="45720" marT="18288" marB="18288" anchor="t">
+                    <a:lnL w="0">
+                      <a:noFill/>
+                    </a:lnL>
+                    <a:lnR w="0">
+                      <a:noFill/>
+                    </a:lnR>
+                    <a:lnT w="0">
+                      <a:noFill/>
+                    </a:lnT>
+                    <a:lnB w="9525">
+                      <a:solidFill>
+                        <a:srgbClr val="EFEFEF"/>
+                      </a:solidFill>
+                    </a:lnB>
+                    <a:solidFill>
+                      <a:srgbClr val="F3F3F3"/>
+                    </a:solidFill>
+                  </a:tcPr>
+                </a:tc>
+              </a:tr>
+              <a:tr h="329184">
+                <a:tc>
+                  <a:txBody>
+                    <a:bodyPr wrap="square"/>
+                    <a:lstStyle/>
+                    <a:p>
+                      <a:pPr algn="l"/>
+                      <a:r>
+                        <a:rPr sz="950" b="0">
+                          <a:solidFill>
+                            <a:srgbClr val="595959"/>
+                          </a:solidFill>
+                          <a:latin typeface="Montserrat Medium"/>
+                          <a:ea typeface="Montserrat Medium"/>
+                          <a:cs typeface="Montserrat Medium"/>
+                          <a:sym typeface="Montserrat Medium"/>
+                        </a:rPr>
+                        <a:t>Oscar (web)</a:t>
+                      </a:r>
+                    </a:p>
+                  </a:txBody>
+                  <a:tcPr marL="45720" marR="45720" marT="18288" marB="18288" anchor="t">
+                    <a:lnL w="0">
+                      <a:noFill/>
+                    </a:lnL>
+                    <a:lnR w="0">
+                      <a:noFill/>
+                    </a:lnR>
+                    <a:lnT w="0">
+                      <a:noFill/>
+                    </a:lnT>
+                    <a:lnB w="9525">
+                      <a:solidFill>
+                        <a:srgbClr val="EFEFEF"/>
+                      </a:solidFill>
+                    </a:lnB>
+                    <a:noFill/>
+                  </a:tcPr>
+                </a:tc>
+                <a:tc>
+                  <a:txBody>
+                    <a:bodyPr wrap="square"/>
+                    <a:lstStyle/>
+                    <a:p>
+                      <a:pPr algn="ctr"/>
+                      <a:r>
+                        <a:rPr sz="950" b="0">
+                          <a:solidFill>
+                            <a:srgbClr val="595959"/>
+                          </a:solidFill>
+                          <a:latin typeface="Montserrat Medium"/>
+                          <a:ea typeface="Montserrat Medium"/>
+                          <a:cs typeface="Montserrat Medium"/>
+                          <a:sym typeface="Montserrat Medium"/>
+                        </a:rPr>
+                        <a:t>R$ 86.538</a:t>
+                      </a:r>
+                    </a:p>
+                  </a:txBody>
+                  <a:tcPr marL="45720" marR="45720" marT="18288" marB="18288" anchor="t">
+                    <a:lnL w="0">
+                      <a:noFill/>
+                    </a:lnL>
+                    <a:lnR w="0">
+                      <a:noFill/>
+                    </a:lnR>
+                    <a:lnT w="0">
+                      <a:noFill/>
+                    </a:lnT>
+                    <a:lnB w="9525">
+                      <a:solidFill>
+                        <a:srgbClr val="EFEFEF"/>
+                      </a:solidFill>
+                    </a:lnB>
+                    <a:noFill/>
+                  </a:tcPr>
+                </a:tc>
+                <a:tc>
+                  <a:txBody>
+                    <a:bodyPr wrap="square"/>
+                    <a:lstStyle/>
+                    <a:p>
+                      <a:pPr algn="ctr"/>
+                      <a:r>
+                        <a:rPr sz="950" b="0">
+                          <a:solidFill>
+                            <a:srgbClr val="595959"/>
+                          </a:solidFill>
+                          <a:latin typeface="Montserrat Medium"/>
+                          <a:ea typeface="Montserrat Medium"/>
+                          <a:cs typeface="Montserrat Medium"/>
+                          <a:sym typeface="Montserrat Medium"/>
+                        </a:rPr>
+                        <a:t>R$ 65.147</a:t>
+                      </a:r>
+                    </a:p>
+                  </a:txBody>
+                  <a:tcPr marL="45720" marR="45720" marT="18288" marB="18288" anchor="t">
+                    <a:lnL w="0">
+                      <a:noFill/>
+                    </a:lnL>
+                    <a:lnR w="0">
+                      <a:noFill/>
+                    </a:lnR>
+                    <a:lnT w="0">
+                      <a:noFill/>
+                    </a:lnT>
+                    <a:lnB w="9525">
+                      <a:solidFill>
+                        <a:srgbClr val="EFEFEF"/>
+                      </a:solidFill>
+                    </a:lnB>
+                    <a:noFill/>
+                  </a:tcPr>
+                </a:tc>
+                <a:tc>
+                  <a:txBody>
+                    <a:bodyPr wrap="square"/>
+                    <a:lstStyle/>
+                    <a:p>
+                      <a:pPr algn="ctr"/>
+                      <a:r>
+                        <a:rPr sz="950" b="0">
+                          <a:solidFill>
+                            <a:srgbClr val="595959"/>
+                          </a:solidFill>
+                          <a:latin typeface="Montserrat Medium"/>
+                          <a:ea typeface="Montserrat Medium"/>
+                          <a:cs typeface="Montserrat Medium"/>
+                          <a:sym typeface="Montserrat Medium"/>
+                        </a:rPr>
+                        <a:t>75%</a:t>
+                      </a:r>
+                    </a:p>
+                  </a:txBody>
+                  <a:tcPr marL="45720" marR="45720" marT="18288" marB="18288" anchor="t">
+                    <a:lnL w="0">
+                      <a:noFill/>
+                    </a:lnL>
+                    <a:lnR w="0">
+                      <a:noFill/>
+                    </a:lnR>
+                    <a:lnT w="0">
+                      <a:noFill/>
+                    </a:lnT>
+                    <a:lnB w="9525">
+                      <a:solidFill>
+                        <a:srgbClr val="EFEFEF"/>
+                      </a:solidFill>
+                    </a:lnB>
+                    <a:noFill/>
+                  </a:tcPr>
+                </a:tc>
+                <a:tc>
+                  <a:txBody>
+                    <a:bodyPr wrap="square"/>
+                    <a:lstStyle/>
+                    <a:p>
+                      <a:pPr algn="ctr"/>
+                      <a:r>
+                        <a:rPr sz="950" b="0">
+                          <a:solidFill>
+                            <a:srgbClr val="C5221F"/>
+                          </a:solidFill>
+                          <a:latin typeface="Montserrat Medium"/>
+                          <a:ea typeface="Montserrat Medium"/>
+                          <a:cs typeface="Montserrat Medium"/>
+                          <a:sym typeface="Montserrat Medium"/>
+                        </a:rPr>
+                        <a:t>-R$ 21.391</a:t>
+                      </a:r>
+                    </a:p>
+                  </a:txBody>
+                  <a:tcPr marL="45720" marR="45720" marT="18288" marB="18288" anchor="t">
+                    <a:lnL w="0">
+                      <a:noFill/>
+                    </a:lnL>
+                    <a:lnR w="0">
+                      <a:noFill/>
+                    </a:lnR>
+                    <a:lnT w="0">
+                      <a:noFill/>
+                    </a:lnT>
+                    <a:lnB w="9525">
+                      <a:solidFill>
+                        <a:srgbClr val="EFEFEF"/>
+                      </a:solidFill>
+                    </a:lnB>
+                    <a:noFill/>
+                  </a:tcPr>
+                </a:tc>
+              </a:tr>
+              <a:tr h="329184">
+                <a:tc>
+                  <a:txBody>
+                    <a:bodyPr wrap="square"/>
+                    <a:lstStyle/>
+                    <a:p>
+                      <a:pPr algn="l"/>
+                      <a:r>
+                        <a:rPr sz="950" b="0">
+                          <a:solidFill>
+                            <a:srgbClr val="595959"/>
+                          </a:solidFill>
+                          <a:latin typeface="Montserrat Medium"/>
+                          <a:ea typeface="Montserrat Medium"/>
+                          <a:cs typeface="Montserrat Medium"/>
+                          <a:sym typeface="Montserrat Medium"/>
+                        </a:rPr>
+                        <a:t>Oscar (app)</a:t>
+                      </a:r>
+                    </a:p>
+                  </a:txBody>
+                  <a:tcPr marL="45720" marR="45720" marT="18288" marB="18288" anchor="t">
+                    <a:lnL w="0">
+                      <a:noFill/>
+                    </a:lnL>
+                    <a:lnR w="0">
+                      <a:noFill/>
+                    </a:lnR>
+                    <a:lnT w="0">
+                      <a:noFill/>
+                    </a:lnT>
+                    <a:lnB w="9525">
+                      <a:solidFill>
+                        <a:srgbClr val="EFEFEF"/>
+                      </a:solidFill>
+                    </a:lnB>
+                    <a:noFill/>
+                  </a:tcPr>
+                </a:tc>
+                <a:tc>
+                  <a:txBody>
+                    <a:bodyPr wrap="square"/>
+                    <a:lstStyle/>
+                    <a:p>
+                      <a:pPr algn="ctr"/>
+                      <a:r>
+                        <a:rPr sz="950" b="0">
+                          <a:solidFill>
+                            <a:srgbClr val="595959"/>
+                          </a:solidFill>
+                          <a:latin typeface="Montserrat Medium"/>
+                          <a:ea typeface="Montserrat Medium"/>
+                          <a:cs typeface="Montserrat Medium"/>
+                          <a:sym typeface="Montserrat Medium"/>
+                        </a:rPr>
+                        <a:t>R$ 51.760</a:t>
+                      </a:r>
+                    </a:p>
+                  </a:txBody>
+                  <a:tcPr marL="45720" marR="45720" marT="18288" marB="18288" anchor="t">
+                    <a:lnL w="0">
+                      <a:noFill/>
+                    </a:lnL>
+                    <a:lnR w="0">
+                      <a:noFill/>
+                    </a:lnR>
+                    <a:lnT w="0">
+                      <a:noFill/>
+                    </a:lnT>
+                    <a:lnB w="9525">
+                      <a:solidFill>
+                        <a:srgbClr val="EFEFEF"/>
+                      </a:solidFill>
+                    </a:lnB>
+                    <a:noFill/>
+                  </a:tcPr>
+                </a:tc>
+                <a:tc>
+                  <a:txBody>
+                    <a:bodyPr wrap="square"/>
+                    <a:lstStyle/>
+                    <a:p>
+                      <a:pPr algn="ctr"/>
+                      <a:r>
+                        <a:rPr sz="950" b="0">
+                          <a:solidFill>
+                            <a:srgbClr val="595959"/>
+                          </a:solidFill>
+                          <a:latin typeface="Montserrat Medium"/>
+                          <a:ea typeface="Montserrat Medium"/>
+                          <a:cs typeface="Montserrat Medium"/>
+                          <a:sym typeface="Montserrat Medium"/>
+                        </a:rPr>
+                        <a:t>R$ 34.692</a:t>
+                      </a:r>
+                    </a:p>
+                  </a:txBody>
+                  <a:tcPr marL="45720" marR="45720" marT="18288" marB="18288" anchor="t">
+                    <a:lnL w="0">
+                      <a:noFill/>
+                    </a:lnL>
+                    <a:lnR w="0">
+                      <a:noFill/>
+                    </a:lnR>
+                    <a:lnT w="0">
+                      <a:noFill/>
+                    </a:lnT>
+                    <a:lnB w="9525">
+                      <a:solidFill>
+                        <a:srgbClr val="EFEFEF"/>
+                      </a:solidFill>
+                    </a:lnB>
+                    <a:noFill/>
+                  </a:tcPr>
+                </a:tc>
+                <a:tc>
+                  <a:txBody>
+                    <a:bodyPr wrap="square"/>
+                    <a:lstStyle/>
+                    <a:p>
+                      <a:pPr algn="ctr"/>
+                      <a:r>
+                        <a:rPr sz="950" b="0">
+                          <a:solidFill>
+                            <a:srgbClr val="595959"/>
+                          </a:solidFill>
+                          <a:latin typeface="Montserrat Medium"/>
+                          <a:ea typeface="Montserrat Medium"/>
+                          <a:cs typeface="Montserrat Medium"/>
+                          <a:sym typeface="Montserrat Medium"/>
+                        </a:rPr>
+                        <a:t>67%</a:t>
+                      </a:r>
+                    </a:p>
+                  </a:txBody>
+                  <a:tcPr marL="45720" marR="45720" marT="18288" marB="18288" anchor="t">
+                    <a:lnL w="0">
+                      <a:noFill/>
+                    </a:lnL>
+                    <a:lnR w="0">
+                      <a:noFill/>
+                    </a:lnR>
+                    <a:lnT w="0">
+                      <a:noFill/>
+                    </a:lnT>
+                    <a:lnB w="9525">
+                      <a:solidFill>
+                        <a:srgbClr val="EFEFEF"/>
+                      </a:solidFill>
+                    </a:lnB>
+                    <a:noFill/>
+                  </a:tcPr>
+                </a:tc>
+                <a:tc>
+                  <a:txBody>
+                    <a:bodyPr wrap="square"/>
+                    <a:lstStyle/>
+                    <a:p>
+                      <a:pPr algn="ctr"/>
+                      <a:r>
+                        <a:rPr sz="950" b="0">
+                          <a:solidFill>
+                            <a:srgbClr val="C5221F"/>
+                          </a:solidFill>
+                          <a:latin typeface="Montserrat Medium"/>
+                          <a:ea typeface="Montserrat Medium"/>
+                          <a:cs typeface="Montserrat Medium"/>
+                          <a:sym typeface="Montserrat Medium"/>
+                        </a:rPr>
+                        <a:t>-R$ 17.069</a:t>
+                      </a:r>
+                    </a:p>
+                  </a:txBody>
+                  <a:tcPr marL="45720" marR="45720" marT="18288" marB="18288" anchor="t">
+                    <a:lnL w="0">
+                      <a:noFill/>
+                    </a:lnL>
+                    <a:lnR w="0">
+                      <a:noFill/>
+                    </a:lnR>
+                    <a:lnT w="0">
+                      <a:noFill/>
+                    </a:lnT>
+                    <a:lnB w="9525">
+                      <a:solidFill>
+                        <a:srgbClr val="EFEFEF"/>
+                      </a:solidFill>
+                    </a:lnB>
+                    <a:noFill/>
+                  </a:tcPr>
+                </a:tc>
+              </a:tr>
+              <a:tr h="329184">
+                <a:tc>
+                  <a:txBody>
+                    <a:bodyPr wrap="square"/>
+                    <a:lstStyle/>
+                    <a:p>
+                      <a:pPr algn="l"/>
+                      <a:r>
+                        <a:rPr sz="950" b="0">
+                          <a:solidFill>
+                            <a:srgbClr val="595959"/>
+                          </a:solidFill>
+                          <a:latin typeface="Montserrat Medium"/>
+                          <a:ea typeface="Montserrat Medium"/>
+                          <a:cs typeface="Montserrat Medium"/>
+                          <a:sym typeface="Montserrat Medium"/>
+                        </a:rPr>
+                        <a:t>Paquetá Esportes (web)</a:t>
+                      </a:r>
+                    </a:p>
+                  </a:txBody>
+                  <a:tcPr marL="45720" marR="45720" marT="18288" marB="18288" anchor="t">
+                    <a:lnL w="0">
+                      <a:noFill/>
+                    </a:lnL>
+                    <a:lnR w="0">
+                      <a:noFill/>
+                    </a:lnR>
+                    <a:lnT w="0">
+                      <a:noFill/>
+                    </a:lnT>
+                    <a:lnB w="9525">
+                      <a:solidFill>
+                        <a:srgbClr val="EFEFEF"/>
+                      </a:solidFill>
+                    </a:lnB>
+                    <a:noFill/>
+                  </a:tcPr>
+                </a:tc>
+                <a:tc>
+                  <a:txBody>
+                    <a:bodyPr wrap="square"/>
+                    <a:lstStyle/>
+                    <a:p>
+                      <a:pPr algn="ctr"/>
+                      <a:r>
+                        <a:rPr sz="950" b="0">
+                          <a:solidFill>
+                            <a:srgbClr val="595959"/>
+                          </a:solidFill>
+                          <a:latin typeface="Montserrat Medium"/>
+                          <a:ea typeface="Montserrat Medium"/>
+                          <a:cs typeface="Montserrat Medium"/>
+                          <a:sym typeface="Montserrat Medium"/>
+                        </a:rPr>
+                        <a:t>R$ 56.412</a:t>
+                      </a:r>
+                    </a:p>
+                  </a:txBody>
+                  <a:tcPr marL="45720" marR="45720" marT="18288" marB="18288" anchor="t">
+                    <a:lnL w="0">
+                      <a:noFill/>
+                    </a:lnL>
+                    <a:lnR w="0">
+                      <a:noFill/>
+                    </a:lnR>
+                    <a:lnT w="0">
+                      <a:noFill/>
+                    </a:lnT>
+                    <a:lnB w="9525">
+                      <a:solidFill>
+                        <a:srgbClr val="EFEFEF"/>
+                      </a:solidFill>
+                    </a:lnB>
+                    <a:noFill/>
+                  </a:tcPr>
+                </a:tc>
+                <a:tc>
+                  <a:txBody>
+                    <a:bodyPr wrap="square"/>
+                    <a:lstStyle/>
+                    <a:p>
+                      <a:pPr algn="ctr"/>
+                      <a:r>
+                        <a:rPr sz="950" b="0">
+                          <a:solidFill>
+                            <a:srgbClr val="595959"/>
+                          </a:solidFill>
+                          <a:latin typeface="Montserrat Medium"/>
+                          <a:ea typeface="Montserrat Medium"/>
+                          <a:cs typeface="Montserrat Medium"/>
+                          <a:sym typeface="Montserrat Medium"/>
+                        </a:rPr>
+                        <a:t>R$ 51.564</a:t>
+                      </a:r>
+                    </a:p>
+                  </a:txBody>
+                  <a:tcPr marL="45720" marR="45720" marT="18288" marB="18288" anchor="t">
+                    <a:lnL w="0">
+                      <a:noFill/>
+                    </a:lnL>
+                    <a:lnR w="0">
+                      <a:noFill/>
+                    </a:lnR>
+                    <a:lnT w="0">
+                      <a:noFill/>
+                    </a:lnT>
+                    <a:lnB w="9525">
+                      <a:solidFill>
+                        <a:srgbClr val="EFEFEF"/>
+                      </a:solidFill>
+                    </a:lnB>
+                    <a:noFill/>
+                  </a:tcPr>
+                </a:tc>
+                <a:tc>
+                  <a:txBody>
+                    <a:bodyPr wrap="square"/>
+                    <a:lstStyle/>
+                    <a:p>
+                      <a:pPr algn="ctr"/>
+                      <a:r>
+                        <a:rPr sz="950" b="0">
+                          <a:solidFill>
+                            <a:srgbClr val="595959"/>
+                          </a:solidFill>
+                          <a:latin typeface="Montserrat Medium"/>
+                          <a:ea typeface="Montserrat Medium"/>
+                          <a:cs typeface="Montserrat Medium"/>
+                          <a:sym typeface="Montserrat Medium"/>
+                        </a:rPr>
+                        <a:t>91%</a:t>
+                      </a:r>
+                    </a:p>
+                  </a:txBody>
+                  <a:tcPr marL="45720" marR="45720" marT="18288" marB="18288" anchor="t">
+                    <a:lnL w="0">
+                      <a:noFill/>
+                    </a:lnL>
+                    <a:lnR w="0">
+                      <a:noFill/>
+                    </a:lnR>
+                    <a:lnT w="0">
+                      <a:noFill/>
+                    </a:lnT>
+                    <a:lnB w="9525">
+                      <a:solidFill>
+                        <a:srgbClr val="EFEFEF"/>
+                      </a:solidFill>
+                    </a:lnB>
+                    <a:noFill/>
+                  </a:tcPr>
+                </a:tc>
+                <a:tc>
+                  <a:txBody>
+                    <a:bodyPr wrap="square"/>
+                    <a:lstStyle/>
+                    <a:p>
+                      <a:pPr algn="ctr"/>
+                      <a:r>
+                        <a:rPr sz="950" b="0">
+                          <a:solidFill>
+                            <a:srgbClr val="C5221F"/>
+                          </a:solidFill>
+                          <a:latin typeface="Montserrat Medium"/>
+                          <a:ea typeface="Montserrat Medium"/>
+                          <a:cs typeface="Montserrat Medium"/>
+                          <a:sym typeface="Montserrat Medium"/>
+                        </a:rPr>
+                        <a:t>-R$ 4.848</a:t>
+                      </a:r>
+                    </a:p>
+                  </a:txBody>
+                  <a:tcPr marL="45720" marR="45720" marT="18288" marB="18288" anchor="t">
+                    <a:lnL w="0">
+                      <a:noFill/>
+                    </a:lnL>
+                    <a:lnR w="0">
+                      <a:noFill/>
+                    </a:lnR>
+                    <a:lnT w="0">
+                      <a:noFill/>
+                    </a:lnT>
+                    <a:lnB w="9525">
+                      <a:solidFill>
+                        <a:srgbClr val="EFEFEF"/>
+                      </a:solidFill>
+                    </a:lnB>
+                    <a:noFill/>
+                  </a:tcPr>
+                </a:tc>
+              </a:tr>
+              <a:tr h="329184">
+                <a:tc>
+                  <a:txBody>
+                    <a:bodyPr wrap="square"/>
+                    <a:lstStyle/>
+                    <a:p>
+                      <a:pPr algn="l"/>
+                      <a:r>
+                        <a:rPr sz="950" b="0">
+                          <a:solidFill>
+                            <a:srgbClr val="595959"/>
+                          </a:solidFill>
+                          <a:latin typeface="Montserrat Medium"/>
+                          <a:ea typeface="Montserrat Medium"/>
+                          <a:cs typeface="Montserrat Medium"/>
+                          <a:sym typeface="Montserrat Medium"/>
+                        </a:rPr>
+                        <a:t>Paquetá Calçados (web)</a:t>
+                      </a:r>
+                    </a:p>
+                  </a:txBody>
+                  <a:tcPr marL="45720" marR="45720" marT="18288" marB="18288" anchor="t">
+                    <a:lnL w="0">
+                      <a:noFill/>
+                    </a:lnL>
+                    <a:lnR w="0">
+                      <a:noFill/>
+                    </a:lnR>
+                    <a:lnT w="0">
+                      <a:noFill/>
+                    </a:lnT>
+                    <a:lnB w="9525">
+                      <a:solidFill>
+                        <a:srgbClr val="EFEFEF"/>
+                      </a:solidFill>
+                    </a:lnB>
+                    <a:noFill/>
+                  </a:tcPr>
+                </a:tc>
+                <a:tc>
+                  <a:txBody>
+                    <a:bodyPr wrap="square"/>
+                    <a:lstStyle/>
+                    <a:p>
+                      <a:pPr algn="ctr"/>
+                      <a:r>
+                        <a:rPr sz="950" b="0">
+                          <a:solidFill>
+                            <a:srgbClr val="595959"/>
+                          </a:solidFill>
+                          <a:latin typeface="Montserrat Medium"/>
+                          <a:ea typeface="Montserrat Medium"/>
+                          <a:cs typeface="Montserrat Medium"/>
+                          <a:sym typeface="Montserrat Medium"/>
+                        </a:rPr>
+                        <a:t>R$ 21.634</a:t>
+                      </a:r>
+                    </a:p>
+                  </a:txBody>
+                  <a:tcPr marL="45720" marR="45720" marT="18288" marB="18288" anchor="t">
+                    <a:lnL w="0">
+                      <a:noFill/>
+                    </a:lnL>
+                    <a:lnR w="0">
+                      <a:noFill/>
+                    </a:lnR>
+                    <a:lnT w="0">
+                      <a:noFill/>
+                    </a:lnT>
+                    <a:lnB w="9525">
+                      <a:solidFill>
+                        <a:srgbClr val="EFEFEF"/>
+                      </a:solidFill>
+                    </a:lnB>
+                    <a:noFill/>
+                  </a:tcPr>
+                </a:tc>
+                <a:tc>
+                  <a:txBody>
+                    <a:bodyPr wrap="square"/>
+                    <a:lstStyle/>
+                    <a:p>
+                      <a:pPr algn="ctr"/>
+                      <a:r>
+                        <a:rPr sz="950" b="0">
+                          <a:solidFill>
+                            <a:srgbClr val="595959"/>
+                          </a:solidFill>
+                          <a:latin typeface="Montserrat Medium"/>
+                          <a:ea typeface="Montserrat Medium"/>
+                          <a:cs typeface="Montserrat Medium"/>
+                          <a:sym typeface="Montserrat Medium"/>
+                        </a:rPr>
+                        <a:t>R$ 28.023</a:t>
+                      </a:r>
+                    </a:p>
+                  </a:txBody>
+                  <a:tcPr marL="45720" marR="45720" marT="18288" marB="18288" anchor="t">
+                    <a:lnL w="0">
+                      <a:noFill/>
+                    </a:lnL>
+                    <a:lnR w="0">
+                      <a:noFill/>
+                    </a:lnR>
+                    <a:lnT w="0">
+                      <a:noFill/>
+                    </a:lnT>
+                    <a:lnB w="9525">
+                      <a:solidFill>
+                        <a:srgbClr val="EFEFEF"/>
+                      </a:solidFill>
+                    </a:lnB>
+                    <a:noFill/>
+                  </a:tcPr>
+                </a:tc>
+                <a:tc>
+                  <a:txBody>
+                    <a:bodyPr wrap="square"/>
+                    <a:lstStyle/>
+                    <a:p>
+                      <a:pPr algn="ctr"/>
+                      <a:r>
+                        <a:rPr sz="950" b="0">
+                          <a:solidFill>
+                            <a:srgbClr val="595959"/>
+                          </a:solidFill>
+                          <a:latin typeface="Montserrat Medium"/>
+                          <a:ea typeface="Montserrat Medium"/>
+                          <a:cs typeface="Montserrat Medium"/>
+                          <a:sym typeface="Montserrat Medium"/>
+                        </a:rPr>
+                        <a:t>130%</a:t>
+                      </a:r>
+                    </a:p>
+                  </a:txBody>
+                  <a:tcPr marL="45720" marR="45720" marT="18288" marB="18288" anchor="t">
+                    <a:lnL w="0">
+                      <a:noFill/>
+                    </a:lnL>
+                    <a:lnR w="0">
+                      <a:noFill/>
+                    </a:lnR>
+                    <a:lnT w="0">
+                      <a:noFill/>
+                    </a:lnT>
+                    <a:lnB w="9525">
+                      <a:solidFill>
+                        <a:srgbClr val="EFEFEF"/>
+                      </a:solidFill>
+                    </a:lnB>
+                    <a:noFill/>
+                  </a:tcPr>
+                </a:tc>
+                <a:tc>
+                  <a:txBody>
+                    <a:bodyPr wrap="square"/>
+                    <a:lstStyle/>
+                    <a:p>
+                      <a:pPr algn="ctr"/>
+                      <a:r>
+                        <a:rPr sz="950" b="0">
+                          <a:solidFill>
+                            <a:srgbClr val="0D8A00"/>
+                          </a:solidFill>
+                          <a:latin typeface="Montserrat Medium"/>
+                          <a:ea typeface="Montserrat Medium"/>
+                          <a:cs typeface="Montserrat Medium"/>
+                          <a:sym typeface="Montserrat Medium"/>
+                        </a:rPr>
+                        <a:t>+R$ 6.388</a:t>
+                      </a:r>
+                    </a:p>
+                  </a:txBody>
+                  <a:tcPr marL="45720" marR="45720" marT="18288" marB="18288" anchor="t">
+                    <a:lnL w="0">
+                      <a:noFill/>
+                    </a:lnL>
+                    <a:lnR w="0">
+                      <a:noFill/>
+                    </a:lnR>
+                    <a:lnT w="0">
+                      <a:noFill/>
+                    </a:lnT>
+                    <a:lnB w="9525">
+                      <a:solidFill>
+                        <a:srgbClr val="EFEFEF"/>
+                      </a:solidFill>
+                    </a:lnB>
+                    <a:noFill/>
+                  </a:tcPr>
+                </a:tc>
+              </a:tr>
+              <a:tr h="329184">
+                <a:tc>
+                  <a:txBody>
+                    <a:bodyPr wrap="square"/>
+                    <a:lstStyle/>
+                    <a:p>
+                      <a:pPr algn="l"/>
+                      <a:r>
+                        <a:rPr sz="950" b="0">
+                          <a:solidFill>
+                            <a:srgbClr val="595959"/>
+                          </a:solidFill>
+                          <a:latin typeface="Montserrat Medium"/>
+                          <a:ea typeface="Montserrat Medium"/>
+                          <a:cs typeface="Montserrat Medium"/>
+                          <a:sym typeface="Montserrat Medium"/>
+                        </a:rPr>
+                        <a:t>Grupo</a:t>
+                      </a:r>
+                    </a:p>
+                  </a:txBody>
+                  <a:tcPr marL="45720" marR="45720" marT="18288" marB="18288" anchor="t">
+                    <a:lnL w="0">
+                      <a:noFill/>
+                    </a:lnL>
+                    <a:lnR w="0">
+                      <a:noFill/>
+                    </a:lnR>
+                    <a:lnT w="0">
+                      <a:noFill/>
+                    </a:lnT>
+                    <a:lnB w="9525">
+                      <a:solidFill>
+                        <a:srgbClr val="EFEFEF"/>
+                      </a:solidFill>
+                    </a:lnB>
+                    <a:noFill/>
+                  </a:tcPr>
+                </a:tc>
+                <a:tc>
+                  <a:txBody>
+                    <a:bodyPr wrap="square"/>
+                    <a:lstStyle/>
+                    <a:p>
+                      <a:pPr algn="ctr"/>
+                      <a:r>
+                        <a:rPr sz="950" b="0">
+                          <a:solidFill>
+                            <a:srgbClr val="595959"/>
+                          </a:solidFill>
+                          <a:latin typeface="Montserrat Medium"/>
+                          <a:ea typeface="Montserrat Medium"/>
+                          <a:cs typeface="Montserrat Medium"/>
+                          <a:sym typeface="Montserrat Medium"/>
+                        </a:rPr>
+                        <a:t>R$ 216.344</a:t>
+                      </a:r>
+                    </a:p>
+                  </a:txBody>
+                  <a:tcPr marL="45720" marR="45720" marT="18288" marB="18288" anchor="t">
+                    <a:lnL w="0">
+                      <a:noFill/>
+                    </a:lnL>
+                    <a:lnR w="0">
+                      <a:noFill/>
+                    </a:lnR>
+                    <a:lnT w="0">
+                      <a:noFill/>
+                    </a:lnT>
+                    <a:lnB w="9525">
+                      <a:solidFill>
+                        <a:srgbClr val="EFEFEF"/>
+                      </a:solidFill>
+                    </a:lnB>
+                    <a:noFill/>
+                  </a:tcPr>
+                </a:tc>
+                <a:tc>
+                  <a:txBody>
+                    <a:bodyPr wrap="square"/>
+                    <a:lstStyle/>
+                    <a:p>
+                      <a:pPr algn="ctr"/>
+                      <a:r>
+                        <a:rPr sz="950" b="0">
+                          <a:solidFill>
+                            <a:srgbClr val="595959"/>
+                          </a:solidFill>
+                          <a:latin typeface="Montserrat Medium"/>
+                          <a:ea typeface="Montserrat Medium"/>
+                          <a:cs typeface="Montserrat Medium"/>
+                          <a:sym typeface="Montserrat Medium"/>
+                        </a:rPr>
+                        <a:t>R$ 179.425</a:t>
+                      </a:r>
+                    </a:p>
+                  </a:txBody>
+                  <a:tcPr marL="45720" marR="45720" marT="18288" marB="18288" anchor="t">
+                    <a:lnL w="0">
+                      <a:noFill/>
+                    </a:lnL>
+                    <a:lnR w="0">
+                      <a:noFill/>
+                    </a:lnR>
+                    <a:lnT w="0">
+                      <a:noFill/>
+                    </a:lnT>
+                    <a:lnB w="9525">
+                      <a:solidFill>
+                        <a:srgbClr val="EFEFEF"/>
+                      </a:solidFill>
+                    </a:lnB>
+                    <a:noFill/>
+                  </a:tcPr>
+                </a:tc>
+                <a:tc>
+                  <a:txBody>
+                    <a:bodyPr wrap="square"/>
+                    <a:lstStyle/>
+                    <a:p>
+                      <a:pPr algn="ctr"/>
+                      <a:r>
+                        <a:rPr sz="950" b="0">
+                          <a:solidFill>
+                            <a:srgbClr val="595959"/>
+                          </a:solidFill>
+                          <a:latin typeface="Montserrat Medium"/>
+                          <a:ea typeface="Montserrat Medium"/>
+                          <a:cs typeface="Montserrat Medium"/>
+                          <a:sym typeface="Montserrat Medium"/>
+                        </a:rPr>
+                        <a:t>83%</a:t>
+                      </a:r>
+                    </a:p>
+                  </a:txBody>
+                  <a:tcPr marL="45720" marR="45720" marT="18288" marB="18288" anchor="t">
+                    <a:lnL w="0">
+                      <a:noFill/>
+                    </a:lnL>
+                    <a:lnR w="0">
+                      <a:noFill/>
+                    </a:lnR>
+                    <a:lnT w="0">
+                      <a:noFill/>
+                    </a:lnT>
+                    <a:lnB w="9525">
+                      <a:solidFill>
+                        <a:srgbClr val="EFEFEF"/>
+                      </a:solidFill>
+                    </a:lnB>
+                    <a:noFill/>
+                  </a:tcPr>
+                </a:tc>
+                <a:tc>
+                  <a:txBody>
+                    <a:bodyPr wrap="square"/>
+                    <a:lstStyle/>
+                    <a:p>
+                      <a:pPr algn="ctr"/>
+                      <a:r>
+                        <a:rPr sz="950" b="0">
+                          <a:solidFill>
+                            <a:srgbClr val="C5221F"/>
+                          </a:solidFill>
+                          <a:latin typeface="Montserrat Medium"/>
+                          <a:ea typeface="Montserrat Medium"/>
+                          <a:cs typeface="Montserrat Medium"/>
+                          <a:sym typeface="Montserrat Medium"/>
+                        </a:rPr>
+                        <a:t>-R$ 36.919</a:t>
+                      </a:r>
+                    </a:p>
+                  </a:txBody>
+                  <a:tcPr marL="45720" marR="45720" marT="18288" marB="18288" anchor="t">
+                    <a:lnL w="0">
+                      <a:noFill/>
+                    </a:lnL>
+                    <a:lnR w="0">
+                      <a:noFill/>
+                    </a:lnR>
+                    <a:lnT w="0">
+                      <a:noFill/>
+                    </a:lnT>
+                    <a:lnB w="9525">
+                      <a:solidFill>
+                        <a:srgbClr val="EFEFEF"/>
+                      </a:solidFill>
+                    </a:lnB>
+                    <a:noFill/>
+                  </a:tcPr>
+                </a:tc>
+              </a:tr>
+            </a:tbl>
+          </a:graphicData>
+        </a:graphic>
+      </p:graphicFrame>
+    </p:spTree>
+  </p:cSld>
+  <p:clrMapOvr>
+    <a:masterClrMapping/>
+  </p:clrMapOvr>
+</p:sld>
+</file>
+
+<file path=ppt/slides/slide50.xml><?xml version="1.0" encoding="utf-8"?>
 <p:sld xmlns:a="http://schemas.openxmlformats.org/drawingml/2006/main" xmlns:p="http://schemas.openxmlformats.org/presentationml/2006/main" xmlns:r="http://schemas.openxmlformats.org/officeDocument/2006/relationships">
   <p:cSld>
     <p:spTree>
@@ -42490,1372 +45804,6 @@
           </a:p>
         </p:txBody>
       </p:sp>
-    </p:spTree>
-  </p:cSld>
-  <p:clrMapOvr>
-    <a:masterClrMapping/>
-  </p:clrMapOvr>
-</p:sld>
-</file>
-
-<file path=ppt/slides/slide5.xml><?xml version="1.0" encoding="utf-8"?>
-<p:sld xmlns:a="http://schemas.openxmlformats.org/drawingml/2006/main" xmlns:p="http://schemas.openxmlformats.org/presentationml/2006/main" xmlns:r="http://schemas.openxmlformats.org/officeDocument/2006/relationships">
-  <p:cSld>
-    <p:spTree>
-      <p:nvGrpSpPr>
-        <p:cNvPr id="1" name=""/>
-        <p:cNvGrpSpPr/>
-        <p:nvPr/>
-      </p:nvGrpSpPr>
-      <p:grpSpPr/>
-      <p:sp>
-        <p:nvSpPr>
-          <p:cNvPr id="2" name="TextBox 1"/>
-          <p:cNvSpPr txBox="1"/>
-          <p:nvPr/>
-        </p:nvSpPr>
-        <p:spPr>
-          <a:xfrm>
-            <a:off x="301752" y="301752"/>
-            <a:ext cx="8458200" cy="630936"/>
-          </a:xfrm>
-          <a:prstGeom prst="rect">
-            <a:avLst/>
-          </a:prstGeom>
-          <a:noFill/>
-        </p:spPr>
-        <p:txBody>
-          <a:bodyPr wrap="square" lIns="91425" rIns="91425" tIns="91425" bIns="91425">
-            <a:spAutoFit/>
-          </a:bodyPr>
-          <a:lstStyle/>
-          <a:p>
-            <a:pPr algn="l">
-              <a:spcBef>
-                <a:spcPts val="0"/>
-              </a:spcBef>
-              <a:spcAft>
-                <a:spcPts val="0"/>
-              </a:spcAft>
-            </a:pPr>
-            <a:r>
-              <a:rPr sz="2400" b="1" i="0">
-                <a:solidFill>
-                  <a:srgbClr val="595959"/>
-                </a:solidFill>
-                <a:latin typeface="Montserrat"/>
-                <a:ea typeface="Montserrat"/>
-                <a:cs typeface="Montserrat"/>
-                <a:sym typeface="Montserrat"/>
-              </a:rPr>
-              <a:t>Grupo: 83% da meta de 01 a 05/10</a:t>
-            </a:r>
-          </a:p>
-        </p:txBody>
-      </p:sp>
-      <p:cxnSp>
-        <p:nvCxnSpPr>
-          <p:cNvPr id="3" name="Connector 2"/>
-          <p:cNvCxnSpPr/>
-          <p:nvPr/>
-        </p:nvCxnSpPr>
-        <p:spPr>
-          <a:xfrm>
-            <a:off x="411480" y="932688"/>
-            <a:ext cx="8247887" cy="0"/>
-          </a:xfrm>
-          <a:prstGeom prst="line">
-            <a:avLst/>
-          </a:prstGeom>
-          <a:ln w="19050">
-            <a:solidFill>
-              <a:srgbClr val="EFEFEF"/>
-            </a:solidFill>
-          </a:ln>
-          <a:effectLst/>
-        </p:spPr>
-      </p:cxnSp>
-      <p:sp>
-        <p:nvSpPr>
-          <p:cNvPr id="4" name="TextBox 3"/>
-          <p:cNvSpPr txBox="1"/>
-          <p:nvPr/>
-        </p:nvSpPr>
-        <p:spPr>
-          <a:xfrm>
-            <a:off x="411480" y="1197864"/>
-            <a:ext cx="8458200" cy="2523744"/>
-          </a:xfrm>
-          <a:prstGeom prst="rect">
-            <a:avLst/>
-          </a:prstGeom>
-          <a:noFill/>
-        </p:spPr>
-        <p:txBody>
-          <a:bodyPr wrap="square" lIns="91425" rIns="91425" tIns="91425" bIns="91425">
-            <a:spAutoFit/>
-          </a:bodyPr>
-          <a:lstStyle/>
-          <a:p>
-            <a:pPr algn="l">
-              <a:spcBef>
-                <a:spcPts val="1000"/>
-              </a:spcBef>
-              <a:spcAft>
-                <a:spcPts val="0"/>
-              </a:spcAft>
-            </a:pPr>
-            <a:r>
-              <a:rPr sz="1300" b="0" i="0">
-                <a:solidFill>
-                  <a:srgbClr val="595959"/>
-                </a:solidFill>
-                <a:latin typeface="Montserrat Medium"/>
-                <a:ea typeface="Montserrat Medium"/>
-                <a:cs typeface="Montserrat Medium"/>
-                <a:sym typeface="Montserrat Medium"/>
-              </a:rPr>
-              <a:t>Gap de R$ 36.919: Oscar web, app e Esportes abaixo da meta; Calçados acima. O faturado de outubro ainda está amadurecendo.</a:t>
-            </a:r>
-          </a:p>
-        </p:txBody>
-      </p:sp>
-      <p:sp>
-        <p:nvSpPr>
-          <p:cNvPr id="5" name="TextBox 4"/>
-          <p:cNvSpPr txBox="1"/>
-          <p:nvPr/>
-        </p:nvSpPr>
-        <p:spPr>
-          <a:xfrm>
-            <a:off x="411480" y="4553712"/>
-            <a:ext cx="8458200" cy="310896"/>
-          </a:xfrm>
-          <a:prstGeom prst="rect">
-            <a:avLst/>
-          </a:prstGeom>
-          <a:noFill/>
-        </p:spPr>
-        <p:txBody>
-          <a:bodyPr wrap="square" lIns="91425" rIns="91425" tIns="91425" bIns="91425">
-            <a:spAutoFit/>
-          </a:bodyPr>
-          <a:lstStyle/>
-          <a:p>
-            <a:pPr algn="l">
-              <a:spcBef>
-                <a:spcPts val="0"/>
-              </a:spcBef>
-              <a:spcAft>
-                <a:spcPts val="0"/>
-              </a:spcAft>
-            </a:pPr>
-            <a:r>
-              <a:rPr sz="1000" b="0" i="0">
-                <a:solidFill>
-                  <a:srgbClr val="B7B7B7"/>
-                </a:solidFill>
-                <a:latin typeface="Montserrat Medium"/>
-                <a:ea typeface="Montserrat Medium"/>
-                <a:cs typeface="Montserrat Medium"/>
-                <a:sym typeface="Montserrat Medium"/>
-              </a:rPr>
-              <a:t>Dados do GA4 e planilha de metas | 01 a 05/10 contra 03-07/09 e 24-28/09 | faturado</a:t>
-            </a:r>
-          </a:p>
-        </p:txBody>
-      </p:sp>
-      <p:graphicFrame>
-        <p:nvGraphicFramePr>
-          <p:cNvPr id="6" name="Table 5"/>
-          <p:cNvGraphicFramePr>
-            <a:graphicFrameLocks noGrp="1"/>
-          </p:cNvGraphicFramePr>
-          <p:nvPr/>
-        </p:nvGraphicFramePr>
-        <p:xfrm>
-          <a:off x="411480" y="2148840"/>
-          <a:ext cx="8321040" cy="1975104"/>
-        </p:xfrm>
-        <a:graphic>
-          <a:graphicData uri="http://schemas.openxmlformats.org/drawingml/2006/table">
-            <a:tbl>
-              <a:tblPr firstRow="0" bandRow="0" firstCol="0" lastRow="0" lastCol="0" bandCol="0">
-                <a:tableStyleId>{2D5ABB26-0587-4C30-8999-92F81FD0307C}</a:tableStyleId>
-              </a:tblPr>
-              <a:tblGrid>
-                <a:gridCol w="2194560"/>
-                <a:gridCol w="1463040"/>
-                <a:gridCol w="1463040"/>
-                <a:gridCol w="1554480"/>
-                <a:gridCol w="1645920"/>
-              </a:tblGrid>
-              <a:tr h="329184">
-                <a:tc>
-                  <a:txBody>
-                    <a:bodyPr wrap="square"/>
-                    <a:lstStyle/>
-                    <a:p>
-                      <a:pPr algn="l"/>
-                      <a:r>
-                        <a:rPr sz="950" b="1">
-                          <a:solidFill>
-                            <a:srgbClr val="595959"/>
-                          </a:solidFill>
-                          <a:latin typeface="Montserrat"/>
-                          <a:ea typeface="Montserrat"/>
-                          <a:cs typeface="Montserrat"/>
-                          <a:sym typeface="Montserrat"/>
-                        </a:rPr>
-                        <a:t>Bandeira</a:t>
-                      </a:r>
-                    </a:p>
-                  </a:txBody>
-                  <a:tcPr marL="45720" marR="45720" marT="18288" marB="18288" anchor="t">
-                    <a:lnL w="0">
-                      <a:noFill/>
-                    </a:lnL>
-                    <a:lnR w="0">
-                      <a:noFill/>
-                    </a:lnR>
-                    <a:lnT w="0">
-                      <a:noFill/>
-                    </a:lnT>
-                    <a:lnB w="9525">
-                      <a:solidFill>
-                        <a:srgbClr val="EFEFEF"/>
-                      </a:solidFill>
-                    </a:lnB>
-                    <a:solidFill>
-                      <a:srgbClr val="F3F3F3"/>
-                    </a:solidFill>
-                  </a:tcPr>
-                </a:tc>
-                <a:tc>
-                  <a:txBody>
-                    <a:bodyPr wrap="square"/>
-                    <a:lstStyle/>
-                    <a:p>
-                      <a:pPr algn="ctr"/>
-                      <a:r>
-                        <a:rPr sz="950" b="1">
-                          <a:solidFill>
-                            <a:srgbClr val="595959"/>
-                          </a:solidFill>
-                          <a:latin typeface="Montserrat"/>
-                          <a:ea typeface="Montserrat"/>
-                          <a:cs typeface="Montserrat"/>
-                          <a:sym typeface="Montserrat"/>
-                        </a:rPr>
-                        <a:t>Meta 01-05</a:t>
-                      </a:r>
-                    </a:p>
-                  </a:txBody>
-                  <a:tcPr marL="45720" marR="45720" marT="18288" marB="18288" anchor="t">
-                    <a:lnL w="0">
-                      <a:noFill/>
-                    </a:lnL>
-                    <a:lnR w="0">
-                      <a:noFill/>
-                    </a:lnR>
-                    <a:lnT w="0">
-                      <a:noFill/>
-                    </a:lnT>
-                    <a:lnB w="9525">
-                      <a:solidFill>
-                        <a:srgbClr val="EFEFEF"/>
-                      </a:solidFill>
-                    </a:lnB>
-                    <a:solidFill>
-                      <a:srgbClr val="F3F3F3"/>
-                    </a:solidFill>
-                  </a:tcPr>
-                </a:tc>
-                <a:tc>
-                  <a:txBody>
-                    <a:bodyPr wrap="square"/>
-                    <a:lstStyle/>
-                    <a:p>
-                      <a:pPr algn="ctr"/>
-                      <a:r>
-                        <a:rPr sz="950" b="1">
-                          <a:solidFill>
-                            <a:srgbClr val="595959"/>
-                          </a:solidFill>
-                          <a:latin typeface="Montserrat"/>
-                          <a:ea typeface="Montserrat"/>
-                          <a:cs typeface="Montserrat"/>
-                          <a:sym typeface="Montserrat"/>
-                        </a:rPr>
-                        <a:t>Faturado</a:t>
-                      </a:r>
-                    </a:p>
-                  </a:txBody>
-                  <a:tcPr marL="45720" marR="45720" marT="18288" marB="18288" anchor="t">
-                    <a:lnL w="0">
-                      <a:noFill/>
-                    </a:lnL>
-                    <a:lnR w="0">
-                      <a:noFill/>
-                    </a:lnR>
-                    <a:lnT w="0">
-                      <a:noFill/>
-                    </a:lnT>
-                    <a:lnB w="9525">
-                      <a:solidFill>
-                        <a:srgbClr val="EFEFEF"/>
-                      </a:solidFill>
-                    </a:lnB>
-                    <a:solidFill>
-                      <a:srgbClr val="F3F3F3"/>
-                    </a:solidFill>
-                  </a:tcPr>
-                </a:tc>
-                <a:tc>
-                  <a:txBody>
-                    <a:bodyPr wrap="square"/>
-                    <a:lstStyle/>
-                    <a:p>
-                      <a:pPr algn="ctr"/>
-                      <a:r>
-                        <a:rPr sz="950" b="1">
-                          <a:solidFill>
-                            <a:srgbClr val="595959"/>
-                          </a:solidFill>
-                          <a:latin typeface="Montserrat"/>
-                          <a:ea typeface="Montserrat"/>
-                          <a:cs typeface="Montserrat"/>
-                          <a:sym typeface="Montserrat"/>
-                        </a:rPr>
-                        <a:t>Atingimento</a:t>
-                      </a:r>
-                    </a:p>
-                  </a:txBody>
-                  <a:tcPr marL="45720" marR="45720" marT="18288" marB="18288" anchor="t">
-                    <a:lnL w="0">
-                      <a:noFill/>
-                    </a:lnL>
-                    <a:lnR w="0">
-                      <a:noFill/>
-                    </a:lnR>
-                    <a:lnT w="0">
-                      <a:noFill/>
-                    </a:lnT>
-                    <a:lnB w="9525">
-                      <a:solidFill>
-                        <a:srgbClr val="EFEFEF"/>
-                      </a:solidFill>
-                    </a:lnB>
-                    <a:solidFill>
-                      <a:srgbClr val="F3F3F3"/>
-                    </a:solidFill>
-                  </a:tcPr>
-                </a:tc>
-                <a:tc>
-                  <a:txBody>
-                    <a:bodyPr wrap="square"/>
-                    <a:lstStyle/>
-                    <a:p>
-                      <a:pPr algn="ctr"/>
-                      <a:r>
-                        <a:rPr sz="950" b="1">
-                          <a:solidFill>
-                            <a:srgbClr val="595959"/>
-                          </a:solidFill>
-                          <a:latin typeface="Montserrat"/>
-                          <a:ea typeface="Montserrat"/>
-                          <a:cs typeface="Montserrat"/>
-                          <a:sym typeface="Montserrat"/>
-                        </a:rPr>
-                        <a:t>Gap</a:t>
-                      </a:r>
-                    </a:p>
-                  </a:txBody>
-                  <a:tcPr marL="45720" marR="45720" marT="18288" marB="18288" anchor="t">
-                    <a:lnL w="0">
-                      <a:noFill/>
-                    </a:lnL>
-                    <a:lnR w="0">
-                      <a:noFill/>
-                    </a:lnR>
-                    <a:lnT w="0">
-                      <a:noFill/>
-                    </a:lnT>
-                    <a:lnB w="9525">
-                      <a:solidFill>
-                        <a:srgbClr val="EFEFEF"/>
-                      </a:solidFill>
-                    </a:lnB>
-                    <a:solidFill>
-                      <a:srgbClr val="F3F3F3"/>
-                    </a:solidFill>
-                  </a:tcPr>
-                </a:tc>
-              </a:tr>
-              <a:tr h="329184">
-                <a:tc>
-                  <a:txBody>
-                    <a:bodyPr wrap="square"/>
-                    <a:lstStyle/>
-                    <a:p>
-                      <a:pPr algn="l"/>
-                      <a:r>
-                        <a:rPr sz="950" b="0">
-                          <a:solidFill>
-                            <a:srgbClr val="595959"/>
-                          </a:solidFill>
-                          <a:latin typeface="Montserrat Medium"/>
-                          <a:ea typeface="Montserrat Medium"/>
-                          <a:cs typeface="Montserrat Medium"/>
-                          <a:sym typeface="Montserrat Medium"/>
-                        </a:rPr>
-                        <a:t>Oscar (web)</a:t>
-                      </a:r>
-                    </a:p>
-                  </a:txBody>
-                  <a:tcPr marL="45720" marR="45720" marT="18288" marB="18288" anchor="t">
-                    <a:lnL w="0">
-                      <a:noFill/>
-                    </a:lnL>
-                    <a:lnR w="0">
-                      <a:noFill/>
-                    </a:lnR>
-                    <a:lnT w="0">
-                      <a:noFill/>
-                    </a:lnT>
-                    <a:lnB w="9525">
-                      <a:solidFill>
-                        <a:srgbClr val="EFEFEF"/>
-                      </a:solidFill>
-                    </a:lnB>
-                    <a:noFill/>
-                  </a:tcPr>
-                </a:tc>
-                <a:tc>
-                  <a:txBody>
-                    <a:bodyPr wrap="square"/>
-                    <a:lstStyle/>
-                    <a:p>
-                      <a:pPr algn="ctr"/>
-                      <a:r>
-                        <a:rPr sz="950" b="0">
-                          <a:solidFill>
-                            <a:srgbClr val="595959"/>
-                          </a:solidFill>
-                          <a:latin typeface="Montserrat Medium"/>
-                          <a:ea typeface="Montserrat Medium"/>
-                          <a:cs typeface="Montserrat Medium"/>
-                          <a:sym typeface="Montserrat Medium"/>
-                        </a:rPr>
-                        <a:t>R$ 86.538</a:t>
-                      </a:r>
-                    </a:p>
-                  </a:txBody>
-                  <a:tcPr marL="45720" marR="45720" marT="18288" marB="18288" anchor="t">
-                    <a:lnL w="0">
-                      <a:noFill/>
-                    </a:lnL>
-                    <a:lnR w="0">
-                      <a:noFill/>
-                    </a:lnR>
-                    <a:lnT w="0">
-                      <a:noFill/>
-                    </a:lnT>
-                    <a:lnB w="9525">
-                      <a:solidFill>
-                        <a:srgbClr val="EFEFEF"/>
-                      </a:solidFill>
-                    </a:lnB>
-                    <a:noFill/>
-                  </a:tcPr>
-                </a:tc>
-                <a:tc>
-                  <a:txBody>
-                    <a:bodyPr wrap="square"/>
-                    <a:lstStyle/>
-                    <a:p>
-                      <a:pPr algn="ctr"/>
-                      <a:r>
-                        <a:rPr sz="950" b="0">
-                          <a:solidFill>
-                            <a:srgbClr val="595959"/>
-                          </a:solidFill>
-                          <a:latin typeface="Montserrat Medium"/>
-                          <a:ea typeface="Montserrat Medium"/>
-                          <a:cs typeface="Montserrat Medium"/>
-                          <a:sym typeface="Montserrat Medium"/>
-                        </a:rPr>
-                        <a:t>R$ 65.147</a:t>
-                      </a:r>
-                    </a:p>
-                  </a:txBody>
-                  <a:tcPr marL="45720" marR="45720" marT="18288" marB="18288" anchor="t">
-                    <a:lnL w="0">
-                      <a:noFill/>
-                    </a:lnL>
-                    <a:lnR w="0">
-                      <a:noFill/>
-                    </a:lnR>
-                    <a:lnT w="0">
-                      <a:noFill/>
-                    </a:lnT>
-                    <a:lnB w="9525">
-                      <a:solidFill>
-                        <a:srgbClr val="EFEFEF"/>
-                      </a:solidFill>
-                    </a:lnB>
-                    <a:noFill/>
-                  </a:tcPr>
-                </a:tc>
-                <a:tc>
-                  <a:txBody>
-                    <a:bodyPr wrap="square"/>
-                    <a:lstStyle/>
-                    <a:p>
-                      <a:pPr algn="ctr"/>
-                      <a:r>
-                        <a:rPr sz="950" b="0">
-                          <a:solidFill>
-                            <a:srgbClr val="595959"/>
-                          </a:solidFill>
-                          <a:latin typeface="Montserrat Medium"/>
-                          <a:ea typeface="Montserrat Medium"/>
-                          <a:cs typeface="Montserrat Medium"/>
-                          <a:sym typeface="Montserrat Medium"/>
-                        </a:rPr>
-                        <a:t>75%</a:t>
-                      </a:r>
-                    </a:p>
-                  </a:txBody>
-                  <a:tcPr marL="45720" marR="45720" marT="18288" marB="18288" anchor="t">
-                    <a:lnL w="0">
-                      <a:noFill/>
-                    </a:lnL>
-                    <a:lnR w="0">
-                      <a:noFill/>
-                    </a:lnR>
-                    <a:lnT w="0">
-                      <a:noFill/>
-                    </a:lnT>
-                    <a:lnB w="9525">
-                      <a:solidFill>
-                        <a:srgbClr val="EFEFEF"/>
-                      </a:solidFill>
-                    </a:lnB>
-                    <a:noFill/>
-                  </a:tcPr>
-                </a:tc>
-                <a:tc>
-                  <a:txBody>
-                    <a:bodyPr wrap="square"/>
-                    <a:lstStyle/>
-                    <a:p>
-                      <a:pPr algn="ctr"/>
-                      <a:r>
-                        <a:rPr sz="950" b="0">
-                          <a:solidFill>
-                            <a:srgbClr val="C5221F"/>
-                          </a:solidFill>
-                          <a:latin typeface="Montserrat Medium"/>
-                          <a:ea typeface="Montserrat Medium"/>
-                          <a:cs typeface="Montserrat Medium"/>
-                          <a:sym typeface="Montserrat Medium"/>
-                        </a:rPr>
-                        <a:t>-R$ 21.391</a:t>
-                      </a:r>
-                    </a:p>
-                  </a:txBody>
-                  <a:tcPr marL="45720" marR="45720" marT="18288" marB="18288" anchor="t">
-                    <a:lnL w="0">
-                      <a:noFill/>
-                    </a:lnL>
-                    <a:lnR w="0">
-                      <a:noFill/>
-                    </a:lnR>
-                    <a:lnT w="0">
-                      <a:noFill/>
-                    </a:lnT>
-                    <a:lnB w="9525">
-                      <a:solidFill>
-                        <a:srgbClr val="EFEFEF"/>
-                      </a:solidFill>
-                    </a:lnB>
-                    <a:noFill/>
-                  </a:tcPr>
-                </a:tc>
-              </a:tr>
-              <a:tr h="329184">
-                <a:tc>
-                  <a:txBody>
-                    <a:bodyPr wrap="square"/>
-                    <a:lstStyle/>
-                    <a:p>
-                      <a:pPr algn="l"/>
-                      <a:r>
-                        <a:rPr sz="950" b="0">
-                          <a:solidFill>
-                            <a:srgbClr val="595959"/>
-                          </a:solidFill>
-                          <a:latin typeface="Montserrat Medium"/>
-                          <a:ea typeface="Montserrat Medium"/>
-                          <a:cs typeface="Montserrat Medium"/>
-                          <a:sym typeface="Montserrat Medium"/>
-                        </a:rPr>
-                        <a:t>Oscar (app)</a:t>
-                      </a:r>
-                    </a:p>
-                  </a:txBody>
-                  <a:tcPr marL="45720" marR="45720" marT="18288" marB="18288" anchor="t">
-                    <a:lnL w="0">
-                      <a:noFill/>
-                    </a:lnL>
-                    <a:lnR w="0">
-                      <a:noFill/>
-                    </a:lnR>
-                    <a:lnT w="0">
-                      <a:noFill/>
-                    </a:lnT>
-                    <a:lnB w="9525">
-                      <a:solidFill>
-                        <a:srgbClr val="EFEFEF"/>
-                      </a:solidFill>
-                    </a:lnB>
-                    <a:noFill/>
-                  </a:tcPr>
-                </a:tc>
-                <a:tc>
-                  <a:txBody>
-                    <a:bodyPr wrap="square"/>
-                    <a:lstStyle/>
-                    <a:p>
-                      <a:pPr algn="ctr"/>
-                      <a:r>
-                        <a:rPr sz="950" b="0">
-                          <a:solidFill>
-                            <a:srgbClr val="595959"/>
-                          </a:solidFill>
-                          <a:latin typeface="Montserrat Medium"/>
-                          <a:ea typeface="Montserrat Medium"/>
-                          <a:cs typeface="Montserrat Medium"/>
-                          <a:sym typeface="Montserrat Medium"/>
-                        </a:rPr>
-                        <a:t>R$ 51.760</a:t>
-                      </a:r>
-                    </a:p>
-                  </a:txBody>
-                  <a:tcPr marL="45720" marR="45720" marT="18288" marB="18288" anchor="t">
-                    <a:lnL w="0">
-                      <a:noFill/>
-                    </a:lnL>
-                    <a:lnR w="0">
-                      <a:noFill/>
-                    </a:lnR>
-                    <a:lnT w="0">
-                      <a:noFill/>
-                    </a:lnT>
-                    <a:lnB w="9525">
-                      <a:solidFill>
-                        <a:srgbClr val="EFEFEF"/>
-                      </a:solidFill>
-                    </a:lnB>
-                    <a:noFill/>
-                  </a:tcPr>
-                </a:tc>
-                <a:tc>
-                  <a:txBody>
-                    <a:bodyPr wrap="square"/>
-                    <a:lstStyle/>
-                    <a:p>
-                      <a:pPr algn="ctr"/>
-                      <a:r>
-                        <a:rPr sz="950" b="0">
-                          <a:solidFill>
-                            <a:srgbClr val="595959"/>
-                          </a:solidFill>
-                          <a:latin typeface="Montserrat Medium"/>
-                          <a:ea typeface="Montserrat Medium"/>
-                          <a:cs typeface="Montserrat Medium"/>
-                          <a:sym typeface="Montserrat Medium"/>
-                        </a:rPr>
-                        <a:t>R$ 34.692</a:t>
-                      </a:r>
-                    </a:p>
-                  </a:txBody>
-                  <a:tcPr marL="45720" marR="45720" marT="18288" marB="18288" anchor="t">
-                    <a:lnL w="0">
-                      <a:noFill/>
-                    </a:lnL>
-                    <a:lnR w="0">
-                      <a:noFill/>
-                    </a:lnR>
-                    <a:lnT w="0">
-                      <a:noFill/>
-                    </a:lnT>
-                    <a:lnB w="9525">
-                      <a:solidFill>
-                        <a:srgbClr val="EFEFEF"/>
-                      </a:solidFill>
-                    </a:lnB>
-                    <a:noFill/>
-                  </a:tcPr>
-                </a:tc>
-                <a:tc>
-                  <a:txBody>
-                    <a:bodyPr wrap="square"/>
-                    <a:lstStyle/>
-                    <a:p>
-                      <a:pPr algn="ctr"/>
-                      <a:r>
-                        <a:rPr sz="950" b="0">
-                          <a:solidFill>
-                            <a:srgbClr val="595959"/>
-                          </a:solidFill>
-                          <a:latin typeface="Montserrat Medium"/>
-                          <a:ea typeface="Montserrat Medium"/>
-                          <a:cs typeface="Montserrat Medium"/>
-                          <a:sym typeface="Montserrat Medium"/>
-                        </a:rPr>
-                        <a:t>67%</a:t>
-                      </a:r>
-                    </a:p>
-                  </a:txBody>
-                  <a:tcPr marL="45720" marR="45720" marT="18288" marB="18288" anchor="t">
-                    <a:lnL w="0">
-                      <a:noFill/>
-                    </a:lnL>
-                    <a:lnR w="0">
-                      <a:noFill/>
-                    </a:lnR>
-                    <a:lnT w="0">
-                      <a:noFill/>
-                    </a:lnT>
-                    <a:lnB w="9525">
-                      <a:solidFill>
-                        <a:srgbClr val="EFEFEF"/>
-                      </a:solidFill>
-                    </a:lnB>
-                    <a:noFill/>
-                  </a:tcPr>
-                </a:tc>
-                <a:tc>
-                  <a:txBody>
-                    <a:bodyPr wrap="square"/>
-                    <a:lstStyle/>
-                    <a:p>
-                      <a:pPr algn="ctr"/>
-                      <a:r>
-                        <a:rPr sz="950" b="0">
-                          <a:solidFill>
-                            <a:srgbClr val="C5221F"/>
-                          </a:solidFill>
-                          <a:latin typeface="Montserrat Medium"/>
-                          <a:ea typeface="Montserrat Medium"/>
-                          <a:cs typeface="Montserrat Medium"/>
-                          <a:sym typeface="Montserrat Medium"/>
-                        </a:rPr>
-                        <a:t>-R$ 17.069</a:t>
-                      </a:r>
-                    </a:p>
-                  </a:txBody>
-                  <a:tcPr marL="45720" marR="45720" marT="18288" marB="18288" anchor="t">
-                    <a:lnL w="0">
-                      <a:noFill/>
-                    </a:lnL>
-                    <a:lnR w="0">
-                      <a:noFill/>
-                    </a:lnR>
-                    <a:lnT w="0">
-                      <a:noFill/>
-                    </a:lnT>
-                    <a:lnB w="9525">
-                      <a:solidFill>
-                        <a:srgbClr val="EFEFEF"/>
-                      </a:solidFill>
-                    </a:lnB>
-                    <a:noFill/>
-                  </a:tcPr>
-                </a:tc>
-              </a:tr>
-              <a:tr h="329184">
-                <a:tc>
-                  <a:txBody>
-                    <a:bodyPr wrap="square"/>
-                    <a:lstStyle/>
-                    <a:p>
-                      <a:pPr algn="l"/>
-                      <a:r>
-                        <a:rPr sz="950" b="0">
-                          <a:solidFill>
-                            <a:srgbClr val="595959"/>
-                          </a:solidFill>
-                          <a:latin typeface="Montserrat Medium"/>
-                          <a:ea typeface="Montserrat Medium"/>
-                          <a:cs typeface="Montserrat Medium"/>
-                          <a:sym typeface="Montserrat Medium"/>
-                        </a:rPr>
-                        <a:t>Paquetá Esportes (web)</a:t>
-                      </a:r>
-                    </a:p>
-                  </a:txBody>
-                  <a:tcPr marL="45720" marR="45720" marT="18288" marB="18288" anchor="t">
-                    <a:lnL w="0">
-                      <a:noFill/>
-                    </a:lnL>
-                    <a:lnR w="0">
-                      <a:noFill/>
-                    </a:lnR>
-                    <a:lnT w="0">
-                      <a:noFill/>
-                    </a:lnT>
-                    <a:lnB w="9525">
-                      <a:solidFill>
-                        <a:srgbClr val="EFEFEF"/>
-                      </a:solidFill>
-                    </a:lnB>
-                    <a:noFill/>
-                  </a:tcPr>
-                </a:tc>
-                <a:tc>
-                  <a:txBody>
-                    <a:bodyPr wrap="square"/>
-                    <a:lstStyle/>
-                    <a:p>
-                      <a:pPr algn="ctr"/>
-                      <a:r>
-                        <a:rPr sz="950" b="0">
-                          <a:solidFill>
-                            <a:srgbClr val="595959"/>
-                          </a:solidFill>
-                          <a:latin typeface="Montserrat Medium"/>
-                          <a:ea typeface="Montserrat Medium"/>
-                          <a:cs typeface="Montserrat Medium"/>
-                          <a:sym typeface="Montserrat Medium"/>
-                        </a:rPr>
-                        <a:t>R$ 56.412</a:t>
-                      </a:r>
-                    </a:p>
-                  </a:txBody>
-                  <a:tcPr marL="45720" marR="45720" marT="18288" marB="18288" anchor="t">
-                    <a:lnL w="0">
-                      <a:noFill/>
-                    </a:lnL>
-                    <a:lnR w="0">
-                      <a:noFill/>
-                    </a:lnR>
-                    <a:lnT w="0">
-                      <a:noFill/>
-                    </a:lnT>
-                    <a:lnB w="9525">
-                      <a:solidFill>
-                        <a:srgbClr val="EFEFEF"/>
-                      </a:solidFill>
-                    </a:lnB>
-                    <a:noFill/>
-                  </a:tcPr>
-                </a:tc>
-                <a:tc>
-                  <a:txBody>
-                    <a:bodyPr wrap="square"/>
-                    <a:lstStyle/>
-                    <a:p>
-                      <a:pPr algn="ctr"/>
-                      <a:r>
-                        <a:rPr sz="950" b="0">
-                          <a:solidFill>
-                            <a:srgbClr val="595959"/>
-                          </a:solidFill>
-                          <a:latin typeface="Montserrat Medium"/>
-                          <a:ea typeface="Montserrat Medium"/>
-                          <a:cs typeface="Montserrat Medium"/>
-                          <a:sym typeface="Montserrat Medium"/>
-                        </a:rPr>
-                        <a:t>R$ 51.564</a:t>
-                      </a:r>
-                    </a:p>
-                  </a:txBody>
-                  <a:tcPr marL="45720" marR="45720" marT="18288" marB="18288" anchor="t">
-                    <a:lnL w="0">
-                      <a:noFill/>
-                    </a:lnL>
-                    <a:lnR w="0">
-                      <a:noFill/>
-                    </a:lnR>
-                    <a:lnT w="0">
-                      <a:noFill/>
-                    </a:lnT>
-                    <a:lnB w="9525">
-                      <a:solidFill>
-                        <a:srgbClr val="EFEFEF"/>
-                      </a:solidFill>
-                    </a:lnB>
-                    <a:noFill/>
-                  </a:tcPr>
-                </a:tc>
-                <a:tc>
-                  <a:txBody>
-                    <a:bodyPr wrap="square"/>
-                    <a:lstStyle/>
-                    <a:p>
-                      <a:pPr algn="ctr"/>
-                      <a:r>
-                        <a:rPr sz="950" b="0">
-                          <a:solidFill>
-                            <a:srgbClr val="595959"/>
-                          </a:solidFill>
-                          <a:latin typeface="Montserrat Medium"/>
-                          <a:ea typeface="Montserrat Medium"/>
-                          <a:cs typeface="Montserrat Medium"/>
-                          <a:sym typeface="Montserrat Medium"/>
-                        </a:rPr>
-                        <a:t>91%</a:t>
-                      </a:r>
-                    </a:p>
-                  </a:txBody>
-                  <a:tcPr marL="45720" marR="45720" marT="18288" marB="18288" anchor="t">
-                    <a:lnL w="0">
-                      <a:noFill/>
-                    </a:lnL>
-                    <a:lnR w="0">
-                      <a:noFill/>
-                    </a:lnR>
-                    <a:lnT w="0">
-                      <a:noFill/>
-                    </a:lnT>
-                    <a:lnB w="9525">
-                      <a:solidFill>
-                        <a:srgbClr val="EFEFEF"/>
-                      </a:solidFill>
-                    </a:lnB>
-                    <a:noFill/>
-                  </a:tcPr>
-                </a:tc>
-                <a:tc>
-                  <a:txBody>
-                    <a:bodyPr wrap="square"/>
-                    <a:lstStyle/>
-                    <a:p>
-                      <a:pPr algn="ctr"/>
-                      <a:r>
-                        <a:rPr sz="950" b="0">
-                          <a:solidFill>
-                            <a:srgbClr val="C5221F"/>
-                          </a:solidFill>
-                          <a:latin typeface="Montserrat Medium"/>
-                          <a:ea typeface="Montserrat Medium"/>
-                          <a:cs typeface="Montserrat Medium"/>
-                          <a:sym typeface="Montserrat Medium"/>
-                        </a:rPr>
-                        <a:t>-R$ 4.848</a:t>
-                      </a:r>
-                    </a:p>
-                  </a:txBody>
-                  <a:tcPr marL="45720" marR="45720" marT="18288" marB="18288" anchor="t">
-                    <a:lnL w="0">
-                      <a:noFill/>
-                    </a:lnL>
-                    <a:lnR w="0">
-                      <a:noFill/>
-                    </a:lnR>
-                    <a:lnT w="0">
-                      <a:noFill/>
-                    </a:lnT>
-                    <a:lnB w="9525">
-                      <a:solidFill>
-                        <a:srgbClr val="EFEFEF"/>
-                      </a:solidFill>
-                    </a:lnB>
-                    <a:noFill/>
-                  </a:tcPr>
-                </a:tc>
-              </a:tr>
-              <a:tr h="329184">
-                <a:tc>
-                  <a:txBody>
-                    <a:bodyPr wrap="square"/>
-                    <a:lstStyle/>
-                    <a:p>
-                      <a:pPr algn="l"/>
-                      <a:r>
-                        <a:rPr sz="950" b="0">
-                          <a:solidFill>
-                            <a:srgbClr val="595959"/>
-                          </a:solidFill>
-                          <a:latin typeface="Montserrat Medium"/>
-                          <a:ea typeface="Montserrat Medium"/>
-                          <a:cs typeface="Montserrat Medium"/>
-                          <a:sym typeface="Montserrat Medium"/>
-                        </a:rPr>
-                        <a:t>Paquetá Calçados (web)</a:t>
-                      </a:r>
-                    </a:p>
-                  </a:txBody>
-                  <a:tcPr marL="45720" marR="45720" marT="18288" marB="18288" anchor="t">
-                    <a:lnL w="0">
-                      <a:noFill/>
-                    </a:lnL>
-                    <a:lnR w="0">
-                      <a:noFill/>
-                    </a:lnR>
-                    <a:lnT w="0">
-                      <a:noFill/>
-                    </a:lnT>
-                    <a:lnB w="9525">
-                      <a:solidFill>
-                        <a:srgbClr val="EFEFEF"/>
-                      </a:solidFill>
-                    </a:lnB>
-                    <a:noFill/>
-                  </a:tcPr>
-                </a:tc>
-                <a:tc>
-                  <a:txBody>
-                    <a:bodyPr wrap="square"/>
-                    <a:lstStyle/>
-                    <a:p>
-                      <a:pPr algn="ctr"/>
-                      <a:r>
-                        <a:rPr sz="950" b="0">
-                          <a:solidFill>
-                            <a:srgbClr val="595959"/>
-                          </a:solidFill>
-                          <a:latin typeface="Montserrat Medium"/>
-                          <a:ea typeface="Montserrat Medium"/>
-                          <a:cs typeface="Montserrat Medium"/>
-                          <a:sym typeface="Montserrat Medium"/>
-                        </a:rPr>
-                        <a:t>R$ 21.634</a:t>
-                      </a:r>
-                    </a:p>
-                  </a:txBody>
-                  <a:tcPr marL="45720" marR="45720" marT="18288" marB="18288" anchor="t">
-                    <a:lnL w="0">
-                      <a:noFill/>
-                    </a:lnL>
-                    <a:lnR w="0">
-                      <a:noFill/>
-                    </a:lnR>
-                    <a:lnT w="0">
-                      <a:noFill/>
-                    </a:lnT>
-                    <a:lnB w="9525">
-                      <a:solidFill>
-                        <a:srgbClr val="EFEFEF"/>
-                      </a:solidFill>
-                    </a:lnB>
-                    <a:noFill/>
-                  </a:tcPr>
-                </a:tc>
-                <a:tc>
-                  <a:txBody>
-                    <a:bodyPr wrap="square"/>
-                    <a:lstStyle/>
-                    <a:p>
-                      <a:pPr algn="ctr"/>
-                      <a:r>
-                        <a:rPr sz="950" b="0">
-                          <a:solidFill>
-                            <a:srgbClr val="595959"/>
-                          </a:solidFill>
-                          <a:latin typeface="Montserrat Medium"/>
-                          <a:ea typeface="Montserrat Medium"/>
-                          <a:cs typeface="Montserrat Medium"/>
-                          <a:sym typeface="Montserrat Medium"/>
-                        </a:rPr>
-                        <a:t>R$ 28.023</a:t>
-                      </a:r>
-                    </a:p>
-                  </a:txBody>
-                  <a:tcPr marL="45720" marR="45720" marT="18288" marB="18288" anchor="t">
-                    <a:lnL w="0">
-                      <a:noFill/>
-                    </a:lnL>
-                    <a:lnR w="0">
-                      <a:noFill/>
-                    </a:lnR>
-                    <a:lnT w="0">
-                      <a:noFill/>
-                    </a:lnT>
-                    <a:lnB w="9525">
-                      <a:solidFill>
-                        <a:srgbClr val="EFEFEF"/>
-                      </a:solidFill>
-                    </a:lnB>
-                    <a:noFill/>
-                  </a:tcPr>
-                </a:tc>
-                <a:tc>
-                  <a:txBody>
-                    <a:bodyPr wrap="square"/>
-                    <a:lstStyle/>
-                    <a:p>
-                      <a:pPr algn="ctr"/>
-                      <a:r>
-                        <a:rPr sz="950" b="0">
-                          <a:solidFill>
-                            <a:srgbClr val="595959"/>
-                          </a:solidFill>
-                          <a:latin typeface="Montserrat Medium"/>
-                          <a:ea typeface="Montserrat Medium"/>
-                          <a:cs typeface="Montserrat Medium"/>
-                          <a:sym typeface="Montserrat Medium"/>
-                        </a:rPr>
-                        <a:t>130%</a:t>
-                      </a:r>
-                    </a:p>
-                  </a:txBody>
-                  <a:tcPr marL="45720" marR="45720" marT="18288" marB="18288" anchor="t">
-                    <a:lnL w="0">
-                      <a:noFill/>
-                    </a:lnL>
-                    <a:lnR w="0">
-                      <a:noFill/>
-                    </a:lnR>
-                    <a:lnT w="0">
-                      <a:noFill/>
-                    </a:lnT>
-                    <a:lnB w="9525">
-                      <a:solidFill>
-                        <a:srgbClr val="EFEFEF"/>
-                      </a:solidFill>
-                    </a:lnB>
-                    <a:noFill/>
-                  </a:tcPr>
-                </a:tc>
-                <a:tc>
-                  <a:txBody>
-                    <a:bodyPr wrap="square"/>
-                    <a:lstStyle/>
-                    <a:p>
-                      <a:pPr algn="ctr"/>
-                      <a:r>
-                        <a:rPr sz="950" b="0">
-                          <a:solidFill>
-                            <a:srgbClr val="0D8A00"/>
-                          </a:solidFill>
-                          <a:latin typeface="Montserrat Medium"/>
-                          <a:ea typeface="Montserrat Medium"/>
-                          <a:cs typeface="Montserrat Medium"/>
-                          <a:sym typeface="Montserrat Medium"/>
-                        </a:rPr>
-                        <a:t>+R$ 6.388</a:t>
-                      </a:r>
-                    </a:p>
-                  </a:txBody>
-                  <a:tcPr marL="45720" marR="45720" marT="18288" marB="18288" anchor="t">
-                    <a:lnL w="0">
-                      <a:noFill/>
-                    </a:lnL>
-                    <a:lnR w="0">
-                      <a:noFill/>
-                    </a:lnR>
-                    <a:lnT w="0">
-                      <a:noFill/>
-                    </a:lnT>
-                    <a:lnB w="9525">
-                      <a:solidFill>
-                        <a:srgbClr val="EFEFEF"/>
-                      </a:solidFill>
-                    </a:lnB>
-                    <a:noFill/>
-                  </a:tcPr>
-                </a:tc>
-              </a:tr>
-              <a:tr h="329184">
-                <a:tc>
-                  <a:txBody>
-                    <a:bodyPr wrap="square"/>
-                    <a:lstStyle/>
-                    <a:p>
-                      <a:pPr algn="l"/>
-                      <a:r>
-                        <a:rPr sz="950" b="0">
-                          <a:solidFill>
-                            <a:srgbClr val="595959"/>
-                          </a:solidFill>
-                          <a:latin typeface="Montserrat Medium"/>
-                          <a:ea typeface="Montserrat Medium"/>
-                          <a:cs typeface="Montserrat Medium"/>
-                          <a:sym typeface="Montserrat Medium"/>
-                        </a:rPr>
-                        <a:t>Grupo</a:t>
-                      </a:r>
-                    </a:p>
-                  </a:txBody>
-                  <a:tcPr marL="45720" marR="45720" marT="18288" marB="18288" anchor="t">
-                    <a:lnL w="0">
-                      <a:noFill/>
-                    </a:lnL>
-                    <a:lnR w="0">
-                      <a:noFill/>
-                    </a:lnR>
-                    <a:lnT w="0">
-                      <a:noFill/>
-                    </a:lnT>
-                    <a:lnB w="9525">
-                      <a:solidFill>
-                        <a:srgbClr val="EFEFEF"/>
-                      </a:solidFill>
-                    </a:lnB>
-                    <a:noFill/>
-                  </a:tcPr>
-                </a:tc>
-                <a:tc>
-                  <a:txBody>
-                    <a:bodyPr wrap="square"/>
-                    <a:lstStyle/>
-                    <a:p>
-                      <a:pPr algn="ctr"/>
-                      <a:r>
-                        <a:rPr sz="950" b="0">
-                          <a:solidFill>
-                            <a:srgbClr val="595959"/>
-                          </a:solidFill>
-                          <a:latin typeface="Montserrat Medium"/>
-                          <a:ea typeface="Montserrat Medium"/>
-                          <a:cs typeface="Montserrat Medium"/>
-                          <a:sym typeface="Montserrat Medium"/>
-                        </a:rPr>
-                        <a:t>R$ 216.344</a:t>
-                      </a:r>
-                    </a:p>
-                  </a:txBody>
-                  <a:tcPr marL="45720" marR="45720" marT="18288" marB="18288" anchor="t">
-                    <a:lnL w="0">
-                      <a:noFill/>
-                    </a:lnL>
-                    <a:lnR w="0">
-                      <a:noFill/>
-                    </a:lnR>
-                    <a:lnT w="0">
-                      <a:noFill/>
-                    </a:lnT>
-                    <a:lnB w="9525">
-                      <a:solidFill>
-                        <a:srgbClr val="EFEFEF"/>
-                      </a:solidFill>
-                    </a:lnB>
-                    <a:noFill/>
-                  </a:tcPr>
-                </a:tc>
-                <a:tc>
-                  <a:txBody>
-                    <a:bodyPr wrap="square"/>
-                    <a:lstStyle/>
-                    <a:p>
-                      <a:pPr algn="ctr"/>
-                      <a:r>
-                        <a:rPr sz="950" b="0">
-                          <a:solidFill>
-                            <a:srgbClr val="595959"/>
-                          </a:solidFill>
-                          <a:latin typeface="Montserrat Medium"/>
-                          <a:ea typeface="Montserrat Medium"/>
-                          <a:cs typeface="Montserrat Medium"/>
-                          <a:sym typeface="Montserrat Medium"/>
-                        </a:rPr>
-                        <a:t>R$ 179.425</a:t>
-                      </a:r>
-                    </a:p>
-                  </a:txBody>
-                  <a:tcPr marL="45720" marR="45720" marT="18288" marB="18288" anchor="t">
-                    <a:lnL w="0">
-                      <a:noFill/>
-                    </a:lnL>
-                    <a:lnR w="0">
-                      <a:noFill/>
-                    </a:lnR>
-                    <a:lnT w="0">
-                      <a:noFill/>
-                    </a:lnT>
-                    <a:lnB w="9525">
-                      <a:solidFill>
-                        <a:srgbClr val="EFEFEF"/>
-                      </a:solidFill>
-                    </a:lnB>
-                    <a:noFill/>
-                  </a:tcPr>
-                </a:tc>
-                <a:tc>
-                  <a:txBody>
-                    <a:bodyPr wrap="square"/>
-                    <a:lstStyle/>
-                    <a:p>
-                      <a:pPr algn="ctr"/>
-                      <a:r>
-                        <a:rPr sz="950" b="0">
-                          <a:solidFill>
-                            <a:srgbClr val="595959"/>
-                          </a:solidFill>
-                          <a:latin typeface="Montserrat Medium"/>
-                          <a:ea typeface="Montserrat Medium"/>
-                          <a:cs typeface="Montserrat Medium"/>
-                          <a:sym typeface="Montserrat Medium"/>
-                        </a:rPr>
-                        <a:t>83%</a:t>
-                      </a:r>
-                    </a:p>
-                  </a:txBody>
-                  <a:tcPr marL="45720" marR="45720" marT="18288" marB="18288" anchor="t">
-                    <a:lnL w="0">
-                      <a:noFill/>
-                    </a:lnL>
-                    <a:lnR w="0">
-                      <a:noFill/>
-                    </a:lnR>
-                    <a:lnT w="0">
-                      <a:noFill/>
-                    </a:lnT>
-                    <a:lnB w="9525">
-                      <a:solidFill>
-                        <a:srgbClr val="EFEFEF"/>
-                      </a:solidFill>
-                    </a:lnB>
-                    <a:noFill/>
-                  </a:tcPr>
-                </a:tc>
-                <a:tc>
-                  <a:txBody>
-                    <a:bodyPr wrap="square"/>
-                    <a:lstStyle/>
-                    <a:p>
-                      <a:pPr algn="ctr"/>
-                      <a:r>
-                        <a:rPr sz="950" b="0">
-                          <a:solidFill>
-                            <a:srgbClr val="C5221F"/>
-                          </a:solidFill>
-                          <a:latin typeface="Montserrat Medium"/>
-                          <a:ea typeface="Montserrat Medium"/>
-                          <a:cs typeface="Montserrat Medium"/>
-                          <a:sym typeface="Montserrat Medium"/>
-                        </a:rPr>
-                        <a:t>-R$ 36.919</a:t>
-                      </a:r>
-                    </a:p>
-                  </a:txBody>
-                  <a:tcPr marL="45720" marR="45720" marT="18288" marB="18288" anchor="t">
-                    <a:lnL w="0">
-                      <a:noFill/>
-                    </a:lnL>
-                    <a:lnR w="0">
-                      <a:noFill/>
-                    </a:lnR>
-                    <a:lnT w="0">
-                      <a:noFill/>
-                    </a:lnT>
-                    <a:lnB w="9525">
-                      <a:solidFill>
-                        <a:srgbClr val="EFEFEF"/>
-                      </a:solidFill>
-                    </a:lnB>
-                    <a:noFill/>
-                  </a:tcPr>
-                </a:tc>
-              </a:tr>
-            </a:tbl>
-          </a:graphicData>
-        </a:graphic>
-      </p:graphicFrame>
     </p:spTree>
   </p:cSld>
   <p:clrMapOvr>
